--- a/JAVA 프로젝트.pptx
+++ b/JAVA 프로젝트.pptx
@@ -5,7 +5,7 @@
     <p:sldMasterId id="2147483648" r:id="rId1"/>
   </p:sldMasterIdLst>
   <p:notesMasterIdLst>
-    <p:notesMasterId r:id="rId38"/>
+    <p:notesMasterId r:id="rId44"/>
   </p:notesMasterIdLst>
   <p:sldIdLst>
     <p:sldId id="256" r:id="rId2"/>
@@ -30,20 +30,26 @@
     <p:sldId id="283" r:id="rId21"/>
     <p:sldId id="284" r:id="rId22"/>
     <p:sldId id="288" r:id="rId23"/>
-    <p:sldId id="290" r:id="rId24"/>
-    <p:sldId id="292" r:id="rId25"/>
-    <p:sldId id="293" r:id="rId26"/>
-    <p:sldId id="294" r:id="rId27"/>
-    <p:sldId id="291" r:id="rId28"/>
-    <p:sldId id="295" r:id="rId29"/>
-    <p:sldId id="296" r:id="rId30"/>
-    <p:sldId id="300" r:id="rId31"/>
-    <p:sldId id="301" r:id="rId32"/>
-    <p:sldId id="297" r:id="rId33"/>
-    <p:sldId id="302" r:id="rId34"/>
-    <p:sldId id="299" r:id="rId35"/>
-    <p:sldId id="298" r:id="rId36"/>
-    <p:sldId id="289" r:id="rId37"/>
+    <p:sldId id="303" r:id="rId24"/>
+    <p:sldId id="290" r:id="rId25"/>
+    <p:sldId id="307" r:id="rId26"/>
+    <p:sldId id="292" r:id="rId27"/>
+    <p:sldId id="306" r:id="rId28"/>
+    <p:sldId id="293" r:id="rId29"/>
+    <p:sldId id="294" r:id="rId30"/>
+    <p:sldId id="291" r:id="rId31"/>
+    <p:sldId id="295" r:id="rId32"/>
+    <p:sldId id="296" r:id="rId33"/>
+    <p:sldId id="300" r:id="rId34"/>
+    <p:sldId id="301" r:id="rId35"/>
+    <p:sldId id="297" r:id="rId36"/>
+    <p:sldId id="302" r:id="rId37"/>
+    <p:sldId id="299" r:id="rId38"/>
+    <p:sldId id="298" r:id="rId39"/>
+    <p:sldId id="289" r:id="rId40"/>
+    <p:sldId id="305" r:id="rId41"/>
+    <p:sldId id="308" r:id="rId42"/>
+    <p:sldId id="309" r:id="rId43"/>
   </p:sldIdLst>
   <p:sldSz cx="12192000" cy="6858000"/>
   <p:notesSz cx="6858000" cy="9144000"/>
@@ -181,8 +187,11 @@
         <p14:section name="3주차" id="{93C68EA3-7766-42DA-8C6B-EC52ADE78EC3}">
           <p14:sldIdLst>
             <p14:sldId id="288"/>
+            <p14:sldId id="303"/>
             <p14:sldId id="290"/>
+            <p14:sldId id="307"/>
             <p14:sldId id="292"/>
+            <p14:sldId id="306"/>
             <p14:sldId id="293"/>
             <p14:sldId id="294"/>
             <p14:sldId id="291"/>
@@ -199,6 +208,9 @@
         <p14:section name="4주차" id="{271070FA-7EC8-4F1B-9E6F-EA2B489FBE42}">
           <p14:sldIdLst>
             <p14:sldId id="289"/>
+            <p14:sldId id="305"/>
+            <p14:sldId id="308"/>
+            <p14:sldId id="309"/>
           </p14:sldIdLst>
         </p14:section>
       </p14:sectionLst>
@@ -292,7 +304,7 @@
           <a:p>
             <a:fld id="{6A421879-8690-45B9-B753-A8359804E075}" type="datetimeFigureOut">
               <a:rPr lang="ko-KR" altLang="en-US" smtClean="0"/>
-              <a:t>2024-09-12</a:t>
+              <a:t>2025-01-06</a:t>
             </a:fld>
             <a:endParaRPr lang="ko-KR" altLang="en-US"/>
           </a:p>
@@ -1236,7 +1248,13 @@
   <p:cSld>
     <p:spTree>
       <p:nvGrpSpPr>
-        <p:cNvPr id="1" name=""/>
+        <p:cNvPr id="1" name="">
+          <a:extLst>
+            <a:ext uri="{FF2B5EF4-FFF2-40B4-BE49-F238E27FC236}">
+              <a16:creationId xmlns:a16="http://schemas.microsoft.com/office/drawing/2014/main" id="{78BF130D-22D6-85C1-29D5-05D3CD82C7FB}"/>
+            </a:ext>
+          </a:extLst>
+        </p:cNvPr>
         <p:cNvGrpSpPr/>
         <p:nvPr/>
       </p:nvGrpSpPr>
@@ -1250,7 +1268,13 @@
       </p:grpSpPr>
       <p:sp>
         <p:nvSpPr>
-          <p:cNvPr id="2" name="슬라이드 이미지 개체 틀 1"/>
+          <p:cNvPr id="2" name="슬라이드 이미지 개체 틀 1">
+            <a:extLst>
+              <a:ext uri="{FF2B5EF4-FFF2-40B4-BE49-F238E27FC236}">
+                <a16:creationId xmlns:a16="http://schemas.microsoft.com/office/drawing/2014/main" id="{CD72141D-2253-E01B-2859-630E9B6B9840}"/>
+              </a:ext>
+            </a:extLst>
+          </p:cNvPr>
           <p:cNvSpPr>
             <a:spLocks noGrp="1" noRot="1" noChangeAspect="1"/>
           </p:cNvSpPr>
@@ -1262,7 +1286,13 @@
       </p:sp>
       <p:sp>
         <p:nvSpPr>
-          <p:cNvPr id="3" name="슬라이드 노트 개체 틀 2"/>
+          <p:cNvPr id="3" name="슬라이드 노트 개체 틀 2">
+            <a:extLst>
+              <a:ext uri="{FF2B5EF4-FFF2-40B4-BE49-F238E27FC236}">
+                <a16:creationId xmlns:a16="http://schemas.microsoft.com/office/drawing/2014/main" id="{84274D2E-3D6A-7CBB-9F43-310DDC67D8BB}"/>
+              </a:ext>
+            </a:extLst>
+          </p:cNvPr>
           <p:cNvSpPr>
             <a:spLocks noGrp="1"/>
           </p:cNvSpPr>
@@ -1281,7 +1311,13 @@
       </p:sp>
       <p:sp>
         <p:nvSpPr>
-          <p:cNvPr id="4" name="슬라이드 번호 개체 틀 3"/>
+          <p:cNvPr id="4" name="슬라이드 번호 개체 틀 3">
+            <a:extLst>
+              <a:ext uri="{FF2B5EF4-FFF2-40B4-BE49-F238E27FC236}">
+                <a16:creationId xmlns:a16="http://schemas.microsoft.com/office/drawing/2014/main" id="{215AA8F8-B493-6F3B-0BDD-960AB1D776C0}"/>
+              </a:ext>
+            </a:extLst>
+          </p:cNvPr>
           <p:cNvSpPr>
             <a:spLocks noGrp="1"/>
           </p:cNvSpPr>
@@ -1305,7 +1341,7 @@
     </p:spTree>
     <p:extLst>
       <p:ext uri="{BB962C8B-B14F-4D97-AF65-F5344CB8AC3E}">
-        <p14:creationId xmlns:p14="http://schemas.microsoft.com/office/powerpoint/2010/main" val="3535670814"/>
+        <p14:creationId xmlns:p14="http://schemas.microsoft.com/office/powerpoint/2010/main" val="3458044447"/>
       </p:ext>
     </p:extLst>
   </p:cSld>
@@ -1389,7 +1425,7 @@
     </p:spTree>
     <p:extLst>
       <p:ext uri="{BB962C8B-B14F-4D97-AF65-F5344CB8AC3E}">
-        <p14:creationId xmlns:p14="http://schemas.microsoft.com/office/powerpoint/2010/main" val="2067231508"/>
+        <p14:creationId xmlns:p14="http://schemas.microsoft.com/office/powerpoint/2010/main" val="3535670814"/>
       </p:ext>
     </p:extLst>
   </p:cSld>
@@ -1404,7 +1440,13 @@
   <p:cSld>
     <p:spTree>
       <p:nvGrpSpPr>
-        <p:cNvPr id="1" name=""/>
+        <p:cNvPr id="1" name="">
+          <a:extLst>
+            <a:ext uri="{FF2B5EF4-FFF2-40B4-BE49-F238E27FC236}">
+              <a16:creationId xmlns:a16="http://schemas.microsoft.com/office/drawing/2014/main" id="{3687A8E6-88E1-B47B-E437-C02818F2008B}"/>
+            </a:ext>
+          </a:extLst>
+        </p:cNvPr>
         <p:cNvGrpSpPr/>
         <p:nvPr/>
       </p:nvGrpSpPr>
@@ -1418,7 +1460,13 @@
       </p:grpSpPr>
       <p:sp>
         <p:nvSpPr>
-          <p:cNvPr id="2" name="슬라이드 이미지 개체 틀 1"/>
+          <p:cNvPr id="2" name="슬라이드 이미지 개체 틀 1">
+            <a:extLst>
+              <a:ext uri="{FF2B5EF4-FFF2-40B4-BE49-F238E27FC236}">
+                <a16:creationId xmlns:a16="http://schemas.microsoft.com/office/drawing/2014/main" id="{0C1C92AB-861C-6CB6-3002-CBCB2A5F0CA0}"/>
+              </a:ext>
+            </a:extLst>
+          </p:cNvPr>
           <p:cNvSpPr>
             <a:spLocks noGrp="1" noRot="1" noChangeAspect="1"/>
           </p:cNvSpPr>
@@ -1430,7 +1478,13 @@
       </p:sp>
       <p:sp>
         <p:nvSpPr>
-          <p:cNvPr id="3" name="슬라이드 노트 개체 틀 2"/>
+          <p:cNvPr id="3" name="슬라이드 노트 개체 틀 2">
+            <a:extLst>
+              <a:ext uri="{FF2B5EF4-FFF2-40B4-BE49-F238E27FC236}">
+                <a16:creationId xmlns:a16="http://schemas.microsoft.com/office/drawing/2014/main" id="{F50AFF31-BB3A-8D1E-DBFA-E69CE434C161}"/>
+              </a:ext>
+            </a:extLst>
+          </p:cNvPr>
           <p:cNvSpPr>
             <a:spLocks noGrp="1"/>
           </p:cNvSpPr>
@@ -1449,7 +1503,13 @@
       </p:sp>
       <p:sp>
         <p:nvSpPr>
-          <p:cNvPr id="4" name="슬라이드 번호 개체 틀 3"/>
+          <p:cNvPr id="4" name="슬라이드 번호 개체 틀 3">
+            <a:extLst>
+              <a:ext uri="{FF2B5EF4-FFF2-40B4-BE49-F238E27FC236}">
+                <a16:creationId xmlns:a16="http://schemas.microsoft.com/office/drawing/2014/main" id="{F45AEC94-A93F-8FAF-A9DA-25AA99070E18}"/>
+              </a:ext>
+            </a:extLst>
+          </p:cNvPr>
           <p:cNvSpPr>
             <a:spLocks noGrp="1"/>
           </p:cNvSpPr>
@@ -1473,7 +1533,7 @@
     </p:spTree>
     <p:extLst>
       <p:ext uri="{BB962C8B-B14F-4D97-AF65-F5344CB8AC3E}">
-        <p14:creationId xmlns:p14="http://schemas.microsoft.com/office/powerpoint/2010/main" val="2305615040"/>
+        <p14:creationId xmlns:p14="http://schemas.microsoft.com/office/powerpoint/2010/main" val="1861026081"/>
       </p:ext>
     </p:extLst>
   </p:cSld>
@@ -1641,7 +1701,7 @@
     </p:spTree>
     <p:extLst>
       <p:ext uri="{BB962C8B-B14F-4D97-AF65-F5344CB8AC3E}">
-        <p14:creationId xmlns:p14="http://schemas.microsoft.com/office/powerpoint/2010/main" val="1118939825"/>
+        <p14:creationId xmlns:p14="http://schemas.microsoft.com/office/powerpoint/2010/main" val="2067231508"/>
       </p:ext>
     </p:extLst>
   </p:cSld>
@@ -1656,7 +1716,13 @@
   <p:cSld>
     <p:spTree>
       <p:nvGrpSpPr>
-        <p:cNvPr id="1" name=""/>
+        <p:cNvPr id="1" name="">
+          <a:extLst>
+            <a:ext uri="{FF2B5EF4-FFF2-40B4-BE49-F238E27FC236}">
+              <a16:creationId xmlns:a16="http://schemas.microsoft.com/office/drawing/2014/main" id="{2BCA98A3-38D9-25E1-0FE0-E6489D31E12A}"/>
+            </a:ext>
+          </a:extLst>
+        </p:cNvPr>
         <p:cNvGrpSpPr/>
         <p:nvPr/>
       </p:nvGrpSpPr>
@@ -1670,7 +1736,13 @@
       </p:grpSpPr>
       <p:sp>
         <p:nvSpPr>
-          <p:cNvPr id="2" name="슬라이드 이미지 개체 틀 1"/>
+          <p:cNvPr id="2" name="슬라이드 이미지 개체 틀 1">
+            <a:extLst>
+              <a:ext uri="{FF2B5EF4-FFF2-40B4-BE49-F238E27FC236}">
+                <a16:creationId xmlns:a16="http://schemas.microsoft.com/office/drawing/2014/main" id="{44225D1D-2340-506A-6FF4-001F4EB5635C}"/>
+              </a:ext>
+            </a:extLst>
+          </p:cNvPr>
           <p:cNvSpPr>
             <a:spLocks noGrp="1" noRot="1" noChangeAspect="1"/>
           </p:cNvSpPr>
@@ -1682,7 +1754,13 @@
       </p:sp>
       <p:sp>
         <p:nvSpPr>
-          <p:cNvPr id="3" name="슬라이드 노트 개체 틀 2"/>
+          <p:cNvPr id="3" name="슬라이드 노트 개체 틀 2">
+            <a:extLst>
+              <a:ext uri="{FF2B5EF4-FFF2-40B4-BE49-F238E27FC236}">
+                <a16:creationId xmlns:a16="http://schemas.microsoft.com/office/drawing/2014/main" id="{F0332F5F-776A-1E25-103F-A703FFE3AB8D}"/>
+              </a:ext>
+            </a:extLst>
+          </p:cNvPr>
           <p:cNvSpPr>
             <a:spLocks noGrp="1"/>
           </p:cNvSpPr>
@@ -1701,7 +1779,13 @@
       </p:sp>
       <p:sp>
         <p:nvSpPr>
-          <p:cNvPr id="4" name="슬라이드 번호 개체 틀 3"/>
+          <p:cNvPr id="4" name="슬라이드 번호 개체 틀 3">
+            <a:extLst>
+              <a:ext uri="{FF2B5EF4-FFF2-40B4-BE49-F238E27FC236}">
+                <a16:creationId xmlns:a16="http://schemas.microsoft.com/office/drawing/2014/main" id="{98CB1BB2-1596-69AE-7CE7-158D38F85D3E}"/>
+              </a:ext>
+            </a:extLst>
+          </p:cNvPr>
           <p:cNvSpPr>
             <a:spLocks noGrp="1"/>
           </p:cNvSpPr>
@@ -1725,7 +1809,7 @@
     </p:spTree>
     <p:extLst>
       <p:ext uri="{BB962C8B-B14F-4D97-AF65-F5344CB8AC3E}">
-        <p14:creationId xmlns:p14="http://schemas.microsoft.com/office/powerpoint/2010/main" val="2510636628"/>
+        <p14:creationId xmlns:p14="http://schemas.microsoft.com/office/powerpoint/2010/main" val="1654491166"/>
       </p:ext>
     </p:extLst>
   </p:cSld>
@@ -1809,7 +1893,7 @@
     </p:spTree>
     <p:extLst>
       <p:ext uri="{BB962C8B-B14F-4D97-AF65-F5344CB8AC3E}">
-        <p14:creationId xmlns:p14="http://schemas.microsoft.com/office/powerpoint/2010/main" val="639978043"/>
+        <p14:creationId xmlns:p14="http://schemas.microsoft.com/office/powerpoint/2010/main" val="2305615040"/>
       </p:ext>
     </p:extLst>
   </p:cSld>
@@ -1893,7 +1977,7 @@
     </p:spTree>
     <p:extLst>
       <p:ext uri="{BB962C8B-B14F-4D97-AF65-F5344CB8AC3E}">
-        <p14:creationId xmlns:p14="http://schemas.microsoft.com/office/powerpoint/2010/main" val="3190406"/>
+        <p14:creationId xmlns:p14="http://schemas.microsoft.com/office/powerpoint/2010/main" val="1118939825"/>
       </p:ext>
     </p:extLst>
   </p:cSld>
@@ -1977,7 +2061,7 @@
     </p:spTree>
     <p:extLst>
       <p:ext uri="{BB962C8B-B14F-4D97-AF65-F5344CB8AC3E}">
-        <p14:creationId xmlns:p14="http://schemas.microsoft.com/office/powerpoint/2010/main" val="1689853184"/>
+        <p14:creationId xmlns:p14="http://schemas.microsoft.com/office/powerpoint/2010/main" val="2510636628"/>
       </p:ext>
     </p:extLst>
   </p:cSld>
@@ -2061,7 +2145,7 @@
     </p:spTree>
     <p:extLst>
       <p:ext uri="{BB962C8B-B14F-4D97-AF65-F5344CB8AC3E}">
-        <p14:creationId xmlns:p14="http://schemas.microsoft.com/office/powerpoint/2010/main" val="200195102"/>
+        <p14:creationId xmlns:p14="http://schemas.microsoft.com/office/powerpoint/2010/main" val="639978043"/>
       </p:ext>
     </p:extLst>
   </p:cSld>
@@ -2145,7 +2229,7 @@
     </p:spTree>
     <p:extLst>
       <p:ext uri="{BB962C8B-B14F-4D97-AF65-F5344CB8AC3E}">
-        <p14:creationId xmlns:p14="http://schemas.microsoft.com/office/powerpoint/2010/main" val="2457785876"/>
+        <p14:creationId xmlns:p14="http://schemas.microsoft.com/office/powerpoint/2010/main" val="3190406"/>
       </p:ext>
     </p:extLst>
   </p:cSld>
@@ -2229,7 +2313,7 @@
     </p:spTree>
     <p:extLst>
       <p:ext uri="{BB962C8B-B14F-4D97-AF65-F5344CB8AC3E}">
-        <p14:creationId xmlns:p14="http://schemas.microsoft.com/office/powerpoint/2010/main" val="1185459955"/>
+        <p14:creationId xmlns:p14="http://schemas.microsoft.com/office/powerpoint/2010/main" val="1689853184"/>
       </p:ext>
     </p:extLst>
   </p:cSld>
@@ -2313,7 +2397,7 @@
     </p:spTree>
     <p:extLst>
       <p:ext uri="{BB962C8B-B14F-4D97-AF65-F5344CB8AC3E}">
-        <p14:creationId xmlns:p14="http://schemas.microsoft.com/office/powerpoint/2010/main" val="1203773763"/>
+        <p14:creationId xmlns:p14="http://schemas.microsoft.com/office/powerpoint/2010/main" val="200195102"/>
       </p:ext>
     </p:extLst>
   </p:cSld>
@@ -2397,7 +2481,7 @@
     </p:spTree>
     <p:extLst>
       <p:ext uri="{BB962C8B-B14F-4D97-AF65-F5344CB8AC3E}">
-        <p14:creationId xmlns:p14="http://schemas.microsoft.com/office/powerpoint/2010/main" val="2626406194"/>
+        <p14:creationId xmlns:p14="http://schemas.microsoft.com/office/powerpoint/2010/main" val="2457785876"/>
       </p:ext>
     </p:extLst>
   </p:cSld>
@@ -2565,7 +2649,367 @@
     </p:spTree>
     <p:extLst>
       <p:ext uri="{BB962C8B-B14F-4D97-AF65-F5344CB8AC3E}">
+        <p14:creationId xmlns:p14="http://schemas.microsoft.com/office/powerpoint/2010/main" val="1185459955"/>
+      </p:ext>
+    </p:extLst>
+  </p:cSld>
+  <p:clrMapOvr>
+    <a:masterClrMapping/>
+  </p:clrMapOvr>
+</p:notes>
+</file>
+
+<file path=ppt/notesSlides/notesSlide31.xml><?xml version="1.0" encoding="utf-8"?>
+<p:notes xmlns:a="http://schemas.openxmlformats.org/drawingml/2006/main" xmlns:r="http://schemas.openxmlformats.org/officeDocument/2006/relationships" xmlns:p="http://schemas.openxmlformats.org/presentationml/2006/main">
+  <p:cSld>
+    <p:spTree>
+      <p:nvGrpSpPr>
+        <p:cNvPr id="1" name=""/>
+        <p:cNvGrpSpPr/>
+        <p:nvPr/>
+      </p:nvGrpSpPr>
+      <p:grpSpPr>
+        <a:xfrm>
+          <a:off x="0" y="0"/>
+          <a:ext cx="0" cy="0"/>
+          <a:chOff x="0" y="0"/>
+          <a:chExt cx="0" cy="0"/>
+        </a:xfrm>
+      </p:grpSpPr>
+      <p:sp>
+        <p:nvSpPr>
+          <p:cNvPr id="2" name="슬라이드 이미지 개체 틀 1"/>
+          <p:cNvSpPr>
+            <a:spLocks noGrp="1" noRot="1" noChangeAspect="1"/>
+          </p:cNvSpPr>
+          <p:nvPr>
+            <p:ph type="sldImg"/>
+          </p:nvPr>
+        </p:nvSpPr>
+        <p:spPr/>
+      </p:sp>
+      <p:sp>
+        <p:nvSpPr>
+          <p:cNvPr id="3" name="슬라이드 노트 개체 틀 2"/>
+          <p:cNvSpPr>
+            <a:spLocks noGrp="1"/>
+          </p:cNvSpPr>
+          <p:nvPr>
+            <p:ph type="body" idx="1"/>
+          </p:nvPr>
+        </p:nvSpPr>
+        <p:spPr/>
+        <p:txBody>
+          <a:bodyPr/>
+          <a:lstStyle/>
+          <a:p>
+            <a:endParaRPr lang="ko-KR" altLang="en-US" dirty="0"/>
+          </a:p>
+        </p:txBody>
+      </p:sp>
+      <p:sp>
+        <p:nvSpPr>
+          <p:cNvPr id="4" name="슬라이드 번호 개체 틀 3"/>
+          <p:cNvSpPr>
+            <a:spLocks noGrp="1"/>
+          </p:cNvSpPr>
+          <p:nvPr>
+            <p:ph type="sldNum" sz="quarter" idx="5"/>
+          </p:nvPr>
+        </p:nvSpPr>
+        <p:spPr/>
+        <p:txBody>
+          <a:bodyPr/>
+          <a:lstStyle/>
+          <a:p>
+            <a:fld id="{BAF342E1-9CE3-4275-A1ED-D116BDB0C4D7}" type="slidenum">
+              <a:rPr lang="ko-KR" altLang="en-US" smtClean="0"/>
+              <a:t>37</a:t>
+            </a:fld>
+            <a:endParaRPr lang="ko-KR" altLang="en-US"/>
+          </a:p>
+        </p:txBody>
+      </p:sp>
+    </p:spTree>
+    <p:extLst>
+      <p:ext uri="{BB962C8B-B14F-4D97-AF65-F5344CB8AC3E}">
+        <p14:creationId xmlns:p14="http://schemas.microsoft.com/office/powerpoint/2010/main" val="1203773763"/>
+      </p:ext>
+    </p:extLst>
+  </p:cSld>
+  <p:clrMapOvr>
+    <a:masterClrMapping/>
+  </p:clrMapOvr>
+</p:notes>
+</file>
+
+<file path=ppt/notesSlides/notesSlide32.xml><?xml version="1.0" encoding="utf-8"?>
+<p:notes xmlns:a="http://schemas.openxmlformats.org/drawingml/2006/main" xmlns:r="http://schemas.openxmlformats.org/officeDocument/2006/relationships" xmlns:p="http://schemas.openxmlformats.org/presentationml/2006/main">
+  <p:cSld>
+    <p:spTree>
+      <p:nvGrpSpPr>
+        <p:cNvPr id="1" name=""/>
+        <p:cNvGrpSpPr/>
+        <p:nvPr/>
+      </p:nvGrpSpPr>
+      <p:grpSpPr>
+        <a:xfrm>
+          <a:off x="0" y="0"/>
+          <a:ext cx="0" cy="0"/>
+          <a:chOff x="0" y="0"/>
+          <a:chExt cx="0" cy="0"/>
+        </a:xfrm>
+      </p:grpSpPr>
+      <p:sp>
+        <p:nvSpPr>
+          <p:cNvPr id="2" name="슬라이드 이미지 개체 틀 1"/>
+          <p:cNvSpPr>
+            <a:spLocks noGrp="1" noRot="1" noChangeAspect="1"/>
+          </p:cNvSpPr>
+          <p:nvPr>
+            <p:ph type="sldImg"/>
+          </p:nvPr>
+        </p:nvSpPr>
+        <p:spPr/>
+      </p:sp>
+      <p:sp>
+        <p:nvSpPr>
+          <p:cNvPr id="3" name="슬라이드 노트 개체 틀 2"/>
+          <p:cNvSpPr>
+            <a:spLocks noGrp="1"/>
+          </p:cNvSpPr>
+          <p:nvPr>
+            <p:ph type="body" idx="1"/>
+          </p:nvPr>
+        </p:nvSpPr>
+        <p:spPr/>
+        <p:txBody>
+          <a:bodyPr/>
+          <a:lstStyle/>
+          <a:p>
+            <a:endParaRPr lang="ko-KR" altLang="en-US" dirty="0"/>
+          </a:p>
+        </p:txBody>
+      </p:sp>
+      <p:sp>
+        <p:nvSpPr>
+          <p:cNvPr id="4" name="슬라이드 번호 개체 틀 3"/>
+          <p:cNvSpPr>
+            <a:spLocks noGrp="1"/>
+          </p:cNvSpPr>
+          <p:nvPr>
+            <p:ph type="sldNum" sz="quarter" idx="5"/>
+          </p:nvPr>
+        </p:nvSpPr>
+        <p:spPr/>
+        <p:txBody>
+          <a:bodyPr/>
+          <a:lstStyle/>
+          <a:p>
+            <a:fld id="{BAF342E1-9CE3-4275-A1ED-D116BDB0C4D7}" type="slidenum">
+              <a:rPr lang="ko-KR" altLang="en-US" smtClean="0"/>
+              <a:t>38</a:t>
+            </a:fld>
+            <a:endParaRPr lang="ko-KR" altLang="en-US"/>
+          </a:p>
+        </p:txBody>
+      </p:sp>
+    </p:spTree>
+    <p:extLst>
+      <p:ext uri="{BB962C8B-B14F-4D97-AF65-F5344CB8AC3E}">
+        <p14:creationId xmlns:p14="http://schemas.microsoft.com/office/powerpoint/2010/main" val="2626406194"/>
+      </p:ext>
+    </p:extLst>
+  </p:cSld>
+  <p:clrMapOvr>
+    <a:masterClrMapping/>
+  </p:clrMapOvr>
+</p:notes>
+</file>
+
+<file path=ppt/notesSlides/notesSlide33.xml><?xml version="1.0" encoding="utf-8"?>
+<p:notes xmlns:a="http://schemas.openxmlformats.org/drawingml/2006/main" xmlns:r="http://schemas.openxmlformats.org/officeDocument/2006/relationships" xmlns:p="http://schemas.openxmlformats.org/presentationml/2006/main">
+  <p:cSld>
+    <p:spTree>
+      <p:nvGrpSpPr>
+        <p:cNvPr id="1" name=""/>
+        <p:cNvGrpSpPr/>
+        <p:nvPr/>
+      </p:nvGrpSpPr>
+      <p:grpSpPr>
+        <a:xfrm>
+          <a:off x="0" y="0"/>
+          <a:ext cx="0" cy="0"/>
+          <a:chOff x="0" y="0"/>
+          <a:chExt cx="0" cy="0"/>
+        </a:xfrm>
+      </p:grpSpPr>
+      <p:sp>
+        <p:nvSpPr>
+          <p:cNvPr id="2" name="슬라이드 이미지 개체 틀 1"/>
+          <p:cNvSpPr>
+            <a:spLocks noGrp="1" noRot="1" noChangeAspect="1"/>
+          </p:cNvSpPr>
+          <p:nvPr>
+            <p:ph type="sldImg"/>
+          </p:nvPr>
+        </p:nvSpPr>
+        <p:spPr/>
+      </p:sp>
+      <p:sp>
+        <p:nvSpPr>
+          <p:cNvPr id="3" name="슬라이드 노트 개체 틀 2"/>
+          <p:cNvSpPr>
+            <a:spLocks noGrp="1"/>
+          </p:cNvSpPr>
+          <p:nvPr>
+            <p:ph type="body" idx="1"/>
+          </p:nvPr>
+        </p:nvSpPr>
+        <p:spPr/>
+        <p:txBody>
+          <a:bodyPr/>
+          <a:lstStyle/>
+          <a:p>
+            <a:endParaRPr lang="ko-KR" altLang="en-US" dirty="0"/>
+          </a:p>
+        </p:txBody>
+      </p:sp>
+      <p:sp>
+        <p:nvSpPr>
+          <p:cNvPr id="4" name="슬라이드 번호 개체 틀 3"/>
+          <p:cNvSpPr>
+            <a:spLocks noGrp="1"/>
+          </p:cNvSpPr>
+          <p:nvPr>
+            <p:ph type="sldNum" sz="quarter" idx="5"/>
+          </p:nvPr>
+        </p:nvSpPr>
+        <p:spPr/>
+        <p:txBody>
+          <a:bodyPr/>
+          <a:lstStyle/>
+          <a:p>
+            <a:fld id="{BAF342E1-9CE3-4275-A1ED-D116BDB0C4D7}" type="slidenum">
+              <a:rPr lang="ko-KR" altLang="en-US" smtClean="0"/>
+              <a:t>39</a:t>
+            </a:fld>
+            <a:endParaRPr lang="ko-KR" altLang="en-US"/>
+          </a:p>
+        </p:txBody>
+      </p:sp>
+    </p:spTree>
+    <p:extLst>
+      <p:ext uri="{BB962C8B-B14F-4D97-AF65-F5344CB8AC3E}">
         <p14:creationId xmlns:p14="http://schemas.microsoft.com/office/powerpoint/2010/main" val="3616274311"/>
+      </p:ext>
+    </p:extLst>
+  </p:cSld>
+  <p:clrMapOvr>
+    <a:masterClrMapping/>
+  </p:clrMapOvr>
+</p:notes>
+</file>
+
+<file path=ppt/notesSlides/notesSlide34.xml><?xml version="1.0" encoding="utf-8"?>
+<p:notes xmlns:a="http://schemas.openxmlformats.org/drawingml/2006/main" xmlns:r="http://schemas.openxmlformats.org/officeDocument/2006/relationships" xmlns:p="http://schemas.openxmlformats.org/presentationml/2006/main">
+  <p:cSld>
+    <p:spTree>
+      <p:nvGrpSpPr>
+        <p:cNvPr id="1" name="">
+          <a:extLst>
+            <a:ext uri="{FF2B5EF4-FFF2-40B4-BE49-F238E27FC236}">
+              <a16:creationId xmlns:a16="http://schemas.microsoft.com/office/drawing/2014/main" id="{AB783CE8-C4B2-46B9-8DD3-02ECF0E92B7A}"/>
+            </a:ext>
+          </a:extLst>
+        </p:cNvPr>
+        <p:cNvGrpSpPr/>
+        <p:nvPr/>
+      </p:nvGrpSpPr>
+      <p:grpSpPr>
+        <a:xfrm>
+          <a:off x="0" y="0"/>
+          <a:ext cx="0" cy="0"/>
+          <a:chOff x="0" y="0"/>
+          <a:chExt cx="0" cy="0"/>
+        </a:xfrm>
+      </p:grpSpPr>
+      <p:sp>
+        <p:nvSpPr>
+          <p:cNvPr id="2" name="슬라이드 이미지 개체 틀 1">
+            <a:extLst>
+              <a:ext uri="{FF2B5EF4-FFF2-40B4-BE49-F238E27FC236}">
+                <a16:creationId xmlns:a16="http://schemas.microsoft.com/office/drawing/2014/main" id="{FEBD5E1C-D031-C9CF-560B-B92481A040B4}"/>
+              </a:ext>
+            </a:extLst>
+          </p:cNvPr>
+          <p:cNvSpPr>
+            <a:spLocks noGrp="1" noRot="1" noChangeAspect="1"/>
+          </p:cNvSpPr>
+          <p:nvPr>
+            <p:ph type="sldImg"/>
+          </p:nvPr>
+        </p:nvSpPr>
+        <p:spPr/>
+      </p:sp>
+      <p:sp>
+        <p:nvSpPr>
+          <p:cNvPr id="3" name="슬라이드 노트 개체 틀 2">
+            <a:extLst>
+              <a:ext uri="{FF2B5EF4-FFF2-40B4-BE49-F238E27FC236}">
+                <a16:creationId xmlns:a16="http://schemas.microsoft.com/office/drawing/2014/main" id="{A4D896B2-2AB6-757C-85C9-08AE99946F8C}"/>
+              </a:ext>
+            </a:extLst>
+          </p:cNvPr>
+          <p:cNvSpPr>
+            <a:spLocks noGrp="1"/>
+          </p:cNvSpPr>
+          <p:nvPr>
+            <p:ph type="body" idx="1"/>
+          </p:nvPr>
+        </p:nvSpPr>
+        <p:spPr/>
+        <p:txBody>
+          <a:bodyPr/>
+          <a:lstStyle/>
+          <a:p>
+            <a:endParaRPr lang="ko-KR" altLang="en-US" dirty="0"/>
+          </a:p>
+        </p:txBody>
+      </p:sp>
+      <p:sp>
+        <p:nvSpPr>
+          <p:cNvPr id="4" name="슬라이드 번호 개체 틀 3">
+            <a:extLst>
+              <a:ext uri="{FF2B5EF4-FFF2-40B4-BE49-F238E27FC236}">
+                <a16:creationId xmlns:a16="http://schemas.microsoft.com/office/drawing/2014/main" id="{2A58E5CC-9C1F-F8CD-DA6E-F0B20192D29D}"/>
+              </a:ext>
+            </a:extLst>
+          </p:cNvPr>
+          <p:cNvSpPr>
+            <a:spLocks noGrp="1"/>
+          </p:cNvSpPr>
+          <p:nvPr>
+            <p:ph type="sldNum" sz="quarter" idx="5"/>
+          </p:nvPr>
+        </p:nvSpPr>
+        <p:spPr/>
+        <p:txBody>
+          <a:bodyPr/>
+          <a:lstStyle/>
+          <a:p>
+            <a:fld id="{BAF342E1-9CE3-4275-A1ED-D116BDB0C4D7}" type="slidenum">
+              <a:rPr lang="ko-KR" altLang="en-US" smtClean="0"/>
+              <a:t>40</a:t>
+            </a:fld>
+            <a:endParaRPr lang="ko-KR" altLang="en-US"/>
+          </a:p>
+        </p:txBody>
+      </p:sp>
+    </p:spTree>
+    <p:extLst>
+      <p:ext uri="{BB962C8B-B14F-4D97-AF65-F5344CB8AC3E}">
+        <p14:creationId xmlns:p14="http://schemas.microsoft.com/office/powerpoint/2010/main" val="1899351843"/>
       </p:ext>
     </p:extLst>
   </p:cSld>
@@ -3147,7 +3591,7 @@
           <a:p>
             <a:fld id="{2085FB34-40A6-4CE7-9DFE-FA5824B2280C}" type="datetimeFigureOut">
               <a:rPr lang="ko-KR" altLang="en-US" smtClean="0"/>
-              <a:t>2024-09-12</a:t>
+              <a:t>2025-01-06</a:t>
             </a:fld>
             <a:endParaRPr lang="ko-KR" altLang="en-US"/>
           </a:p>
@@ -3458,7 +3902,7 @@
           <a:p>
             <a:fld id="{2085FB34-40A6-4CE7-9DFE-FA5824B2280C}" type="datetimeFigureOut">
               <a:rPr lang="ko-KR" altLang="en-US" smtClean="0"/>
-              <a:t>2024-09-12</a:t>
+              <a:t>2025-01-06</a:t>
             </a:fld>
             <a:endParaRPr lang="ko-KR" altLang="en-US"/>
           </a:p>
@@ -3746,7 +4190,7 @@
           <a:p>
             <a:fld id="{2085FB34-40A6-4CE7-9DFE-FA5824B2280C}" type="datetimeFigureOut">
               <a:rPr lang="ko-KR" altLang="en-US" smtClean="0"/>
-              <a:t>2024-09-12</a:t>
+              <a:t>2025-01-06</a:t>
             </a:fld>
             <a:endParaRPr lang="ko-KR" altLang="en-US"/>
           </a:p>
@@ -3944,7 +4388,7 @@
           <a:p>
             <a:fld id="{2085FB34-40A6-4CE7-9DFE-FA5824B2280C}" type="datetimeFigureOut">
               <a:rPr lang="ko-KR" altLang="en-US" smtClean="0"/>
-              <a:t>2024-09-12</a:t>
+              <a:t>2025-01-06</a:t>
             </a:fld>
             <a:endParaRPr lang="ko-KR" altLang="en-US"/>
           </a:p>
@@ -4152,7 +4596,7 @@
           <a:p>
             <a:fld id="{2085FB34-40A6-4CE7-9DFE-FA5824B2280C}" type="datetimeFigureOut">
               <a:rPr lang="ko-KR" altLang="en-US" smtClean="0"/>
-              <a:t>2024-09-12</a:t>
+              <a:t>2025-01-06</a:t>
             </a:fld>
             <a:endParaRPr lang="ko-KR" altLang="en-US"/>
           </a:p>
@@ -4372,7 +4816,7 @@
           <a:p>
             <a:fld id="{2085FB34-40A6-4CE7-9DFE-FA5824B2280C}" type="datetimeFigureOut">
               <a:rPr lang="ko-KR" altLang="en-US" smtClean="0"/>
-              <a:t>2024-09-12</a:t>
+              <a:t>2025-01-06</a:t>
             </a:fld>
             <a:endParaRPr lang="ko-KR" altLang="en-US"/>
           </a:p>
@@ -4570,7 +5014,7 @@
           <a:p>
             <a:fld id="{2085FB34-40A6-4CE7-9DFE-FA5824B2280C}" type="datetimeFigureOut">
               <a:rPr lang="ko-KR" altLang="en-US" smtClean="0"/>
-              <a:t>2024-09-12</a:t>
+              <a:t>2025-01-06</a:t>
             </a:fld>
             <a:endParaRPr lang="ko-KR" altLang="en-US"/>
           </a:p>
@@ -4802,7 +5246,7 @@
           <a:p>
             <a:fld id="{2085FB34-40A6-4CE7-9DFE-FA5824B2280C}" type="datetimeFigureOut">
               <a:rPr lang="ko-KR" altLang="en-US" smtClean="0"/>
-              <a:t>2024-09-12</a:t>
+              <a:t>2025-01-06</a:t>
             </a:fld>
             <a:endParaRPr lang="ko-KR" altLang="en-US"/>
           </a:p>
@@ -5119,7 +5563,7 @@
           <a:p>
             <a:fld id="{2085FB34-40A6-4CE7-9DFE-FA5824B2280C}" type="datetimeFigureOut">
               <a:rPr lang="ko-KR" altLang="en-US" smtClean="0"/>
-              <a:t>2024-09-12</a:t>
+              <a:t>2025-01-06</a:t>
             </a:fld>
             <a:endParaRPr lang="ko-KR" altLang="en-US"/>
           </a:p>
@@ -5384,7 +5828,7 @@
           <a:p>
             <a:fld id="{2085FB34-40A6-4CE7-9DFE-FA5824B2280C}" type="datetimeFigureOut">
               <a:rPr lang="ko-KR" altLang="en-US" smtClean="0"/>
-              <a:t>2024-09-12</a:t>
+              <a:t>2025-01-06</a:t>
             </a:fld>
             <a:endParaRPr lang="ko-KR" altLang="en-US"/>
           </a:p>
@@ -5796,7 +6240,7 @@
           <a:p>
             <a:fld id="{2085FB34-40A6-4CE7-9DFE-FA5824B2280C}" type="datetimeFigureOut">
               <a:rPr lang="ko-KR" altLang="en-US" smtClean="0"/>
-              <a:t>2024-09-12</a:t>
+              <a:t>2025-01-06</a:t>
             </a:fld>
             <a:endParaRPr lang="ko-KR" altLang="en-US"/>
           </a:p>
@@ -5937,7 +6381,7 @@
           <a:p>
             <a:fld id="{2085FB34-40A6-4CE7-9DFE-FA5824B2280C}" type="datetimeFigureOut">
               <a:rPr lang="ko-KR" altLang="en-US" smtClean="0"/>
-              <a:t>2024-09-12</a:t>
+              <a:t>2025-01-06</a:t>
             </a:fld>
             <a:endParaRPr lang="ko-KR" altLang="en-US"/>
           </a:p>
@@ -6050,7 +6494,7 @@
           <a:p>
             <a:fld id="{2085FB34-40A6-4CE7-9DFE-FA5824B2280C}" type="datetimeFigureOut">
               <a:rPr lang="ko-KR" altLang="en-US" smtClean="0"/>
-              <a:t>2024-09-12</a:t>
+              <a:t>2025-01-06</a:t>
             </a:fld>
             <a:endParaRPr lang="ko-KR" altLang="en-US"/>
           </a:p>
@@ -6291,7 +6735,7 @@
           <a:p>
             <a:fld id="{2085FB34-40A6-4CE7-9DFE-FA5824B2280C}" type="datetimeFigureOut">
               <a:rPr lang="ko-KR" altLang="en-US" smtClean="0"/>
-              <a:t>2024-09-12</a:t>
+              <a:t>2025-01-06</a:t>
             </a:fld>
             <a:endParaRPr lang="ko-KR" altLang="en-US"/>
           </a:p>
@@ -7612,7 +8056,20 @@
               <a:rPr lang="ko-KR" altLang="en-US" dirty="0"/>
               <a:t>설정 후 다운로드</a:t>
             </a:r>
-            <a:endParaRPr lang="en-US" altLang="ko-KR" dirty="0"/>
+            <a:r>
+              <a:rPr lang="en-US" altLang="ko-KR" dirty="0"/>
+              <a:t>(</a:t>
+            </a:r>
+            <a:r>
+              <a:rPr lang="en-US" altLang="ko-KR" dirty="0">
+                <a:hlinkClick r:id="rId3"/>
+              </a:rPr>
+              <a:t>https://start.spring.io/</a:t>
+            </a:r>
+            <a:r>
+              <a:rPr lang="en-US" altLang="ko-KR" dirty="0"/>
+              <a:t>)	</a:t>
+            </a:r>
           </a:p>
         </p:txBody>
       </p:sp>
@@ -7671,7 +8128,7 @@
           <p:nvPr/>
         </p:nvPicPr>
         <p:blipFill>
-          <a:blip r:embed="rId3"/>
+          <a:blip r:embed="rId4"/>
           <a:stretch>
             <a:fillRect/>
           </a:stretch>
@@ -10127,11 +10584,19 @@
           <a:p>
             <a:r>
               <a:rPr lang="en-US" altLang="ko-KR" dirty="0"/>
-              <a:t>2</a:t>
-            </a:r>
-            <a:r>
-              <a:rPr lang="ko-KR" altLang="en-US" dirty="0"/>
-              <a:t>주차에 사용한 라이브러리 조사 및 라이브러리 조사</a:t>
+              <a:t>[</a:t>
+            </a:r>
+            <a:r>
+              <a:rPr lang="ko-KR" altLang="en-US" dirty="0"/>
+              <a:t>완료</a:t>
+            </a:r>
+            <a:r>
+              <a:rPr lang="en-US" altLang="ko-KR" dirty="0"/>
+              <a:t>] 2</a:t>
+            </a:r>
+            <a:r>
+              <a:rPr lang="ko-KR" altLang="en-US" dirty="0"/>
+              <a:t>주차에 사용한 라이브러리 조사 </a:t>
             </a:r>
             <a:r>
               <a:rPr lang="en-US" altLang="ko-KR" dirty="0"/>
@@ -10143,8 +10608,13 @@
             </a:r>
             <a:r>
               <a:rPr lang="en-US" altLang="ko-KR" dirty="0"/>
-              <a:t>)</a:t>
-            </a:r>
+              <a:t>) –&gt; </a:t>
+            </a:r>
+            <a:r>
+              <a:rPr lang="ko-KR" altLang="en-US" dirty="0"/>
+              <a:t>정리함 </a:t>
+            </a:r>
+            <a:endParaRPr lang="en-US" altLang="ko-KR" dirty="0"/>
           </a:p>
           <a:p>
             <a:r>
@@ -10195,7 +10665,15 @@
           <a:p>
             <a:r>
               <a:rPr lang="en-US" altLang="ko-KR" dirty="0"/>
-              <a:t>Authorization </a:t>
+              <a:t>[</a:t>
+            </a:r>
+            <a:r>
+              <a:rPr lang="ko-KR" altLang="en-US" dirty="0"/>
+              <a:t>완료</a:t>
+            </a:r>
+            <a:r>
+              <a:rPr lang="en-US" altLang="ko-KR" dirty="0"/>
+              <a:t>] Authorization </a:t>
             </a:r>
             <a:r>
               <a:rPr lang="ko-KR" altLang="en-US" dirty="0"/>
@@ -10210,10 +10688,10 @@
             </a:r>
             <a:r>
               <a:rPr lang="ko-KR" altLang="en-US" dirty="0"/>
-              <a:t>진행</a:t>
-            </a:r>
-            <a:r>
-              <a:rPr lang="en-US" altLang="ko-KR"/>
+              <a:t>완료</a:t>
+            </a:r>
+            <a:r>
+              <a:rPr lang="en-US" altLang="ko-KR" dirty="0"/>
               <a:t>] Headers </a:t>
             </a:r>
             <a:r>
@@ -10319,7 +10797,13 @@
   <p:cSld>
     <p:spTree>
       <p:nvGrpSpPr>
-        <p:cNvPr id="1" name=""/>
+        <p:cNvPr id="1" name="">
+          <a:extLst>
+            <a:ext uri="{FF2B5EF4-FFF2-40B4-BE49-F238E27FC236}">
+              <a16:creationId xmlns:a16="http://schemas.microsoft.com/office/drawing/2014/main" id="{E9CFC34C-C79C-E29D-90FD-2FD6CB914457}"/>
+            </a:ext>
+          </a:extLst>
+        </p:cNvPr>
         <p:cNvGrpSpPr/>
         <p:nvPr/>
       </p:nvGrpSpPr>
@@ -10336,7 +10820,7 @@
           <p:cNvPr id="2" name="제목 1">
             <a:extLst>
               <a:ext uri="{FF2B5EF4-FFF2-40B4-BE49-F238E27FC236}">
-                <a16:creationId xmlns:a16="http://schemas.microsoft.com/office/drawing/2014/main" id="{2AE3036C-B43A-6DCB-E1FE-FE8564BCA7F2}"/>
+                <a16:creationId xmlns:a16="http://schemas.microsoft.com/office/drawing/2014/main" id="{F865F453-9D27-35D6-A35B-C68A387720C6}"/>
               </a:ext>
             </a:extLst>
           </p:cNvPr>
@@ -10373,7 +10857,7 @@
           <p:cNvPr id="4" name="내용 개체 틀 3">
             <a:extLst>
               <a:ext uri="{FF2B5EF4-FFF2-40B4-BE49-F238E27FC236}">
-                <a16:creationId xmlns:a16="http://schemas.microsoft.com/office/drawing/2014/main" id="{6730909B-53BB-A414-EB29-F3688DC6631A}"/>
+                <a16:creationId xmlns:a16="http://schemas.microsoft.com/office/drawing/2014/main" id="{42A9F790-C8BC-2E86-1A29-B3837B2F4B09}"/>
               </a:ext>
             </a:extLst>
           </p:cNvPr>
@@ -10384,98 +10868,39 @@
             <p:ph idx="1"/>
           </p:nvPr>
         </p:nvSpPr>
-        <p:spPr/>
-        <p:txBody>
-          <a:bodyPr/>
-          <a:lstStyle/>
-          <a:p>
-            <a:pPr marL="457200" indent="-457200">
-              <a:buAutoNum type="arabicPeriod"/>
-            </a:pPr>
+        <p:spPr>
+          <a:xfrm>
+            <a:off x="838200" y="1802922"/>
+            <a:ext cx="10515600" cy="2388078"/>
+          </a:xfrm>
+        </p:spPr>
+        <p:txBody>
+          <a:bodyPr/>
+          <a:lstStyle/>
+          <a:p>
+            <a:r>
+              <a:rPr lang="ko-KR" altLang="en-US" dirty="0"/>
+              <a:t>사용하는 라이브러리</a:t>
+            </a:r>
+            <a:r>
+              <a:rPr lang="en-US" altLang="ko-KR" dirty="0"/>
+              <a:t>(./</a:t>
+            </a:r>
             <a:r>
               <a:rPr lang="en-US" altLang="ko-KR" dirty="0" err="1"/>
-              <a:t>url</a:t>
-            </a:r>
-            <a:r>
-              <a:rPr lang="en-US" altLang="ko-KR" dirty="0"/>
-              <a:t> </a:t>
-            </a:r>
-            <a:r>
-              <a:rPr lang="ko-KR" altLang="en-US" dirty="0"/>
-              <a:t>파라미터에 있던 </a:t>
-            </a:r>
-            <a:r>
-              <a:rPr lang="en-US" altLang="ko-KR" dirty="0" err="1"/>
-              <a:t>activitycode</a:t>
-            </a:r>
-            <a:r>
-              <a:rPr lang="ko-KR" altLang="en-US" dirty="0"/>
-              <a:t>를 </a:t>
-            </a:r>
-            <a:r>
-              <a:rPr lang="en-US" altLang="ko-KR" dirty="0"/>
-              <a:t>body</a:t>
-            </a:r>
-            <a:r>
-              <a:rPr lang="ko-KR" altLang="en-US" dirty="0"/>
-              <a:t>에 추가</a:t>
-            </a:r>
+              <a:t>build.gradle</a:t>
+            </a:r>
+            <a:r>
+              <a:rPr lang="en-US" altLang="ko-KR" dirty="0"/>
+              <a:t>)</a:t>
+            </a:r>
+          </a:p>
+          <a:p>
             <a:endParaRPr lang="en-US" altLang="ko-KR" dirty="0"/>
           </a:p>
           <a:p>
-            <a:pPr marL="457200" indent="-457200">
-              <a:buAutoNum type="arabicPeriod"/>
-            </a:pPr>
-            <a:r>
-              <a:rPr lang="en-US" altLang="ko-KR" dirty="0" err="1"/>
-              <a:t>Controller,Service</a:t>
-            </a:r>
-            <a:r>
-              <a:rPr lang="ko-KR" altLang="en-US" dirty="0"/>
-              <a:t>에서 파라미터에 있던 </a:t>
-            </a:r>
-            <a:r>
-              <a:rPr lang="en-US" altLang="ko-KR" dirty="0" err="1"/>
-              <a:t>activitycode</a:t>
-            </a:r>
-            <a:r>
-              <a:rPr lang="en-US" altLang="ko-KR" dirty="0"/>
-              <a:t>(id) </a:t>
-            </a:r>
-            <a:r>
-              <a:rPr lang="ko-KR" altLang="en-US" dirty="0"/>
-              <a:t>삭제 </a:t>
-            </a:r>
             <a:endParaRPr lang="en-US" altLang="ko-KR" dirty="0"/>
           </a:p>
-          <a:p>
-            <a:pPr marL="0" indent="0">
-              <a:buNone/>
-            </a:pPr>
-            <a:r>
-              <a:rPr lang="en-US" altLang="ko-KR" dirty="0"/>
-              <a:t>* DTO</a:t>
-            </a:r>
-            <a:r>
-              <a:rPr lang="ko-KR" altLang="en-US" dirty="0"/>
-              <a:t>에 </a:t>
-            </a:r>
-            <a:r>
-              <a:rPr lang="en-US" altLang="ko-KR" dirty="0" err="1"/>
-              <a:t>activitycode</a:t>
-            </a:r>
-            <a:r>
-              <a:rPr lang="ko-KR" altLang="en-US" dirty="0"/>
-              <a:t>가 이미 있는 값이었기 때문에 그대로 사용 </a:t>
-            </a:r>
-            <a:endParaRPr lang="en-US" altLang="ko-KR" dirty="0"/>
-          </a:p>
-          <a:p>
-            <a:endParaRPr lang="en-US" altLang="ko-KR" dirty="0"/>
-          </a:p>
-          <a:p>
-            <a:endParaRPr lang="en-US" altLang="ko-KR" dirty="0"/>
-          </a:p>
         </p:txBody>
       </p:sp>
       <p:sp>
@@ -10483,7 +10908,7 @@
           <p:cNvPr id="5" name="텍스트 개체 틀 4">
             <a:extLst>
               <a:ext uri="{FF2B5EF4-FFF2-40B4-BE49-F238E27FC236}">
-                <a16:creationId xmlns:a16="http://schemas.microsoft.com/office/drawing/2014/main" id="{85C7A296-B2F6-3D67-59FA-42EDBF286BC7}"/>
+                <a16:creationId xmlns:a16="http://schemas.microsoft.com/office/drawing/2014/main" id="{20E7EE6E-010B-9AF0-88CE-563063AADCC0}"/>
               </a:ext>
             </a:extLst>
           </p:cNvPr>
@@ -10500,22 +10925,13 @@
           <a:lstStyle/>
           <a:p>
             <a:r>
-              <a:rPr lang="en-US" altLang="ko-KR" b="1" dirty="0"/>
-              <a:t>: URL</a:t>
-            </a:r>
-            <a:r>
-              <a:rPr lang="ko-KR" altLang="en-US" b="1" dirty="0"/>
-              <a:t>에 포함된 파라미터를 </a:t>
-            </a:r>
-            <a:r>
-              <a:rPr lang="en-US" altLang="ko-KR" b="1" dirty="0"/>
-              <a:t>Request body</a:t>
-            </a:r>
-            <a:r>
-              <a:rPr lang="ko-KR" altLang="en-US" b="1" dirty="0"/>
-              <a:t>로 요청</a:t>
-            </a:r>
-            <a:endParaRPr lang="en-US" altLang="ko-KR" b="1" dirty="0"/>
+              <a:rPr lang="en-US" altLang="ko-KR" dirty="0"/>
+              <a:t>: </a:t>
+            </a:r>
+            <a:r>
+              <a:rPr lang="ko-KR" altLang="en-US" dirty="0"/>
+              <a:t>사용 라이브러리</a:t>
+            </a:r>
           </a:p>
         </p:txBody>
       </p:sp>
@@ -10524,7 +10940,7 @@
           <p:cNvPr id="9" name="그림 8">
             <a:extLst>
               <a:ext uri="{FF2B5EF4-FFF2-40B4-BE49-F238E27FC236}">
-                <a16:creationId xmlns:a16="http://schemas.microsoft.com/office/drawing/2014/main" id="{95EC6B23-8B12-0F98-AABF-808847E49CF4}"/>
+                <a16:creationId xmlns:a16="http://schemas.microsoft.com/office/drawing/2014/main" id="{B5E5C251-4828-B7BC-4B1C-035B1496B3E6}"/>
               </a:ext>
             </a:extLst>
           </p:cNvPr>
@@ -10534,65 +10950,695 @@
           <p:nvPr/>
         </p:nvPicPr>
         <p:blipFill>
-          <a:blip r:embed="rId3"/>
+          <a:blip r:embed="rId3">
+            <a:extLst>
+              <a:ext uri="{28A0092B-C50C-407E-A947-70E740481C1C}">
+                <a14:useLocalDpi xmlns:a14="http://schemas.microsoft.com/office/drawing/2010/main" val="0"/>
+              </a:ext>
+            </a:extLst>
+          </a:blip>
           <a:stretch>
             <a:fillRect/>
           </a:stretch>
         </p:blipFill>
         <p:spPr>
           <a:xfrm>
-            <a:off x="333154" y="3576952"/>
-            <a:ext cx="5365898" cy="1294062"/>
+            <a:off x="1161795" y="2247826"/>
+            <a:ext cx="6248655" cy="1825906"/>
           </a:xfrm>
           <a:prstGeom prst="rect">
             <a:avLst/>
           </a:prstGeom>
-          <a:ln>
-            <a:solidFill>
-              <a:schemeClr val="tx1"/>
-            </a:solidFill>
-          </a:ln>
         </p:spPr>
       </p:pic>
-      <p:pic>
-        <p:nvPicPr>
-          <p:cNvPr id="10" name="그림 9">
-            <a:extLst>
-              <a:ext uri="{FF2B5EF4-FFF2-40B4-BE49-F238E27FC236}">
-                <a16:creationId xmlns:a16="http://schemas.microsoft.com/office/drawing/2014/main" id="{845A1E76-D93E-1807-7871-D274AE308991}"/>
-              </a:ext>
-            </a:extLst>
-          </p:cNvPr>
-          <p:cNvPicPr>
-            <a:picLocks noChangeAspect="1"/>
-          </p:cNvPicPr>
+      <p:sp>
+        <p:nvSpPr>
+          <p:cNvPr id="15" name="내용 개체 틀 3">
+            <a:extLst>
+              <a:ext uri="{FF2B5EF4-FFF2-40B4-BE49-F238E27FC236}">
+                <a16:creationId xmlns:a16="http://schemas.microsoft.com/office/drawing/2014/main" id="{CEDA112D-6709-EA2B-D148-4DCBF3C66EAC}"/>
+              </a:ext>
+            </a:extLst>
+          </p:cNvPr>
+          <p:cNvSpPr txBox="1">
+            <a:spLocks/>
+          </p:cNvSpPr>
           <p:nvPr/>
-        </p:nvPicPr>
-        <p:blipFill>
-          <a:blip r:embed="rId4"/>
-          <a:stretch>
-            <a:fillRect/>
-          </a:stretch>
-        </p:blipFill>
+        </p:nvSpPr>
         <p:spPr>
           <a:xfrm>
-            <a:off x="6044746" y="3164059"/>
-            <a:ext cx="5940186" cy="3546068"/>
+            <a:off x="838200" y="4191000"/>
+            <a:ext cx="10515600" cy="2388078"/>
           </a:xfrm>
           <a:prstGeom prst="rect">
             <a:avLst/>
           </a:prstGeom>
+        </p:spPr>
+        <p:txBody>
+          <a:bodyPr vert="horz" lIns="91440" tIns="45720" rIns="91440" bIns="45720" rtlCol="0">
+            <a:normAutofit fontScale="92500" lnSpcReduction="10000"/>
+          </a:bodyPr>
+          <a:lstStyle>
+            <a:lvl1pPr marL="228600" indent="-228600" algn="l" defTabSz="914400" rtl="0" eaLnBrk="1" latinLnBrk="1" hangingPunct="1">
+              <a:lnSpc>
+                <a:spcPct val="90000"/>
+              </a:lnSpc>
+              <a:spcBef>
+                <a:spcPts val="1000"/>
+              </a:spcBef>
+              <a:buFont typeface="Arial" panose="020B0604020202020204" pitchFamily="34" charset="0"/>
+              <a:buChar char="•"/>
+              <a:defRPr sz="2000" kern="1200">
+                <a:solidFill>
+                  <a:schemeClr val="tx1"/>
+                </a:solidFill>
+                <a:latin typeface="+mn-lt"/>
+                <a:ea typeface="+mn-ea"/>
+                <a:cs typeface="+mn-cs"/>
+              </a:defRPr>
+            </a:lvl1pPr>
+            <a:lvl2pPr marL="685800" indent="-228600" algn="l" defTabSz="914400" rtl="0" eaLnBrk="1" latinLnBrk="1" hangingPunct="1">
+              <a:lnSpc>
+                <a:spcPct val="90000"/>
+              </a:lnSpc>
+              <a:spcBef>
+                <a:spcPts val="500"/>
+              </a:spcBef>
+              <a:buFont typeface="Arial" panose="020B0604020202020204" pitchFamily="34" charset="0"/>
+              <a:buChar char="•"/>
+              <a:defRPr sz="1800" kern="1200">
+                <a:solidFill>
+                  <a:schemeClr val="tx1"/>
+                </a:solidFill>
+                <a:latin typeface="+mn-lt"/>
+                <a:ea typeface="+mn-ea"/>
+                <a:cs typeface="+mn-cs"/>
+              </a:defRPr>
+            </a:lvl2pPr>
+            <a:lvl3pPr marL="1143000" indent="-228600" algn="l" defTabSz="914400" rtl="0" eaLnBrk="1" latinLnBrk="1" hangingPunct="1">
+              <a:lnSpc>
+                <a:spcPct val="90000"/>
+              </a:lnSpc>
+              <a:spcBef>
+                <a:spcPts val="500"/>
+              </a:spcBef>
+              <a:buFont typeface="Arial" panose="020B0604020202020204" pitchFamily="34" charset="0"/>
+              <a:buChar char="•"/>
+              <a:defRPr sz="1600" kern="1200">
+                <a:solidFill>
+                  <a:schemeClr val="tx1"/>
+                </a:solidFill>
+                <a:latin typeface="+mn-lt"/>
+                <a:ea typeface="+mn-ea"/>
+                <a:cs typeface="+mn-cs"/>
+              </a:defRPr>
+            </a:lvl3pPr>
+            <a:lvl4pPr marL="1600200" indent="-228600" algn="l" defTabSz="914400" rtl="0" eaLnBrk="1" latinLnBrk="1" hangingPunct="1">
+              <a:lnSpc>
+                <a:spcPct val="90000"/>
+              </a:lnSpc>
+              <a:spcBef>
+                <a:spcPts val="500"/>
+              </a:spcBef>
+              <a:buFont typeface="Arial" panose="020B0604020202020204" pitchFamily="34" charset="0"/>
+              <a:buChar char="•"/>
+              <a:defRPr sz="1400" kern="1200">
+                <a:solidFill>
+                  <a:schemeClr val="tx1"/>
+                </a:solidFill>
+                <a:latin typeface="+mn-lt"/>
+                <a:ea typeface="+mn-ea"/>
+                <a:cs typeface="+mn-cs"/>
+              </a:defRPr>
+            </a:lvl4pPr>
+            <a:lvl5pPr marL="2057400" indent="-228600" algn="l" defTabSz="914400" rtl="0" eaLnBrk="1" latinLnBrk="1" hangingPunct="1">
+              <a:lnSpc>
+                <a:spcPct val="90000"/>
+              </a:lnSpc>
+              <a:spcBef>
+                <a:spcPts val="500"/>
+              </a:spcBef>
+              <a:buFont typeface="Arial" panose="020B0604020202020204" pitchFamily="34" charset="0"/>
+              <a:buChar char="•"/>
+              <a:defRPr sz="1400" kern="1200">
+                <a:solidFill>
+                  <a:schemeClr val="tx1"/>
+                </a:solidFill>
+                <a:latin typeface="+mn-lt"/>
+                <a:ea typeface="+mn-ea"/>
+                <a:cs typeface="+mn-cs"/>
+              </a:defRPr>
+            </a:lvl5pPr>
+            <a:lvl6pPr marL="2514600" indent="-228600" algn="l" defTabSz="914400" rtl="0" eaLnBrk="1" latinLnBrk="1" hangingPunct="1">
+              <a:lnSpc>
+                <a:spcPct val="90000"/>
+              </a:lnSpc>
+              <a:spcBef>
+                <a:spcPts val="500"/>
+              </a:spcBef>
+              <a:buFont typeface="Arial" panose="020B0604020202020204" pitchFamily="34" charset="0"/>
+              <a:buChar char="•"/>
+              <a:defRPr sz="1800" kern="1200">
+                <a:solidFill>
+                  <a:schemeClr val="tx1"/>
+                </a:solidFill>
+                <a:latin typeface="+mn-lt"/>
+                <a:ea typeface="+mn-ea"/>
+                <a:cs typeface="+mn-cs"/>
+              </a:defRPr>
+            </a:lvl6pPr>
+            <a:lvl7pPr marL="2971800" indent="-228600" algn="l" defTabSz="914400" rtl="0" eaLnBrk="1" latinLnBrk="1" hangingPunct="1">
+              <a:lnSpc>
+                <a:spcPct val="90000"/>
+              </a:lnSpc>
+              <a:spcBef>
+                <a:spcPts val="500"/>
+              </a:spcBef>
+              <a:buFont typeface="Arial" panose="020B0604020202020204" pitchFamily="34" charset="0"/>
+              <a:buChar char="•"/>
+              <a:defRPr sz="1800" kern="1200">
+                <a:solidFill>
+                  <a:schemeClr val="tx1"/>
+                </a:solidFill>
+                <a:latin typeface="+mn-lt"/>
+                <a:ea typeface="+mn-ea"/>
+                <a:cs typeface="+mn-cs"/>
+              </a:defRPr>
+            </a:lvl7pPr>
+            <a:lvl8pPr marL="3429000" indent="-228600" algn="l" defTabSz="914400" rtl="0" eaLnBrk="1" latinLnBrk="1" hangingPunct="1">
+              <a:lnSpc>
+                <a:spcPct val="90000"/>
+              </a:lnSpc>
+              <a:spcBef>
+                <a:spcPts val="500"/>
+              </a:spcBef>
+              <a:buFont typeface="Arial" panose="020B0604020202020204" pitchFamily="34" charset="0"/>
+              <a:buChar char="•"/>
+              <a:defRPr sz="1800" kern="1200">
+                <a:solidFill>
+                  <a:schemeClr val="tx1"/>
+                </a:solidFill>
+                <a:latin typeface="+mn-lt"/>
+                <a:ea typeface="+mn-ea"/>
+                <a:cs typeface="+mn-cs"/>
+              </a:defRPr>
+            </a:lvl8pPr>
+            <a:lvl9pPr marL="3886200" indent="-228600" algn="l" defTabSz="914400" rtl="0" eaLnBrk="1" latinLnBrk="1" hangingPunct="1">
+              <a:lnSpc>
+                <a:spcPct val="90000"/>
+              </a:lnSpc>
+              <a:spcBef>
+                <a:spcPts val="500"/>
+              </a:spcBef>
+              <a:buFont typeface="Arial" panose="020B0604020202020204" pitchFamily="34" charset="0"/>
+              <a:buChar char="•"/>
+              <a:defRPr sz="1800" kern="1200">
+                <a:solidFill>
+                  <a:schemeClr val="tx1"/>
+                </a:solidFill>
+                <a:latin typeface="+mn-lt"/>
+                <a:ea typeface="+mn-ea"/>
+                <a:cs typeface="+mn-cs"/>
+              </a:defRPr>
+            </a:lvl9pPr>
+          </a:lstStyle>
+          <a:p>
+            <a:r>
+              <a:rPr lang="en-US" altLang="ko-KR" sz="1800" dirty="0"/>
+              <a:t>Dependencies block</a:t>
+            </a:r>
+            <a:r>
+              <a:rPr lang="ko-KR" altLang="en-US" sz="1800" dirty="0"/>
+              <a:t>이란 프로젝트를 구성하기 위해 </a:t>
+            </a:r>
+            <a:r>
+              <a:rPr lang="ko-KR" altLang="en-US" sz="1800" dirty="0" err="1"/>
+              <a:t>있어야하는</a:t>
+            </a:r>
+            <a:r>
+              <a:rPr lang="ko-KR" altLang="en-US" sz="1800" dirty="0"/>
+              <a:t> 라이브러리 목록임</a:t>
+            </a:r>
+            <a:endParaRPr lang="en-US" altLang="ko-KR" sz="1800" dirty="0"/>
+          </a:p>
+          <a:p>
+            <a:r>
+              <a:rPr lang="en-US" altLang="ko-KR" sz="1800" dirty="0"/>
+              <a:t>Implementation : </a:t>
+            </a:r>
+            <a:r>
+              <a:rPr lang="ko-KR" altLang="en-US" sz="1800" dirty="0"/>
+              <a:t>전체 범위에 적용</a:t>
+            </a:r>
+            <a:endParaRPr lang="en-US" altLang="ko-KR" sz="1800" dirty="0"/>
+          </a:p>
+          <a:p>
+            <a:r>
+              <a:rPr lang="en-US" altLang="ko-KR" sz="1800" dirty="0" err="1"/>
+              <a:t>compileOnly</a:t>
+            </a:r>
+            <a:r>
+              <a:rPr lang="en-US" altLang="ko-KR" sz="1800" dirty="0"/>
+              <a:t> : </a:t>
+            </a:r>
+            <a:r>
+              <a:rPr lang="ko-KR" altLang="en-US" sz="1800" dirty="0" err="1"/>
+              <a:t>컴파일할때</a:t>
+            </a:r>
+            <a:r>
+              <a:rPr lang="ko-KR" altLang="en-US" sz="1800" dirty="0"/>
+              <a:t> 사용</a:t>
+            </a:r>
+            <a:endParaRPr lang="en-US" altLang="ko-KR" sz="1800" dirty="0"/>
+          </a:p>
+          <a:p>
+            <a:r>
+              <a:rPr lang="en-US" altLang="ko-KR" sz="1800" dirty="0" err="1"/>
+              <a:t>developmentOnly</a:t>
+            </a:r>
+            <a:r>
+              <a:rPr lang="en-US" altLang="ko-KR" sz="1800" dirty="0"/>
+              <a:t> : </a:t>
+            </a:r>
+            <a:r>
+              <a:rPr lang="ko-KR" altLang="en-US" sz="1800" dirty="0"/>
+              <a:t>개발 시에만 사용</a:t>
+            </a:r>
+            <a:endParaRPr lang="en-US" altLang="ko-KR" sz="1800" dirty="0"/>
+          </a:p>
+          <a:p>
+            <a:r>
+              <a:rPr lang="en-US" altLang="ko-KR" sz="1800" dirty="0" err="1"/>
+              <a:t>annotationProcessor</a:t>
+            </a:r>
+            <a:r>
+              <a:rPr lang="en-US" altLang="ko-KR" sz="1800" dirty="0"/>
+              <a:t> : </a:t>
+            </a:r>
+            <a:r>
+              <a:rPr lang="ko-KR" altLang="en-US" sz="1800" dirty="0" err="1"/>
+              <a:t>어노테이션</a:t>
+            </a:r>
+            <a:r>
+              <a:rPr lang="ko-KR" altLang="en-US" sz="1800" dirty="0"/>
+              <a:t> 처리 및 </a:t>
+            </a:r>
+            <a:r>
+              <a:rPr lang="en-US" altLang="ko-KR" sz="1800" dirty="0"/>
+              <a:t>main</a:t>
+            </a:r>
+            <a:r>
+              <a:rPr lang="ko-KR" altLang="en-US" sz="1800" dirty="0"/>
+              <a:t>으로 세팅</a:t>
+            </a:r>
+            <a:endParaRPr lang="en-US" altLang="ko-KR" sz="1800" dirty="0"/>
+          </a:p>
+          <a:p>
+            <a:r>
+              <a:rPr lang="en-US" altLang="ko-KR" sz="1800" dirty="0" err="1"/>
+              <a:t>testImplementation</a:t>
+            </a:r>
+            <a:r>
+              <a:rPr lang="en-US" altLang="ko-KR" sz="1800" dirty="0"/>
+              <a:t> : test </a:t>
+            </a:r>
+            <a:r>
+              <a:rPr lang="ko-KR" altLang="en-US" sz="1800" dirty="0"/>
+              <a:t>소스에만 구현</a:t>
+            </a:r>
+            <a:endParaRPr lang="en-US" altLang="ko-KR" sz="1800" dirty="0"/>
+          </a:p>
+          <a:p>
+            <a:r>
+              <a:rPr lang="en-US" altLang="ko-KR" sz="1800" dirty="0" err="1"/>
+              <a:t>testRuntimeOnly</a:t>
+            </a:r>
+            <a:r>
+              <a:rPr lang="en-US" altLang="ko-KR" sz="1800" dirty="0"/>
+              <a:t> : test </a:t>
+            </a:r>
+            <a:r>
+              <a:rPr lang="ko-KR" altLang="en-US" sz="1800" dirty="0"/>
+              <a:t>소스에만 실행</a:t>
+            </a:r>
+            <a:r>
+              <a:rPr lang="en-US" altLang="ko-KR" sz="1800" dirty="0"/>
+              <a:t>  	</a:t>
+            </a:r>
+          </a:p>
+        </p:txBody>
+      </p:sp>
+      <p:sp>
+        <p:nvSpPr>
+          <p:cNvPr id="19" name="오른쪽 중괄호 18">
+            <a:extLst>
+              <a:ext uri="{FF2B5EF4-FFF2-40B4-BE49-F238E27FC236}">
+                <a16:creationId xmlns:a16="http://schemas.microsoft.com/office/drawing/2014/main" id="{1A573F95-1994-927E-D42F-03212A5EA6A4}"/>
+              </a:ext>
+            </a:extLst>
+          </p:cNvPr>
+          <p:cNvSpPr/>
+          <p:nvPr/>
+        </p:nvSpPr>
+        <p:spPr>
+          <a:xfrm>
+            <a:off x="7522935" y="2313054"/>
+            <a:ext cx="422220" cy="1695450"/>
+          </a:xfrm>
+          <a:prstGeom prst="rightBrace">
+            <a:avLst>
+              <a:gd name="adj1" fmla="val 8333"/>
+              <a:gd name="adj2" fmla="val 51124"/>
+            </a:avLst>
+          </a:prstGeom>
+        </p:spPr>
+        <p:style>
+          <a:lnRef idx="2">
+            <a:schemeClr val="accent1"/>
+          </a:lnRef>
+          <a:fillRef idx="0">
+            <a:schemeClr val="accent1"/>
+          </a:fillRef>
+          <a:effectRef idx="1">
+            <a:schemeClr val="accent1"/>
+          </a:effectRef>
+          <a:fontRef idx="minor">
+            <a:schemeClr val="tx1"/>
+          </a:fontRef>
+        </p:style>
+        <p:txBody>
+          <a:bodyPr rtlCol="0" anchor="ctr"/>
+          <a:lstStyle/>
+          <a:p>
+            <a:pPr algn="ctr"/>
+            <a:endParaRPr lang="ko-KR" altLang="en-US"/>
+          </a:p>
+        </p:txBody>
+      </p:sp>
+      <p:sp>
+        <p:nvSpPr>
+          <p:cNvPr id="20" name="TextBox 19">
+            <a:extLst>
+              <a:ext uri="{FF2B5EF4-FFF2-40B4-BE49-F238E27FC236}">
+                <a16:creationId xmlns:a16="http://schemas.microsoft.com/office/drawing/2014/main" id="{B2E715C0-A78D-25AA-D562-18D3094234BB}"/>
+              </a:ext>
+            </a:extLst>
+          </p:cNvPr>
+          <p:cNvSpPr txBox="1"/>
+          <p:nvPr/>
+        </p:nvSpPr>
+        <p:spPr>
+          <a:xfrm>
+            <a:off x="7996890" y="2837613"/>
+            <a:ext cx="3305175" cy="646331"/>
+          </a:xfrm>
+          <a:prstGeom prst="rect">
+            <a:avLst/>
+          </a:prstGeom>
+          <a:noFill/>
+        </p:spPr>
+        <p:txBody>
+          <a:bodyPr wrap="square" rtlCol="0">
+            <a:spAutoFit/>
+          </a:bodyPr>
+          <a:lstStyle/>
+          <a:p>
+            <a:r>
+              <a:rPr lang="en-US" altLang="ko-KR" dirty="0">
+                <a:solidFill>
+                  <a:schemeClr val="accent1">
+                    <a:lumMod val="75000"/>
+                  </a:schemeClr>
+                </a:solidFill>
+              </a:rPr>
+              <a:t>Dependencies block</a:t>
+            </a:r>
+          </a:p>
+          <a:p>
+            <a:r>
+              <a:rPr lang="en-US" altLang="ko-KR" dirty="0">
+                <a:solidFill>
+                  <a:schemeClr val="accent1">
+                    <a:lumMod val="75000"/>
+                  </a:schemeClr>
+                </a:solidFill>
+              </a:rPr>
+              <a:t>(Groovy </a:t>
+            </a:r>
+            <a:r>
+              <a:rPr lang="ko-KR" altLang="en-US" dirty="0">
+                <a:solidFill>
+                  <a:schemeClr val="accent1">
+                    <a:lumMod val="75000"/>
+                  </a:schemeClr>
+                </a:solidFill>
+              </a:rPr>
+              <a:t>기준</a:t>
+            </a:r>
+            <a:r>
+              <a:rPr lang="en-US" altLang="ko-KR" dirty="0">
+                <a:solidFill>
+                  <a:schemeClr val="accent1">
+                    <a:lumMod val="75000"/>
+                  </a:schemeClr>
+                </a:solidFill>
+              </a:rPr>
+              <a:t>)</a:t>
+            </a:r>
+            <a:endParaRPr lang="ko-KR" altLang="en-US" dirty="0">
+              <a:solidFill>
+                <a:schemeClr val="accent1">
+                  <a:lumMod val="75000"/>
+                </a:schemeClr>
+              </a:solidFill>
+            </a:endParaRPr>
+          </a:p>
+        </p:txBody>
+      </p:sp>
+      <p:sp>
+        <p:nvSpPr>
+          <p:cNvPr id="22" name="직사각형 21">
+            <a:extLst>
+              <a:ext uri="{FF2B5EF4-FFF2-40B4-BE49-F238E27FC236}">
+                <a16:creationId xmlns:a16="http://schemas.microsoft.com/office/drawing/2014/main" id="{53A9583E-BFA4-F562-E5F5-EE61E8F98370}"/>
+              </a:ext>
+            </a:extLst>
+          </p:cNvPr>
+          <p:cNvSpPr/>
+          <p:nvPr/>
+        </p:nvSpPr>
+        <p:spPr>
+          <a:xfrm>
+            <a:off x="5691670" y="3847476"/>
+            <a:ext cx="808660" cy="196797"/>
+          </a:xfrm>
+          <a:prstGeom prst="rect">
+            <a:avLst/>
+          </a:prstGeom>
+          <a:noFill/>
+          <a:ln>
+            <a:noFill/>
+          </a:ln>
+        </p:spPr>
+        <p:style>
+          <a:lnRef idx="2">
+            <a:schemeClr val="accent1">
+              <a:shade val="15000"/>
+            </a:schemeClr>
+          </a:lnRef>
+          <a:fillRef idx="1">
+            <a:schemeClr val="accent1"/>
+          </a:fillRef>
+          <a:effectRef idx="0">
+            <a:schemeClr val="accent1"/>
+          </a:effectRef>
+          <a:fontRef idx="minor">
+            <a:schemeClr val="lt1"/>
+          </a:fontRef>
+        </p:style>
+        <p:txBody>
+          <a:bodyPr rtlCol="0" anchor="ctr"/>
+          <a:lstStyle/>
+          <a:p>
+            <a:pPr algn="ctr"/>
+            <a:r>
+              <a:rPr lang="ko-KR" altLang="en-US" sz="900" b="1" dirty="0">
+                <a:solidFill>
+                  <a:schemeClr val="bg1"/>
+                </a:solidFill>
+              </a:rPr>
+              <a:t>라이브러리</a:t>
+            </a:r>
+          </a:p>
+        </p:txBody>
+      </p:sp>
+      <p:sp>
+        <p:nvSpPr>
+          <p:cNvPr id="34" name="직사각형 33">
+            <a:extLst>
+              <a:ext uri="{FF2B5EF4-FFF2-40B4-BE49-F238E27FC236}">
+                <a16:creationId xmlns:a16="http://schemas.microsoft.com/office/drawing/2014/main" id="{F611FC07-8CED-5EE9-ED59-7BD9127D3F07}"/>
+              </a:ext>
+            </a:extLst>
+          </p:cNvPr>
+          <p:cNvSpPr/>
+          <p:nvPr/>
+        </p:nvSpPr>
+        <p:spPr>
+          <a:xfrm>
+            <a:off x="1496883" y="3575084"/>
+            <a:ext cx="1315644" cy="238125"/>
+          </a:xfrm>
+          <a:prstGeom prst="rect">
+            <a:avLst/>
+          </a:prstGeom>
+          <a:noFill/>
           <a:ln>
             <a:solidFill>
-              <a:schemeClr val="tx1"/>
+              <a:schemeClr val="accent2">
+                <a:lumMod val="75000"/>
+              </a:schemeClr>
             </a:solidFill>
           </a:ln>
         </p:spPr>
-      </p:pic>
+        <p:style>
+          <a:lnRef idx="2">
+            <a:schemeClr val="accent1">
+              <a:shade val="15000"/>
+            </a:schemeClr>
+          </a:lnRef>
+          <a:fillRef idx="1">
+            <a:schemeClr val="accent1"/>
+          </a:fillRef>
+          <a:effectRef idx="0">
+            <a:schemeClr val="accent1"/>
+          </a:effectRef>
+          <a:fontRef idx="minor">
+            <a:schemeClr val="lt1"/>
+          </a:fontRef>
+        </p:style>
+        <p:txBody>
+          <a:bodyPr rtlCol="0" anchor="ctr"/>
+          <a:lstStyle/>
+          <a:p>
+            <a:pPr algn="ctr"/>
+            <a:endParaRPr lang="ko-KR" altLang="en-US" dirty="0"/>
+          </a:p>
+        </p:txBody>
+      </p:sp>
+      <p:sp>
+        <p:nvSpPr>
+          <p:cNvPr id="36" name="직사각형 35">
+            <a:extLst>
+              <a:ext uri="{FF2B5EF4-FFF2-40B4-BE49-F238E27FC236}">
+                <a16:creationId xmlns:a16="http://schemas.microsoft.com/office/drawing/2014/main" id="{1E86BDBB-5074-DC07-7A16-149D61C99E0D}"/>
+              </a:ext>
+            </a:extLst>
+          </p:cNvPr>
+          <p:cNvSpPr/>
+          <p:nvPr/>
+        </p:nvSpPr>
+        <p:spPr>
+          <a:xfrm>
+            <a:off x="1395894" y="3814018"/>
+            <a:ext cx="1426157" cy="257984"/>
+          </a:xfrm>
+          <a:prstGeom prst="rect">
+            <a:avLst/>
+          </a:prstGeom>
+          <a:noFill/>
+          <a:ln>
+            <a:noFill/>
+          </a:ln>
+        </p:spPr>
+        <p:style>
+          <a:lnRef idx="2">
+            <a:schemeClr val="accent1">
+              <a:shade val="15000"/>
+            </a:schemeClr>
+          </a:lnRef>
+          <a:fillRef idx="1">
+            <a:schemeClr val="accent1"/>
+          </a:fillRef>
+          <a:effectRef idx="0">
+            <a:schemeClr val="accent1"/>
+          </a:effectRef>
+          <a:fontRef idx="minor">
+            <a:schemeClr val="lt1"/>
+          </a:fontRef>
+        </p:style>
+        <p:txBody>
+          <a:bodyPr rtlCol="0" anchor="ctr"/>
+          <a:lstStyle/>
+          <a:p>
+            <a:pPr algn="ctr"/>
+            <a:r>
+              <a:rPr lang="ko-KR" altLang="en-US" sz="900" b="1" dirty="0">
+                <a:solidFill>
+                  <a:schemeClr val="bg1"/>
+                </a:solidFill>
+              </a:rPr>
+              <a:t>라이브러리 적용 범위</a:t>
+            </a:r>
+          </a:p>
+        </p:txBody>
+      </p:sp>
+      <p:sp>
+        <p:nvSpPr>
+          <p:cNvPr id="37" name="직사각형 36">
+            <a:extLst>
+              <a:ext uri="{FF2B5EF4-FFF2-40B4-BE49-F238E27FC236}">
+                <a16:creationId xmlns:a16="http://schemas.microsoft.com/office/drawing/2014/main" id="{43D18E64-2C2A-7B51-7B5E-83C1ACF73427}"/>
+              </a:ext>
+            </a:extLst>
+          </p:cNvPr>
+          <p:cNvSpPr/>
+          <p:nvPr/>
+        </p:nvSpPr>
+        <p:spPr>
+          <a:xfrm>
+            <a:off x="2848816" y="3565884"/>
+            <a:ext cx="3784023" cy="238125"/>
+          </a:xfrm>
+          <a:prstGeom prst="rect">
+            <a:avLst/>
+          </a:prstGeom>
+          <a:noFill/>
+          <a:ln>
+            <a:solidFill>
+              <a:srgbClr val="FFFF00"/>
+            </a:solidFill>
+          </a:ln>
+        </p:spPr>
+        <p:style>
+          <a:lnRef idx="2">
+            <a:schemeClr val="accent1">
+              <a:shade val="15000"/>
+            </a:schemeClr>
+          </a:lnRef>
+          <a:fillRef idx="1">
+            <a:schemeClr val="accent1"/>
+          </a:fillRef>
+          <a:effectRef idx="0">
+            <a:schemeClr val="accent1"/>
+          </a:effectRef>
+          <a:fontRef idx="minor">
+            <a:schemeClr val="lt1"/>
+          </a:fontRef>
+        </p:style>
+        <p:txBody>
+          <a:bodyPr rtlCol="0" anchor="ctr"/>
+          <a:lstStyle/>
+          <a:p>
+            <a:pPr algn="ctr"/>
+            <a:endParaRPr lang="ko-KR" altLang="en-US" dirty="0"/>
+          </a:p>
+        </p:txBody>
+      </p:sp>
     </p:spTree>
     <p:extLst>
       <p:ext uri="{BB962C8B-B14F-4D97-AF65-F5344CB8AC3E}">
-        <p14:creationId xmlns:p14="http://schemas.microsoft.com/office/powerpoint/2010/main" val="1478895112"/>
+        <p14:creationId xmlns:p14="http://schemas.microsoft.com/office/powerpoint/2010/main" val="4283484542"/>
       </p:ext>
     </p:extLst>
   </p:cSld>
@@ -10621,6 +11667,1214 @@
       </p:grpSpPr>
       <p:sp>
         <p:nvSpPr>
+          <p:cNvPr id="2" name="제목 1">
+            <a:extLst>
+              <a:ext uri="{FF2B5EF4-FFF2-40B4-BE49-F238E27FC236}">
+                <a16:creationId xmlns:a16="http://schemas.microsoft.com/office/drawing/2014/main" id="{2AE3036C-B43A-6DCB-E1FE-FE8564BCA7F2}"/>
+              </a:ext>
+            </a:extLst>
+          </p:cNvPr>
+          <p:cNvSpPr>
+            <a:spLocks noGrp="1"/>
+          </p:cNvSpPr>
+          <p:nvPr>
+            <p:ph type="title"/>
+          </p:nvPr>
+        </p:nvSpPr>
+        <p:spPr/>
+        <p:txBody>
+          <a:bodyPr/>
+          <a:lstStyle/>
+          <a:p>
+            <a:r>
+              <a:rPr lang="en-US" altLang="ko-KR" dirty="0"/>
+              <a:t>3</a:t>
+            </a:r>
+            <a:r>
+              <a:rPr lang="ko-KR" altLang="en-US" dirty="0"/>
+              <a:t>주차 </a:t>
+            </a:r>
+            <a:r>
+              <a:rPr lang="en-US" altLang="ko-KR" dirty="0"/>
+              <a:t>: API</a:t>
+            </a:r>
+            <a:endParaRPr lang="ko-KR" altLang="en-US" dirty="0"/>
+          </a:p>
+        </p:txBody>
+      </p:sp>
+      <p:sp>
+        <p:nvSpPr>
+          <p:cNvPr id="4" name="내용 개체 틀 3">
+            <a:extLst>
+              <a:ext uri="{FF2B5EF4-FFF2-40B4-BE49-F238E27FC236}">
+                <a16:creationId xmlns:a16="http://schemas.microsoft.com/office/drawing/2014/main" id="{6730909B-53BB-A414-EB29-F3688DC6631A}"/>
+              </a:ext>
+            </a:extLst>
+          </p:cNvPr>
+          <p:cNvSpPr>
+            <a:spLocks noGrp="1"/>
+          </p:cNvSpPr>
+          <p:nvPr>
+            <p:ph idx="1"/>
+          </p:nvPr>
+        </p:nvSpPr>
+        <p:spPr/>
+        <p:txBody>
+          <a:bodyPr/>
+          <a:lstStyle/>
+          <a:p>
+            <a:pPr marL="457200" indent="-457200">
+              <a:buAutoNum type="arabicPeriod"/>
+            </a:pPr>
+            <a:r>
+              <a:rPr lang="en-US" altLang="ko-KR" dirty="0"/>
+              <a:t>Request</a:t>
+            </a:r>
+            <a:r>
+              <a:rPr lang="ko-KR" altLang="en-US" dirty="0"/>
+              <a:t> </a:t>
+            </a:r>
+            <a:r>
+              <a:rPr lang="en-US" altLang="ko-KR" dirty="0"/>
+              <a:t>DTO</a:t>
+            </a:r>
+            <a:r>
+              <a:rPr lang="ko-KR" altLang="en-US" dirty="0"/>
+              <a:t> 생성 </a:t>
+            </a:r>
+            <a:endParaRPr lang="en-US" altLang="ko-KR" dirty="0"/>
+          </a:p>
+          <a:p>
+            <a:pPr marL="457200" indent="-457200">
+              <a:buAutoNum type="arabicPeriod"/>
+            </a:pPr>
+            <a:r>
+              <a:rPr lang="en-US" altLang="ko-KR" dirty="0" err="1"/>
+              <a:t>Url</a:t>
+            </a:r>
+            <a:r>
+              <a:rPr lang="en-US" altLang="ko-KR" dirty="0"/>
+              <a:t> </a:t>
+            </a:r>
+            <a:r>
+              <a:rPr lang="ko-KR" altLang="en-US" dirty="0"/>
+              <a:t>파라미터 삭제</a:t>
+            </a:r>
+            <a:r>
+              <a:rPr lang="en-US" altLang="ko-KR" dirty="0"/>
+              <a:t>, request body</a:t>
+            </a:r>
+            <a:r>
+              <a:rPr lang="ko-KR" altLang="en-US" dirty="0"/>
+              <a:t>로 요청 </a:t>
+            </a:r>
+            <a:endParaRPr lang="en-US" altLang="ko-KR" dirty="0"/>
+          </a:p>
+        </p:txBody>
+      </p:sp>
+      <p:sp>
+        <p:nvSpPr>
+          <p:cNvPr id="5" name="텍스트 개체 틀 4">
+            <a:extLst>
+              <a:ext uri="{FF2B5EF4-FFF2-40B4-BE49-F238E27FC236}">
+                <a16:creationId xmlns:a16="http://schemas.microsoft.com/office/drawing/2014/main" id="{85C7A296-B2F6-3D67-59FA-42EDBF286BC7}"/>
+              </a:ext>
+            </a:extLst>
+          </p:cNvPr>
+          <p:cNvSpPr>
+            <a:spLocks noGrp="1"/>
+          </p:cNvSpPr>
+          <p:nvPr>
+            <p:ph type="body" sz="quarter" idx="13"/>
+          </p:nvPr>
+        </p:nvSpPr>
+        <p:spPr/>
+        <p:txBody>
+          <a:bodyPr/>
+          <a:lstStyle/>
+          <a:p>
+            <a:r>
+              <a:rPr lang="en-US" altLang="ko-KR" b="1" dirty="0"/>
+              <a:t>: URL</a:t>
+            </a:r>
+            <a:r>
+              <a:rPr lang="ko-KR" altLang="en-US" b="1" dirty="0"/>
+              <a:t>에 포함된 파라미터를 </a:t>
+            </a:r>
+            <a:r>
+              <a:rPr lang="en-US" altLang="ko-KR" b="1" dirty="0"/>
+              <a:t>Request body</a:t>
+            </a:r>
+            <a:r>
+              <a:rPr lang="ko-KR" altLang="en-US" b="1" dirty="0"/>
+              <a:t>로 요청</a:t>
+            </a:r>
+            <a:endParaRPr lang="en-US" altLang="ko-KR" b="1" dirty="0"/>
+          </a:p>
+        </p:txBody>
+      </p:sp>
+      <p:sp>
+        <p:nvSpPr>
+          <p:cNvPr id="3" name="직사각형 2">
+            <a:extLst>
+              <a:ext uri="{FF2B5EF4-FFF2-40B4-BE49-F238E27FC236}">
+                <a16:creationId xmlns:a16="http://schemas.microsoft.com/office/drawing/2014/main" id="{67F86AF4-2025-9FBA-FA37-E85DA9394BFD}"/>
+              </a:ext>
+            </a:extLst>
+          </p:cNvPr>
+          <p:cNvSpPr/>
+          <p:nvPr/>
+        </p:nvSpPr>
+        <p:spPr>
+          <a:xfrm>
+            <a:off x="10760364" y="-4941"/>
+            <a:ext cx="1431636" cy="621132"/>
+          </a:xfrm>
+          <a:prstGeom prst="rect">
+            <a:avLst/>
+          </a:prstGeom>
+          <a:solidFill>
+            <a:schemeClr val="accent1">
+              <a:lumMod val="75000"/>
+            </a:schemeClr>
+          </a:solidFill>
+        </p:spPr>
+        <p:style>
+          <a:lnRef idx="2">
+            <a:schemeClr val="accent1">
+              <a:shade val="15000"/>
+            </a:schemeClr>
+          </a:lnRef>
+          <a:fillRef idx="1">
+            <a:schemeClr val="accent1"/>
+          </a:fillRef>
+          <a:effectRef idx="0">
+            <a:schemeClr val="accent1"/>
+          </a:effectRef>
+          <a:fontRef idx="minor">
+            <a:schemeClr val="lt1"/>
+          </a:fontRef>
+        </p:style>
+        <p:txBody>
+          <a:bodyPr rtlCol="0" anchor="ctr"/>
+          <a:lstStyle/>
+          <a:p>
+            <a:pPr algn="ctr"/>
+            <a:r>
+              <a:rPr lang="ko-KR" altLang="en-US" dirty="0"/>
+              <a:t>변경 완료</a:t>
+            </a:r>
+          </a:p>
+        </p:txBody>
+      </p:sp>
+      <p:pic>
+        <p:nvPicPr>
+          <p:cNvPr id="13" name="그림 12">
+            <a:extLst>
+              <a:ext uri="{FF2B5EF4-FFF2-40B4-BE49-F238E27FC236}">
+                <a16:creationId xmlns:a16="http://schemas.microsoft.com/office/drawing/2014/main" id="{2E27E66D-2E29-732E-D4E3-5ED72C439D14}"/>
+              </a:ext>
+            </a:extLst>
+          </p:cNvPr>
+          <p:cNvPicPr>
+            <a:picLocks noChangeAspect="1"/>
+          </p:cNvPicPr>
+          <p:nvPr/>
+        </p:nvPicPr>
+        <p:blipFill>
+          <a:blip r:embed="rId3"/>
+          <a:stretch>
+            <a:fillRect/>
+          </a:stretch>
+        </p:blipFill>
+        <p:spPr>
+          <a:xfrm>
+            <a:off x="286941" y="2858924"/>
+            <a:ext cx="5302081" cy="790473"/>
+          </a:xfrm>
+          <a:prstGeom prst="rect">
+            <a:avLst/>
+          </a:prstGeom>
+        </p:spPr>
+      </p:pic>
+      <p:pic>
+        <p:nvPicPr>
+          <p:cNvPr id="15" name="그림 14">
+            <a:extLst>
+              <a:ext uri="{FF2B5EF4-FFF2-40B4-BE49-F238E27FC236}">
+                <a16:creationId xmlns:a16="http://schemas.microsoft.com/office/drawing/2014/main" id="{B9A4A444-C9BD-51A6-8748-7FBADEFFF0A0}"/>
+              </a:ext>
+            </a:extLst>
+          </p:cNvPr>
+          <p:cNvPicPr>
+            <a:picLocks noChangeAspect="1"/>
+          </p:cNvPicPr>
+          <p:nvPr/>
+        </p:nvPicPr>
+        <p:blipFill>
+          <a:blip r:embed="rId4"/>
+          <a:stretch>
+            <a:fillRect/>
+          </a:stretch>
+        </p:blipFill>
+        <p:spPr>
+          <a:xfrm>
+            <a:off x="6096000" y="2862717"/>
+            <a:ext cx="5746987" cy="3871161"/>
+          </a:xfrm>
+          <a:prstGeom prst="rect">
+            <a:avLst/>
+          </a:prstGeom>
+          <a:ln>
+            <a:solidFill>
+              <a:schemeClr val="tx1">
+                <a:lumMod val="75000"/>
+                <a:lumOff val="25000"/>
+              </a:schemeClr>
+            </a:solidFill>
+          </a:ln>
+        </p:spPr>
+      </p:pic>
+      <p:sp>
+        <p:nvSpPr>
+          <p:cNvPr id="16" name="TextBox 15">
+            <a:extLst>
+              <a:ext uri="{FF2B5EF4-FFF2-40B4-BE49-F238E27FC236}">
+                <a16:creationId xmlns:a16="http://schemas.microsoft.com/office/drawing/2014/main" id="{FEC13824-95D9-898D-EC95-3463348554FD}"/>
+              </a:ext>
+            </a:extLst>
+          </p:cNvPr>
+          <p:cNvSpPr txBox="1"/>
+          <p:nvPr/>
+        </p:nvSpPr>
+        <p:spPr>
+          <a:xfrm>
+            <a:off x="286941" y="2612703"/>
+            <a:ext cx="829339" cy="246221"/>
+          </a:xfrm>
+          <a:prstGeom prst="rect">
+            <a:avLst/>
+          </a:prstGeom>
+          <a:noFill/>
+        </p:spPr>
+        <p:txBody>
+          <a:bodyPr wrap="square" rtlCol="0">
+            <a:spAutoFit/>
+          </a:bodyPr>
+          <a:lstStyle/>
+          <a:p>
+            <a:r>
+              <a:rPr lang="en-US" altLang="ko-KR" sz="1000" dirty="0"/>
+              <a:t>&lt;</a:t>
+            </a:r>
+            <a:r>
+              <a:rPr lang="ko-KR" altLang="en-US" sz="1000" dirty="0"/>
+              <a:t>코드</a:t>
+            </a:r>
+            <a:r>
+              <a:rPr lang="en-US" altLang="ko-KR" sz="1000" dirty="0"/>
+              <a:t>&gt;</a:t>
+            </a:r>
+            <a:endParaRPr lang="ko-KR" altLang="en-US" sz="1000" dirty="0"/>
+          </a:p>
+        </p:txBody>
+      </p:sp>
+      <p:sp>
+        <p:nvSpPr>
+          <p:cNvPr id="18" name="TextBox 17">
+            <a:extLst>
+              <a:ext uri="{FF2B5EF4-FFF2-40B4-BE49-F238E27FC236}">
+                <a16:creationId xmlns:a16="http://schemas.microsoft.com/office/drawing/2014/main" id="{92776BFA-602D-8332-6436-509F464132D6}"/>
+              </a:ext>
+            </a:extLst>
+          </p:cNvPr>
+          <p:cNvSpPr txBox="1"/>
+          <p:nvPr/>
+        </p:nvSpPr>
+        <p:spPr>
+          <a:xfrm>
+            <a:off x="6024978" y="2612703"/>
+            <a:ext cx="1453255" cy="246221"/>
+          </a:xfrm>
+          <a:prstGeom prst="rect">
+            <a:avLst/>
+          </a:prstGeom>
+          <a:noFill/>
+        </p:spPr>
+        <p:txBody>
+          <a:bodyPr wrap="square" rtlCol="0">
+            <a:spAutoFit/>
+          </a:bodyPr>
+          <a:lstStyle/>
+          <a:p>
+            <a:r>
+              <a:rPr lang="en-US" altLang="ko-KR" sz="1000" dirty="0"/>
+              <a:t>&lt;API </a:t>
+            </a:r>
+            <a:r>
+              <a:rPr lang="ko-KR" altLang="en-US" sz="1000" dirty="0"/>
+              <a:t>요청</a:t>
+            </a:r>
+            <a:r>
+              <a:rPr lang="en-US" altLang="ko-KR" sz="1000" dirty="0"/>
+              <a:t>/</a:t>
+            </a:r>
+            <a:r>
+              <a:rPr lang="ko-KR" altLang="en-US" sz="1000" dirty="0"/>
+              <a:t> 결과</a:t>
+            </a:r>
+            <a:r>
+              <a:rPr lang="en-US" altLang="ko-KR" sz="1000" dirty="0"/>
+              <a:t>&gt;</a:t>
+            </a:r>
+            <a:endParaRPr lang="ko-KR" altLang="en-US" sz="1000" dirty="0"/>
+          </a:p>
+        </p:txBody>
+      </p:sp>
+    </p:spTree>
+    <p:extLst>
+      <p:ext uri="{BB962C8B-B14F-4D97-AF65-F5344CB8AC3E}">
+        <p14:creationId xmlns:p14="http://schemas.microsoft.com/office/powerpoint/2010/main" val="1478895112"/>
+      </p:ext>
+    </p:extLst>
+  </p:cSld>
+  <p:clrMapOvr>
+    <a:masterClrMapping/>
+  </p:clrMapOvr>
+</p:sld>
+</file>
+
+<file path=ppt/slides/slide25.xml><?xml version="1.0" encoding="utf-8"?>
+<p:sld xmlns:a="http://schemas.openxmlformats.org/drawingml/2006/main" xmlns:r="http://schemas.openxmlformats.org/officeDocument/2006/relationships" xmlns:p="http://schemas.openxmlformats.org/presentationml/2006/main">
+  <p:cSld>
+    <p:spTree>
+      <p:nvGrpSpPr>
+        <p:cNvPr id="1" name="">
+          <a:extLst>
+            <a:ext uri="{FF2B5EF4-FFF2-40B4-BE49-F238E27FC236}">
+              <a16:creationId xmlns:a16="http://schemas.microsoft.com/office/drawing/2014/main" id="{AB8B4521-27C3-D867-2407-B4283EF8FF26}"/>
+            </a:ext>
+          </a:extLst>
+        </p:cNvPr>
+        <p:cNvGrpSpPr/>
+        <p:nvPr/>
+      </p:nvGrpSpPr>
+      <p:grpSpPr>
+        <a:xfrm>
+          <a:off x="0" y="0"/>
+          <a:ext cx="0" cy="0"/>
+          <a:chOff x="0" y="0"/>
+          <a:chExt cx="0" cy="0"/>
+        </a:xfrm>
+      </p:grpSpPr>
+      <p:sp>
+        <p:nvSpPr>
+          <p:cNvPr id="2" name="제목 1">
+            <a:extLst>
+              <a:ext uri="{FF2B5EF4-FFF2-40B4-BE49-F238E27FC236}">
+                <a16:creationId xmlns:a16="http://schemas.microsoft.com/office/drawing/2014/main" id="{3B2CDCEA-1B58-C9B2-BFF5-145D00C5AD31}"/>
+              </a:ext>
+            </a:extLst>
+          </p:cNvPr>
+          <p:cNvSpPr>
+            <a:spLocks noGrp="1"/>
+          </p:cNvSpPr>
+          <p:nvPr>
+            <p:ph type="title"/>
+          </p:nvPr>
+        </p:nvSpPr>
+        <p:spPr/>
+        <p:txBody>
+          <a:bodyPr/>
+          <a:lstStyle/>
+          <a:p>
+            <a:r>
+              <a:rPr lang="en-US" altLang="ko-KR" dirty="0"/>
+              <a:t>3</a:t>
+            </a:r>
+            <a:r>
+              <a:rPr lang="ko-KR" altLang="en-US" dirty="0"/>
+              <a:t>주차 </a:t>
+            </a:r>
+            <a:r>
+              <a:rPr lang="en-US" altLang="ko-KR" dirty="0"/>
+              <a:t>: API</a:t>
+            </a:r>
+            <a:endParaRPr lang="ko-KR" altLang="en-US" dirty="0"/>
+          </a:p>
+        </p:txBody>
+      </p:sp>
+      <p:sp>
+        <p:nvSpPr>
+          <p:cNvPr id="5" name="텍스트 개체 틀 4">
+            <a:extLst>
+              <a:ext uri="{FF2B5EF4-FFF2-40B4-BE49-F238E27FC236}">
+                <a16:creationId xmlns:a16="http://schemas.microsoft.com/office/drawing/2014/main" id="{4C9D6052-C1D2-EF36-C959-FC68BCB01C19}"/>
+              </a:ext>
+            </a:extLst>
+          </p:cNvPr>
+          <p:cNvSpPr>
+            <a:spLocks noGrp="1"/>
+          </p:cNvSpPr>
+          <p:nvPr>
+            <p:ph type="body" sz="quarter" idx="13"/>
+          </p:nvPr>
+        </p:nvSpPr>
+        <p:spPr/>
+        <p:txBody>
+          <a:bodyPr/>
+          <a:lstStyle/>
+          <a:p>
+            <a:r>
+              <a:rPr lang="en-US" altLang="ko-KR" dirty="0"/>
+              <a:t>: HTTP METHOD</a:t>
+            </a:r>
+            <a:r>
+              <a:rPr lang="ko-KR" altLang="en-US" dirty="0"/>
+              <a:t> 요약</a:t>
+            </a:r>
+          </a:p>
+        </p:txBody>
+      </p:sp>
+      <p:sp>
+        <p:nvSpPr>
+          <p:cNvPr id="8" name="내용 개체 틀 3">
+            <a:extLst>
+              <a:ext uri="{FF2B5EF4-FFF2-40B4-BE49-F238E27FC236}">
+                <a16:creationId xmlns:a16="http://schemas.microsoft.com/office/drawing/2014/main" id="{B6D7BC55-DC12-7111-B49F-EB354180D0B1}"/>
+              </a:ext>
+            </a:extLst>
+          </p:cNvPr>
+          <p:cNvSpPr>
+            <a:spLocks noGrp="1"/>
+          </p:cNvSpPr>
+          <p:nvPr>
+            <p:ph idx="1"/>
+          </p:nvPr>
+        </p:nvSpPr>
+        <p:spPr>
+          <a:xfrm>
+            <a:off x="838200" y="1802922"/>
+            <a:ext cx="10515600" cy="4374042"/>
+          </a:xfrm>
+        </p:spPr>
+        <p:txBody>
+          <a:bodyPr/>
+          <a:lstStyle/>
+          <a:p>
+            <a:endParaRPr lang="en-US" altLang="ko-KR" dirty="0"/>
+          </a:p>
+          <a:p>
+            <a:endParaRPr lang="en-US" altLang="ko-KR" dirty="0"/>
+          </a:p>
+          <a:p>
+            <a:endParaRPr lang="en-US" altLang="ko-KR" dirty="0"/>
+          </a:p>
+        </p:txBody>
+      </p:sp>
+      <p:graphicFrame>
+        <p:nvGraphicFramePr>
+          <p:cNvPr id="3" name="표 2">
+            <a:extLst>
+              <a:ext uri="{FF2B5EF4-FFF2-40B4-BE49-F238E27FC236}">
+                <a16:creationId xmlns:a16="http://schemas.microsoft.com/office/drawing/2014/main" id="{66DDEDDC-DB8D-1CCA-73DD-E154F6841428}"/>
+              </a:ext>
+            </a:extLst>
+          </p:cNvPr>
+          <p:cNvGraphicFramePr>
+            <a:graphicFrameLocks noGrp="1"/>
+          </p:cNvGraphicFramePr>
+          <p:nvPr>
+            <p:extLst>
+              <p:ext uri="{D42A27DB-BD31-4B8C-83A1-F6EECF244321}">
+                <p14:modId xmlns:p14="http://schemas.microsoft.com/office/powerpoint/2010/main" val="3907057923"/>
+              </p:ext>
+            </p:extLst>
+          </p:nvPr>
+        </p:nvGraphicFramePr>
+        <p:xfrm>
+          <a:off x="1151465" y="1802922"/>
+          <a:ext cx="9889069" cy="2938410"/>
+        </p:xfrm>
+        <a:graphic>
+          <a:graphicData uri="http://schemas.openxmlformats.org/drawingml/2006/table">
+            <a:tbl>
+              <a:tblPr firstRow="1" bandRow="1">
+                <a:tableStyleId>{5C22544A-7EE6-4342-B048-85BDC9FD1C3A}</a:tableStyleId>
+              </a:tblPr>
+              <a:tblGrid>
+                <a:gridCol w="1272739">
+                  <a:extLst>
+                    <a:ext uri="{9D8B030D-6E8A-4147-A177-3AD203B41FA5}">
+                      <a16:colId xmlns:a16="http://schemas.microsoft.com/office/drawing/2014/main" val="855462432"/>
+                    </a:ext>
+                  </a:extLst>
+                </a:gridCol>
+                <a:gridCol w="2037728">
+                  <a:extLst>
+                    <a:ext uri="{9D8B030D-6E8A-4147-A177-3AD203B41FA5}">
+                      <a16:colId xmlns:a16="http://schemas.microsoft.com/office/drawing/2014/main" val="3965230790"/>
+                    </a:ext>
+                  </a:extLst>
+                </a:gridCol>
+                <a:gridCol w="2150534">
+                  <a:extLst>
+                    <a:ext uri="{9D8B030D-6E8A-4147-A177-3AD203B41FA5}">
+                      <a16:colId xmlns:a16="http://schemas.microsoft.com/office/drawing/2014/main" val="3600829313"/>
+                    </a:ext>
+                  </a:extLst>
+                </a:gridCol>
+                <a:gridCol w="4428068">
+                  <a:extLst>
+                    <a:ext uri="{9D8B030D-6E8A-4147-A177-3AD203B41FA5}">
+                      <a16:colId xmlns:a16="http://schemas.microsoft.com/office/drawing/2014/main" val="3574333736"/>
+                    </a:ext>
+                  </a:extLst>
+                </a:gridCol>
+              </a:tblGrid>
+              <a:tr h="489735">
+                <a:tc>
+                  <a:txBody>
+                    <a:bodyPr/>
+                    <a:lstStyle/>
+                    <a:p>
+                      <a:pPr algn="ctr" latinLnBrk="1"/>
+                      <a:r>
+                        <a:rPr lang="en-US" altLang="ko-KR" dirty="0"/>
+                        <a:t>METHOD</a:t>
+                      </a:r>
+                      <a:endParaRPr lang="ko-KR" altLang="en-US" dirty="0"/>
+                    </a:p>
+                  </a:txBody>
+                  <a:tcPr anchor="ctr"/>
+                </a:tc>
+                <a:tc>
+                  <a:txBody>
+                    <a:bodyPr/>
+                    <a:lstStyle/>
+                    <a:p>
+                      <a:pPr algn="ctr" latinLnBrk="1"/>
+                      <a:r>
+                        <a:rPr lang="en-US" altLang="ko-KR" dirty="0"/>
+                        <a:t>CRUD(</a:t>
+                      </a:r>
+                      <a:r>
+                        <a:rPr lang="ko-KR" altLang="en-US" dirty="0"/>
+                        <a:t>표준 권장</a:t>
+                      </a:r>
+                      <a:r>
+                        <a:rPr lang="en-US" altLang="ko-KR" dirty="0"/>
+                        <a:t>)</a:t>
+                      </a:r>
+                      <a:endParaRPr lang="ko-KR" altLang="en-US" dirty="0"/>
+                    </a:p>
+                  </a:txBody>
+                  <a:tcPr anchor="ctr"/>
+                </a:tc>
+                <a:tc>
+                  <a:txBody>
+                    <a:bodyPr/>
+                    <a:lstStyle/>
+                    <a:p>
+                      <a:pPr algn="ctr" latinLnBrk="1"/>
+                      <a:r>
+                        <a:rPr lang="ko-KR" altLang="en-US" dirty="0"/>
+                        <a:t>데이터 전송 방식</a:t>
+                      </a:r>
+                    </a:p>
+                  </a:txBody>
+                  <a:tcPr anchor="ctr"/>
+                </a:tc>
+                <a:tc>
+                  <a:txBody>
+                    <a:bodyPr/>
+                    <a:lstStyle/>
+                    <a:p>
+                      <a:pPr algn="ctr" latinLnBrk="1"/>
+                      <a:endParaRPr lang="ko-KR" altLang="en-US" dirty="0"/>
+                    </a:p>
+                  </a:txBody>
+                  <a:tcPr anchor="ctr"/>
+                </a:tc>
+                <a:extLst>
+                  <a:ext uri="{0D108BD9-81ED-4DB2-BD59-A6C34878D82A}">
+                    <a16:rowId xmlns:a16="http://schemas.microsoft.com/office/drawing/2014/main" val="1826676659"/>
+                  </a:ext>
+                </a:extLst>
+              </a:tr>
+              <a:tr h="489735">
+                <a:tc>
+                  <a:txBody>
+                    <a:bodyPr/>
+                    <a:lstStyle/>
+                    <a:p>
+                      <a:pPr algn="ctr" latinLnBrk="1"/>
+                      <a:r>
+                        <a:rPr lang="en-US" altLang="ko-KR" dirty="0"/>
+                        <a:t>GET</a:t>
+                      </a:r>
+                      <a:endParaRPr lang="ko-KR" altLang="en-US" dirty="0"/>
+                    </a:p>
+                  </a:txBody>
+                  <a:tcPr anchor="ctr"/>
+                </a:tc>
+                <a:tc>
+                  <a:txBody>
+                    <a:bodyPr/>
+                    <a:lstStyle/>
+                    <a:p>
+                      <a:pPr algn="ctr" latinLnBrk="1"/>
+                      <a:r>
+                        <a:rPr lang="en-US" altLang="ko-KR" dirty="0"/>
+                        <a:t>READ</a:t>
+                      </a:r>
+                      <a:endParaRPr lang="ko-KR" altLang="en-US" dirty="0"/>
+                    </a:p>
+                  </a:txBody>
+                  <a:tcPr anchor="ctr"/>
+                </a:tc>
+                <a:tc>
+                  <a:txBody>
+                    <a:bodyPr/>
+                    <a:lstStyle/>
+                    <a:p>
+                      <a:pPr algn="ctr" latinLnBrk="1"/>
+                      <a:r>
+                        <a:rPr lang="en-US" altLang="ko-KR" dirty="0"/>
+                        <a:t>URL</a:t>
+                      </a:r>
+                      <a:endParaRPr lang="ko-KR" altLang="en-US" dirty="0"/>
+                    </a:p>
+                  </a:txBody>
+                  <a:tcPr anchor="ctr"/>
+                </a:tc>
+                <a:tc>
+                  <a:txBody>
+                    <a:bodyPr/>
+                    <a:lstStyle/>
+                    <a:p>
+                      <a:pPr algn="ctr" latinLnBrk="1"/>
+                      <a:endParaRPr lang="ko-KR" altLang="en-US" dirty="0"/>
+                    </a:p>
+                  </a:txBody>
+                  <a:tcPr anchor="ctr">
+                    <a:lnB w="12700" cap="flat" cmpd="sng" algn="ctr">
+                      <a:noFill/>
+                      <a:prstDash val="solid"/>
+                      <a:round/>
+                      <a:headEnd type="none" w="med" len="med"/>
+                      <a:tailEnd type="none" w="med" len="med"/>
+                    </a:lnB>
+                  </a:tcPr>
+                </a:tc>
+                <a:extLst>
+                  <a:ext uri="{0D108BD9-81ED-4DB2-BD59-A6C34878D82A}">
+                    <a16:rowId xmlns:a16="http://schemas.microsoft.com/office/drawing/2014/main" val="2077366095"/>
+                  </a:ext>
+                </a:extLst>
+              </a:tr>
+              <a:tr h="489735">
+                <a:tc>
+                  <a:txBody>
+                    <a:bodyPr/>
+                    <a:lstStyle/>
+                    <a:p>
+                      <a:pPr algn="ctr" latinLnBrk="1"/>
+                      <a:r>
+                        <a:rPr lang="en-US" altLang="ko-KR" dirty="0"/>
+                        <a:t>POST</a:t>
+                      </a:r>
+                      <a:endParaRPr lang="ko-KR" altLang="en-US" dirty="0"/>
+                    </a:p>
+                  </a:txBody>
+                  <a:tcPr anchor="ctr"/>
+                </a:tc>
+                <a:tc>
+                  <a:txBody>
+                    <a:bodyPr/>
+                    <a:lstStyle/>
+                    <a:p>
+                      <a:pPr algn="ctr" latinLnBrk="1"/>
+                      <a:r>
+                        <a:rPr lang="en-US" altLang="ko-KR" dirty="0"/>
+                        <a:t>CREATE</a:t>
+                      </a:r>
+                    </a:p>
+                  </a:txBody>
+                  <a:tcPr anchor="ctr"/>
+                </a:tc>
+                <a:tc>
+                  <a:txBody>
+                    <a:bodyPr/>
+                    <a:lstStyle/>
+                    <a:p>
+                      <a:pPr algn="ctr" latinLnBrk="1"/>
+                      <a:r>
+                        <a:rPr lang="en-US" altLang="ko-KR" dirty="0"/>
+                        <a:t>BODY</a:t>
+                      </a:r>
+                      <a:endParaRPr lang="ko-KR" altLang="en-US" dirty="0"/>
+                    </a:p>
+                  </a:txBody>
+                  <a:tcPr anchor="ctr">
+                    <a:lnR w="12700" cap="flat" cmpd="sng" algn="ctr">
+                      <a:noFill/>
+                      <a:prstDash val="solid"/>
+                      <a:round/>
+                      <a:headEnd type="none" w="med" len="med"/>
+                      <a:tailEnd type="none" w="med" len="med"/>
+                    </a:lnR>
+                  </a:tcPr>
+                </a:tc>
+                <a:tc>
+                  <a:txBody>
+                    <a:bodyPr/>
+                    <a:lstStyle/>
+                    <a:p>
+                      <a:pPr algn="ctr" latinLnBrk="1"/>
+                      <a:endParaRPr lang="ko-KR" altLang="en-US" dirty="0"/>
+                    </a:p>
+                  </a:txBody>
+                  <a:tcPr anchor="ctr">
+                    <a:lnL w="12700" cap="flat" cmpd="sng" algn="ctr">
+                      <a:noFill/>
+                      <a:prstDash val="solid"/>
+                      <a:round/>
+                      <a:headEnd type="none" w="med" len="med"/>
+                      <a:tailEnd type="none" w="med" len="med"/>
+                    </a:lnL>
+                    <a:lnR w="12700" cap="flat" cmpd="sng" algn="ctr">
+                      <a:noFill/>
+                      <a:prstDash val="solid"/>
+                      <a:round/>
+                      <a:headEnd type="none" w="med" len="med"/>
+                      <a:tailEnd type="none" w="med" len="med"/>
+                    </a:lnR>
+                    <a:lnT w="12700" cap="flat" cmpd="sng" algn="ctr">
+                      <a:noFill/>
+                      <a:prstDash val="solid"/>
+                      <a:round/>
+                      <a:headEnd type="none" w="med" len="med"/>
+                      <a:tailEnd type="none" w="med" len="med"/>
+                    </a:lnT>
+                    <a:lnB w="12700" cap="flat" cmpd="sng" algn="ctr">
+                      <a:solidFill>
+                        <a:schemeClr val="tx1"/>
+                      </a:solidFill>
+                      <a:prstDash val="solid"/>
+                      <a:round/>
+                      <a:headEnd type="none" w="med" len="med"/>
+                      <a:tailEnd type="none" w="med" len="med"/>
+                    </a:lnB>
+                    <a:lnTlToBr w="12700" cmpd="sng">
+                      <a:noFill/>
+                      <a:prstDash val="solid"/>
+                    </a:lnTlToBr>
+                    <a:lnBlToTr w="12700" cmpd="sng">
+                      <a:noFill/>
+                      <a:prstDash val="solid"/>
+                    </a:lnBlToTr>
+                  </a:tcPr>
+                </a:tc>
+                <a:extLst>
+                  <a:ext uri="{0D108BD9-81ED-4DB2-BD59-A6C34878D82A}">
+                    <a16:rowId xmlns:a16="http://schemas.microsoft.com/office/drawing/2014/main" val="1964586272"/>
+                  </a:ext>
+                </a:extLst>
+              </a:tr>
+              <a:tr h="489735">
+                <a:tc>
+                  <a:txBody>
+                    <a:bodyPr/>
+                    <a:lstStyle/>
+                    <a:p>
+                      <a:pPr algn="ctr" latinLnBrk="1"/>
+                      <a:r>
+                        <a:rPr lang="en-US" altLang="ko-KR" dirty="0"/>
+                        <a:t>PUT</a:t>
+                      </a:r>
+                      <a:endParaRPr lang="ko-KR" altLang="en-US" dirty="0"/>
+                    </a:p>
+                  </a:txBody>
+                  <a:tcPr anchor="ctr"/>
+                </a:tc>
+                <a:tc>
+                  <a:txBody>
+                    <a:bodyPr/>
+                    <a:lstStyle/>
+                    <a:p>
+                      <a:pPr algn="ctr" latinLnBrk="1"/>
+                      <a:r>
+                        <a:rPr lang="en-US" altLang="ko-KR" dirty="0"/>
+                        <a:t>UPDATE</a:t>
+                      </a:r>
+                      <a:endParaRPr lang="ko-KR" altLang="en-US" dirty="0"/>
+                    </a:p>
+                  </a:txBody>
+                  <a:tcPr anchor="ctr"/>
+                </a:tc>
+                <a:tc>
+                  <a:txBody>
+                    <a:bodyPr/>
+                    <a:lstStyle/>
+                    <a:p>
+                      <a:pPr algn="ctr" latinLnBrk="1"/>
+                      <a:r>
+                        <a:rPr lang="en-US" altLang="ko-KR" dirty="0"/>
+                        <a:t>BODY</a:t>
+                      </a:r>
+                      <a:endParaRPr lang="ko-KR" altLang="en-US" dirty="0"/>
+                    </a:p>
+                  </a:txBody>
+                  <a:tcPr anchor="ctr">
+                    <a:lnR w="12700" cap="flat" cmpd="sng" algn="ctr">
+                      <a:solidFill>
+                        <a:schemeClr val="tx1"/>
+                      </a:solidFill>
+                      <a:prstDash val="solid"/>
+                      <a:round/>
+                      <a:headEnd type="none" w="med" len="med"/>
+                      <a:tailEnd type="none" w="med" len="med"/>
+                    </a:lnR>
+                  </a:tcPr>
+                </a:tc>
+                <a:tc>
+                  <a:txBody>
+                    <a:bodyPr/>
+                    <a:lstStyle/>
+                    <a:p>
+                      <a:pPr algn="ctr" latinLnBrk="1"/>
+                      <a:r>
+                        <a:rPr lang="ko-KR" altLang="en-US" dirty="0"/>
+                        <a:t>리소스 전체 업데이트</a:t>
+                      </a:r>
+                    </a:p>
+                  </a:txBody>
+                  <a:tcPr anchor="ctr">
+                    <a:lnL w="12700" cap="flat" cmpd="sng" algn="ctr">
+                      <a:solidFill>
+                        <a:schemeClr val="tx1"/>
+                      </a:solidFill>
+                      <a:prstDash val="solid"/>
+                      <a:round/>
+                      <a:headEnd type="none" w="med" len="med"/>
+                      <a:tailEnd type="none" w="med" len="med"/>
+                    </a:lnL>
+                    <a:lnR w="12700" cap="flat" cmpd="sng" algn="ctr">
+                      <a:solidFill>
+                        <a:schemeClr val="tx1"/>
+                      </a:solidFill>
+                      <a:prstDash val="solid"/>
+                      <a:round/>
+                      <a:headEnd type="none" w="med" len="med"/>
+                      <a:tailEnd type="none" w="med" len="med"/>
+                    </a:lnR>
+                    <a:lnT w="12700" cap="flat" cmpd="sng" algn="ctr">
+                      <a:solidFill>
+                        <a:schemeClr val="tx1"/>
+                      </a:solidFill>
+                      <a:prstDash val="solid"/>
+                      <a:round/>
+                      <a:headEnd type="none" w="med" len="med"/>
+                      <a:tailEnd type="none" w="med" len="med"/>
+                    </a:lnT>
+                    <a:lnB w="12700" cmpd="sng">
+                      <a:noFill/>
+                    </a:lnB>
+                    <a:lnTlToBr w="12700" cmpd="sng">
+                      <a:noFill/>
+                      <a:prstDash val="solid"/>
+                    </a:lnTlToBr>
+                    <a:lnBlToTr w="12700" cmpd="sng">
+                      <a:noFill/>
+                      <a:prstDash val="solid"/>
+                    </a:lnBlToTr>
+                  </a:tcPr>
+                </a:tc>
+                <a:extLst>
+                  <a:ext uri="{0D108BD9-81ED-4DB2-BD59-A6C34878D82A}">
+                    <a16:rowId xmlns:a16="http://schemas.microsoft.com/office/drawing/2014/main" val="3844494951"/>
+                  </a:ext>
+                </a:extLst>
+              </a:tr>
+              <a:tr h="489735">
+                <a:tc>
+                  <a:txBody>
+                    <a:bodyPr/>
+                    <a:lstStyle/>
+                    <a:p>
+                      <a:pPr algn="ctr" latinLnBrk="1"/>
+                      <a:r>
+                        <a:rPr lang="en-US" altLang="ko-KR" dirty="0"/>
+                        <a:t>PATCH</a:t>
+                      </a:r>
+                      <a:endParaRPr lang="ko-KR" altLang="en-US" dirty="0"/>
+                    </a:p>
+                  </a:txBody>
+                  <a:tcPr anchor="ctr"/>
+                </a:tc>
+                <a:tc>
+                  <a:txBody>
+                    <a:bodyPr/>
+                    <a:lstStyle/>
+                    <a:p>
+                      <a:pPr algn="ctr" latinLnBrk="1"/>
+                      <a:r>
+                        <a:rPr lang="en-US" altLang="ko-KR" dirty="0"/>
+                        <a:t>UPDATE</a:t>
+                      </a:r>
+                      <a:endParaRPr lang="ko-KR" altLang="en-US" dirty="0"/>
+                    </a:p>
+                  </a:txBody>
+                  <a:tcPr anchor="ctr"/>
+                </a:tc>
+                <a:tc>
+                  <a:txBody>
+                    <a:bodyPr/>
+                    <a:lstStyle/>
+                    <a:p>
+                      <a:pPr algn="ctr" latinLnBrk="1"/>
+                      <a:r>
+                        <a:rPr lang="en-US" altLang="ko-KR" dirty="0"/>
+                        <a:t>BODY</a:t>
+                      </a:r>
+                      <a:endParaRPr lang="ko-KR" altLang="en-US" dirty="0"/>
+                    </a:p>
+                  </a:txBody>
+                  <a:tcPr anchor="ctr">
+                    <a:lnR w="12700" cap="flat" cmpd="sng" algn="ctr">
+                      <a:solidFill>
+                        <a:schemeClr val="tx1"/>
+                      </a:solidFill>
+                      <a:prstDash val="solid"/>
+                      <a:round/>
+                      <a:headEnd type="none" w="med" len="med"/>
+                      <a:tailEnd type="none" w="med" len="med"/>
+                    </a:lnR>
+                  </a:tcPr>
+                </a:tc>
+                <a:tc>
+                  <a:txBody>
+                    <a:bodyPr/>
+                    <a:lstStyle/>
+                    <a:p>
+                      <a:pPr algn="ctr" latinLnBrk="1"/>
+                      <a:r>
+                        <a:rPr lang="ko-KR" altLang="en-US" dirty="0"/>
+                        <a:t>리소스 일부 업데이트</a:t>
+                      </a:r>
+                    </a:p>
+                  </a:txBody>
+                  <a:tcPr anchor="ctr">
+                    <a:lnL w="12700" cap="flat" cmpd="sng" algn="ctr">
+                      <a:solidFill>
+                        <a:schemeClr val="tx1"/>
+                      </a:solidFill>
+                      <a:prstDash val="solid"/>
+                      <a:round/>
+                      <a:headEnd type="none" w="med" len="med"/>
+                      <a:tailEnd type="none" w="med" len="med"/>
+                    </a:lnL>
+                    <a:lnR w="12700" cap="flat" cmpd="sng" algn="ctr">
+                      <a:solidFill>
+                        <a:schemeClr val="tx1"/>
+                      </a:solidFill>
+                      <a:prstDash val="solid"/>
+                      <a:round/>
+                      <a:headEnd type="none" w="med" len="med"/>
+                      <a:tailEnd type="none" w="med" len="med"/>
+                    </a:lnR>
+                    <a:lnT w="12700" cmpd="sng">
+                      <a:noFill/>
+                    </a:lnT>
+                    <a:lnB w="12700" cap="flat" cmpd="sng" algn="ctr">
+                      <a:solidFill>
+                        <a:schemeClr val="tx1"/>
+                      </a:solidFill>
+                      <a:prstDash val="solid"/>
+                      <a:round/>
+                      <a:headEnd type="none" w="med" len="med"/>
+                      <a:tailEnd type="none" w="med" len="med"/>
+                    </a:lnB>
+                    <a:lnTlToBr w="12700" cmpd="sng">
+                      <a:noFill/>
+                      <a:prstDash val="solid"/>
+                    </a:lnTlToBr>
+                    <a:lnBlToTr w="12700" cmpd="sng">
+                      <a:noFill/>
+                      <a:prstDash val="solid"/>
+                    </a:lnBlToTr>
+                  </a:tcPr>
+                </a:tc>
+                <a:extLst>
+                  <a:ext uri="{0D108BD9-81ED-4DB2-BD59-A6C34878D82A}">
+                    <a16:rowId xmlns:a16="http://schemas.microsoft.com/office/drawing/2014/main" val="440446485"/>
+                  </a:ext>
+                </a:extLst>
+              </a:tr>
+              <a:tr h="489735">
+                <a:tc>
+                  <a:txBody>
+                    <a:bodyPr/>
+                    <a:lstStyle/>
+                    <a:p>
+                      <a:pPr algn="ctr" latinLnBrk="1"/>
+                      <a:r>
+                        <a:rPr lang="en-US" altLang="ko-KR" dirty="0"/>
+                        <a:t>DELETE</a:t>
+                      </a:r>
+                      <a:endParaRPr lang="ko-KR" altLang="en-US" dirty="0"/>
+                    </a:p>
+                  </a:txBody>
+                  <a:tcPr anchor="ctr"/>
+                </a:tc>
+                <a:tc>
+                  <a:txBody>
+                    <a:bodyPr/>
+                    <a:lstStyle/>
+                    <a:p>
+                      <a:pPr algn="ctr" latinLnBrk="1"/>
+                      <a:r>
+                        <a:rPr lang="en-US" altLang="ko-KR" dirty="0"/>
+                        <a:t>DELETE</a:t>
+                      </a:r>
+                      <a:endParaRPr lang="ko-KR" altLang="en-US" dirty="0"/>
+                    </a:p>
+                  </a:txBody>
+                  <a:tcPr anchor="ctr"/>
+                </a:tc>
+                <a:tc>
+                  <a:txBody>
+                    <a:bodyPr/>
+                    <a:lstStyle/>
+                    <a:p>
+                      <a:pPr algn="ctr" latinLnBrk="1"/>
+                      <a:r>
+                        <a:rPr lang="en-US" altLang="ko-KR" dirty="0"/>
+                        <a:t>URL</a:t>
+                      </a:r>
+                      <a:endParaRPr lang="ko-KR" altLang="en-US" dirty="0"/>
+                    </a:p>
+                  </a:txBody>
+                  <a:tcPr anchor="ctr"/>
+                </a:tc>
+                <a:tc>
+                  <a:txBody>
+                    <a:bodyPr/>
+                    <a:lstStyle/>
+                    <a:p>
+                      <a:pPr algn="ctr" latinLnBrk="1"/>
+                      <a:endParaRPr lang="ko-KR" altLang="en-US" dirty="0"/>
+                    </a:p>
+                  </a:txBody>
+                  <a:tcPr anchor="ctr">
+                    <a:lnT w="12700" cap="flat" cmpd="sng" algn="ctr">
+                      <a:solidFill>
+                        <a:schemeClr val="tx1"/>
+                      </a:solidFill>
+                      <a:prstDash val="solid"/>
+                      <a:round/>
+                      <a:headEnd type="none" w="med" len="med"/>
+                      <a:tailEnd type="none" w="med" len="med"/>
+                    </a:lnT>
+                  </a:tcPr>
+                </a:tc>
+                <a:extLst>
+                  <a:ext uri="{0D108BD9-81ED-4DB2-BD59-A6C34878D82A}">
+                    <a16:rowId xmlns:a16="http://schemas.microsoft.com/office/drawing/2014/main" val="2318391090"/>
+                  </a:ext>
+                </a:extLst>
+              </a:tr>
+            </a:tbl>
+          </a:graphicData>
+        </a:graphic>
+      </p:graphicFrame>
+      <p:sp>
+        <p:nvSpPr>
+          <p:cNvPr id="4" name="직사각형 3">
+            <a:extLst>
+              <a:ext uri="{FF2B5EF4-FFF2-40B4-BE49-F238E27FC236}">
+                <a16:creationId xmlns:a16="http://schemas.microsoft.com/office/drawing/2014/main" id="{2BB5BEDD-6460-A95B-0224-5C6AD743B075}"/>
+              </a:ext>
+            </a:extLst>
+          </p:cNvPr>
+          <p:cNvSpPr/>
+          <p:nvPr/>
+        </p:nvSpPr>
+        <p:spPr>
+          <a:xfrm>
+            <a:off x="10760364" y="-4941"/>
+            <a:ext cx="1431636" cy="621132"/>
+          </a:xfrm>
+          <a:prstGeom prst="rect">
+            <a:avLst/>
+          </a:prstGeom>
+          <a:solidFill>
+            <a:schemeClr val="accent1">
+              <a:lumMod val="75000"/>
+            </a:schemeClr>
+          </a:solidFill>
+        </p:spPr>
+        <p:style>
+          <a:lnRef idx="2">
+            <a:schemeClr val="accent1">
+              <a:shade val="15000"/>
+            </a:schemeClr>
+          </a:lnRef>
+          <a:fillRef idx="1">
+            <a:schemeClr val="accent1"/>
+          </a:fillRef>
+          <a:effectRef idx="0">
+            <a:schemeClr val="accent1"/>
+          </a:effectRef>
+          <a:fontRef idx="minor">
+            <a:schemeClr val="lt1"/>
+          </a:fontRef>
+        </p:style>
+        <p:txBody>
+          <a:bodyPr rtlCol="0" anchor="ctr"/>
+          <a:lstStyle/>
+          <a:p>
+            <a:pPr algn="ctr"/>
+            <a:r>
+              <a:rPr lang="ko-KR" altLang="en-US" dirty="0"/>
+              <a:t>추가</a:t>
+            </a:r>
+          </a:p>
+        </p:txBody>
+      </p:sp>
+    </p:spTree>
+    <p:extLst>
+      <p:ext uri="{BB962C8B-B14F-4D97-AF65-F5344CB8AC3E}">
+        <p14:creationId xmlns:p14="http://schemas.microsoft.com/office/powerpoint/2010/main" val="3531835124"/>
+      </p:ext>
+    </p:extLst>
+  </p:cSld>
+  <p:clrMapOvr>
+    <a:masterClrMapping/>
+  </p:clrMapOvr>
+</p:sld>
+</file>
+
+<file path=ppt/slides/slide26.xml><?xml version="1.0" encoding="utf-8"?>
+<p:sld xmlns:a="http://schemas.openxmlformats.org/drawingml/2006/main" xmlns:r="http://schemas.openxmlformats.org/officeDocument/2006/relationships" xmlns:p="http://schemas.openxmlformats.org/presentationml/2006/main">
+  <p:cSld>
+    <p:spTree>
+      <p:nvGrpSpPr>
+        <p:cNvPr id="1" name=""/>
+        <p:cNvGrpSpPr/>
+        <p:nvPr/>
+      </p:nvGrpSpPr>
+      <p:grpSpPr>
+        <a:xfrm>
+          <a:off x="0" y="0"/>
+          <a:ext cx="0" cy="0"/>
+          <a:chOff x="0" y="0"/>
+          <a:chExt cx="0" cy="0"/>
+        </a:xfrm>
+      </p:grpSpPr>
+      <p:sp>
+        <p:nvSpPr>
           <p:cNvPr id="4" name="내용 개체 틀 3">
             <a:extLst>
               <a:ext uri="{FF2B5EF4-FFF2-40B4-BE49-F238E27FC236}">
@@ -10748,11 +13002,19 @@
           <a:p>
             <a:r>
               <a:rPr lang="en-US" altLang="ko-KR" dirty="0"/>
-              <a:t>: GET,POST,PUT,PATCH,DELETE </a:t>
-            </a:r>
-            <a:r>
-              <a:rPr lang="ko-KR" altLang="en-US" dirty="0"/>
-              <a:t>실행</a:t>
+              <a:t>: HTTP</a:t>
+            </a:r>
+            <a:r>
+              <a:rPr lang="ko-KR" altLang="en-US" dirty="0"/>
+              <a:t> </a:t>
+            </a:r>
+            <a:r>
+              <a:rPr lang="en-US" altLang="ko-KR" dirty="0"/>
+              <a:t>METHOD</a:t>
+            </a:r>
+            <a:r>
+              <a:rPr lang="ko-KR" altLang="en-US" dirty="0"/>
+              <a:t> 실행</a:t>
             </a:r>
           </a:p>
         </p:txBody>
@@ -10770,7 +13032,380 @@
 </p:sld>
 </file>
 
-<file path=ppt/slides/slide25.xml><?xml version="1.0" encoding="utf-8"?>
+<file path=ppt/slides/slide27.xml><?xml version="1.0" encoding="utf-8"?>
+<p:sld xmlns:a="http://schemas.openxmlformats.org/drawingml/2006/main" xmlns:r="http://schemas.openxmlformats.org/officeDocument/2006/relationships" xmlns:p="http://schemas.openxmlformats.org/presentationml/2006/main">
+  <p:cSld>
+    <p:spTree>
+      <p:nvGrpSpPr>
+        <p:cNvPr id="1" name="">
+          <a:extLst>
+            <a:ext uri="{FF2B5EF4-FFF2-40B4-BE49-F238E27FC236}">
+              <a16:creationId xmlns:a16="http://schemas.microsoft.com/office/drawing/2014/main" id="{542DDAD0-3769-4416-23D6-649DCE1738C6}"/>
+            </a:ext>
+          </a:extLst>
+        </p:cNvPr>
+        <p:cNvGrpSpPr/>
+        <p:nvPr/>
+      </p:nvGrpSpPr>
+      <p:grpSpPr>
+        <a:xfrm>
+          <a:off x="0" y="0"/>
+          <a:ext cx="0" cy="0"/>
+          <a:chOff x="0" y="0"/>
+          <a:chExt cx="0" cy="0"/>
+        </a:xfrm>
+      </p:grpSpPr>
+      <p:sp>
+        <p:nvSpPr>
+          <p:cNvPr id="4" name="내용 개체 틀 3">
+            <a:extLst>
+              <a:ext uri="{FF2B5EF4-FFF2-40B4-BE49-F238E27FC236}">
+                <a16:creationId xmlns:a16="http://schemas.microsoft.com/office/drawing/2014/main" id="{D57F7FFC-535F-8FC0-CB41-22FCC89C001A}"/>
+              </a:ext>
+            </a:extLst>
+          </p:cNvPr>
+          <p:cNvSpPr>
+            <a:spLocks noGrp="1"/>
+          </p:cNvSpPr>
+          <p:nvPr>
+            <p:ph idx="1"/>
+          </p:nvPr>
+        </p:nvSpPr>
+        <p:spPr/>
+        <p:txBody>
+          <a:bodyPr/>
+          <a:lstStyle/>
+          <a:p>
+            <a:r>
+              <a:rPr lang="en-US" altLang="ko-KR" dirty="0"/>
+              <a:t>GET (select * from table where </a:t>
+            </a:r>
+            <a:r>
+              <a:rPr lang="en-US" altLang="ko-KR" dirty="0" err="1"/>
+              <a:t>activityname</a:t>
+            </a:r>
+            <a:r>
+              <a:rPr lang="en-US" altLang="ko-KR" dirty="0"/>
+              <a:t> like “%{}%”)</a:t>
+            </a:r>
+          </a:p>
+          <a:p>
+            <a:endParaRPr lang="en-US" altLang="ko-KR" dirty="0"/>
+          </a:p>
+          <a:p>
+            <a:endParaRPr lang="en-US" altLang="ko-KR" dirty="0"/>
+          </a:p>
+        </p:txBody>
+      </p:sp>
+      <p:sp>
+        <p:nvSpPr>
+          <p:cNvPr id="9" name="제목 8">
+            <a:extLst>
+              <a:ext uri="{FF2B5EF4-FFF2-40B4-BE49-F238E27FC236}">
+                <a16:creationId xmlns:a16="http://schemas.microsoft.com/office/drawing/2014/main" id="{22DBC95E-1EEC-2786-2535-4D34D5E80CAA}"/>
+              </a:ext>
+            </a:extLst>
+          </p:cNvPr>
+          <p:cNvSpPr>
+            <a:spLocks noGrp="1"/>
+          </p:cNvSpPr>
+          <p:nvPr>
+            <p:ph type="title"/>
+          </p:nvPr>
+        </p:nvSpPr>
+        <p:spPr/>
+        <p:txBody>
+          <a:bodyPr/>
+          <a:lstStyle/>
+          <a:p>
+            <a:r>
+              <a:rPr lang="en-US" altLang="ko-KR" dirty="0"/>
+              <a:t>3</a:t>
+            </a:r>
+            <a:r>
+              <a:rPr lang="ko-KR" altLang="en-US" dirty="0"/>
+              <a:t>주차 </a:t>
+            </a:r>
+            <a:r>
+              <a:rPr lang="en-US" altLang="ko-KR" dirty="0"/>
+              <a:t>: API</a:t>
+            </a:r>
+            <a:endParaRPr lang="ko-KR" altLang="en-US" dirty="0"/>
+          </a:p>
+        </p:txBody>
+      </p:sp>
+      <p:sp>
+        <p:nvSpPr>
+          <p:cNvPr id="11" name="텍스트 개체 틀 10">
+            <a:extLst>
+              <a:ext uri="{FF2B5EF4-FFF2-40B4-BE49-F238E27FC236}">
+                <a16:creationId xmlns:a16="http://schemas.microsoft.com/office/drawing/2014/main" id="{42BA53F8-2339-EF97-BD68-45502A1D073E}"/>
+              </a:ext>
+            </a:extLst>
+          </p:cNvPr>
+          <p:cNvSpPr>
+            <a:spLocks noGrp="1"/>
+          </p:cNvSpPr>
+          <p:nvPr>
+            <p:ph type="body" sz="quarter" idx="13"/>
+          </p:nvPr>
+        </p:nvSpPr>
+        <p:spPr/>
+        <p:txBody>
+          <a:bodyPr/>
+          <a:lstStyle/>
+          <a:p>
+            <a:r>
+              <a:rPr lang="en-US" altLang="ko-KR" dirty="0"/>
+              <a:t>: HTTP</a:t>
+            </a:r>
+            <a:r>
+              <a:rPr lang="ko-KR" altLang="en-US" dirty="0"/>
+              <a:t> </a:t>
+            </a:r>
+            <a:r>
+              <a:rPr lang="en-US" altLang="ko-KR" dirty="0"/>
+              <a:t>METHOD</a:t>
+            </a:r>
+            <a:r>
+              <a:rPr lang="ko-KR" altLang="en-US" dirty="0"/>
+              <a:t> 실행</a:t>
+            </a:r>
+          </a:p>
+        </p:txBody>
+      </p:sp>
+      <p:sp>
+        <p:nvSpPr>
+          <p:cNvPr id="2" name="직사각형 1">
+            <a:extLst>
+              <a:ext uri="{FF2B5EF4-FFF2-40B4-BE49-F238E27FC236}">
+                <a16:creationId xmlns:a16="http://schemas.microsoft.com/office/drawing/2014/main" id="{4D0E14B0-D43D-ED78-26E9-CF2F305BEFC1}"/>
+              </a:ext>
+            </a:extLst>
+          </p:cNvPr>
+          <p:cNvSpPr/>
+          <p:nvPr/>
+        </p:nvSpPr>
+        <p:spPr>
+          <a:xfrm>
+            <a:off x="10760364" y="-4941"/>
+            <a:ext cx="1431636" cy="621132"/>
+          </a:xfrm>
+          <a:prstGeom prst="rect">
+            <a:avLst/>
+          </a:prstGeom>
+          <a:solidFill>
+            <a:schemeClr val="accent1">
+              <a:lumMod val="75000"/>
+            </a:schemeClr>
+          </a:solidFill>
+        </p:spPr>
+        <p:style>
+          <a:lnRef idx="2">
+            <a:schemeClr val="accent1">
+              <a:shade val="15000"/>
+            </a:schemeClr>
+          </a:lnRef>
+          <a:fillRef idx="1">
+            <a:schemeClr val="accent1"/>
+          </a:fillRef>
+          <a:effectRef idx="0">
+            <a:schemeClr val="accent1"/>
+          </a:effectRef>
+          <a:fontRef idx="minor">
+            <a:schemeClr val="lt1"/>
+          </a:fontRef>
+        </p:style>
+        <p:txBody>
+          <a:bodyPr rtlCol="0" anchor="ctr"/>
+          <a:lstStyle/>
+          <a:p>
+            <a:pPr algn="ctr"/>
+            <a:r>
+              <a:rPr lang="ko-KR" altLang="en-US" dirty="0"/>
+              <a:t>오류 수정</a:t>
+            </a:r>
+          </a:p>
+        </p:txBody>
+      </p:sp>
+      <p:pic>
+        <p:nvPicPr>
+          <p:cNvPr id="5" name="그림 4">
+            <a:extLst>
+              <a:ext uri="{FF2B5EF4-FFF2-40B4-BE49-F238E27FC236}">
+                <a16:creationId xmlns:a16="http://schemas.microsoft.com/office/drawing/2014/main" id="{79C0F515-E060-EDE8-4FEF-66D1577688F1}"/>
+              </a:ext>
+            </a:extLst>
+          </p:cNvPr>
+          <p:cNvPicPr>
+            <a:picLocks noChangeAspect="1"/>
+          </p:cNvPicPr>
+          <p:nvPr/>
+        </p:nvPicPr>
+        <p:blipFill>
+          <a:blip r:embed="rId3"/>
+          <a:stretch>
+            <a:fillRect/>
+          </a:stretch>
+        </p:blipFill>
+        <p:spPr>
+          <a:xfrm>
+            <a:off x="324012" y="2489636"/>
+            <a:ext cx="5700005" cy="733277"/>
+          </a:xfrm>
+          <a:prstGeom prst="rect">
+            <a:avLst/>
+          </a:prstGeom>
+        </p:spPr>
+      </p:pic>
+      <p:pic>
+        <p:nvPicPr>
+          <p:cNvPr id="8" name="그림 7">
+            <a:extLst>
+              <a:ext uri="{FF2B5EF4-FFF2-40B4-BE49-F238E27FC236}">
+                <a16:creationId xmlns:a16="http://schemas.microsoft.com/office/drawing/2014/main" id="{8000A884-AEAE-CF8E-55B8-21473CA01085}"/>
+              </a:ext>
+            </a:extLst>
+          </p:cNvPr>
+          <p:cNvPicPr>
+            <a:picLocks noChangeAspect="1"/>
+          </p:cNvPicPr>
+          <p:nvPr/>
+        </p:nvPicPr>
+        <p:blipFill>
+          <a:blip r:embed="rId4"/>
+          <a:stretch>
+            <a:fillRect/>
+          </a:stretch>
+        </p:blipFill>
+        <p:spPr>
+          <a:xfrm>
+            <a:off x="6219472" y="2489636"/>
+            <a:ext cx="4938872" cy="4684105"/>
+          </a:xfrm>
+          <a:prstGeom prst="rect">
+            <a:avLst/>
+          </a:prstGeom>
+          <a:ln>
+            <a:solidFill>
+              <a:schemeClr val="tx1">
+                <a:lumMod val="75000"/>
+                <a:lumOff val="25000"/>
+              </a:schemeClr>
+            </a:solidFill>
+          </a:ln>
+        </p:spPr>
+      </p:pic>
+      <p:sp>
+        <p:nvSpPr>
+          <p:cNvPr id="10" name="TextBox 9">
+            <a:extLst>
+              <a:ext uri="{FF2B5EF4-FFF2-40B4-BE49-F238E27FC236}">
+                <a16:creationId xmlns:a16="http://schemas.microsoft.com/office/drawing/2014/main" id="{BBCE201F-9C52-CDA5-EEC5-F98F61FE15B7}"/>
+              </a:ext>
+            </a:extLst>
+          </p:cNvPr>
+          <p:cNvSpPr txBox="1"/>
+          <p:nvPr/>
+        </p:nvSpPr>
+        <p:spPr>
+          <a:xfrm>
+            <a:off x="286941" y="2190709"/>
+            <a:ext cx="829339" cy="246221"/>
+          </a:xfrm>
+          <a:prstGeom prst="rect">
+            <a:avLst/>
+          </a:prstGeom>
+          <a:noFill/>
+        </p:spPr>
+        <p:txBody>
+          <a:bodyPr wrap="square" rtlCol="0">
+            <a:spAutoFit/>
+          </a:bodyPr>
+          <a:lstStyle/>
+          <a:p>
+            <a:r>
+              <a:rPr lang="en-US" altLang="ko-KR" sz="1000" dirty="0"/>
+              <a:t>&lt;</a:t>
+            </a:r>
+            <a:r>
+              <a:rPr lang="ko-KR" altLang="en-US" sz="1000" dirty="0"/>
+              <a:t>코드</a:t>
+            </a:r>
+            <a:r>
+              <a:rPr lang="en-US" altLang="ko-KR" sz="1000" dirty="0"/>
+              <a:t>&gt;</a:t>
+            </a:r>
+            <a:endParaRPr lang="ko-KR" altLang="en-US" sz="1000" dirty="0"/>
+          </a:p>
+        </p:txBody>
+      </p:sp>
+      <p:sp>
+        <p:nvSpPr>
+          <p:cNvPr id="12" name="TextBox 11">
+            <a:extLst>
+              <a:ext uri="{FF2B5EF4-FFF2-40B4-BE49-F238E27FC236}">
+                <a16:creationId xmlns:a16="http://schemas.microsoft.com/office/drawing/2014/main" id="{00CF2F64-E595-FCAC-982F-405ECDF12830}"/>
+              </a:ext>
+            </a:extLst>
+          </p:cNvPr>
+          <p:cNvSpPr txBox="1"/>
+          <p:nvPr/>
+        </p:nvSpPr>
+        <p:spPr>
+          <a:xfrm>
+            <a:off x="6024978" y="2190709"/>
+            <a:ext cx="1453255" cy="246221"/>
+          </a:xfrm>
+          <a:prstGeom prst="rect">
+            <a:avLst/>
+          </a:prstGeom>
+          <a:noFill/>
+        </p:spPr>
+        <p:txBody>
+          <a:bodyPr wrap="square" rtlCol="0">
+            <a:spAutoFit/>
+          </a:bodyPr>
+          <a:lstStyle/>
+          <a:p>
+            <a:r>
+              <a:rPr lang="en-US" altLang="ko-KR" sz="1000" dirty="0"/>
+              <a:t>&lt;API </a:t>
+            </a:r>
+            <a:r>
+              <a:rPr lang="ko-KR" altLang="en-US" sz="1000" dirty="0"/>
+              <a:t>요청</a:t>
+            </a:r>
+            <a:r>
+              <a:rPr lang="en-US" altLang="ko-KR" sz="1000" dirty="0"/>
+              <a:t>/</a:t>
+            </a:r>
+            <a:r>
+              <a:rPr lang="ko-KR" altLang="en-US" sz="1000" dirty="0"/>
+              <a:t> 결과</a:t>
+            </a:r>
+            <a:r>
+              <a:rPr lang="en-US" altLang="ko-KR" sz="1000" dirty="0"/>
+              <a:t>&gt;</a:t>
+            </a:r>
+            <a:endParaRPr lang="ko-KR" altLang="en-US" sz="1000" dirty="0"/>
+          </a:p>
+        </p:txBody>
+      </p:sp>
+    </p:spTree>
+    <p:extLst>
+      <p:ext uri="{BB962C8B-B14F-4D97-AF65-F5344CB8AC3E}">
+        <p14:creationId xmlns:p14="http://schemas.microsoft.com/office/powerpoint/2010/main" val="2505647566"/>
+      </p:ext>
+    </p:extLst>
+  </p:cSld>
+  <p:clrMapOvr>
+    <a:masterClrMapping/>
+  </p:clrMapOvr>
+</p:sld>
+</file>
+
+<file path=ppt/slides/slide28.xml><?xml version="1.0" encoding="utf-8"?>
 <p:sld xmlns:a="http://schemas.openxmlformats.org/drawingml/2006/main" xmlns:r="http://schemas.openxmlformats.org/officeDocument/2006/relationships" xmlns:p="http://schemas.openxmlformats.org/presentationml/2006/main">
   <p:cSld>
     <p:spTree>
@@ -10881,11 +13516,19 @@
           <a:p>
             <a:r>
               <a:rPr lang="en-US" altLang="ko-KR" dirty="0"/>
-              <a:t>: GET,POST,PUT,PATCH,DELETE </a:t>
-            </a:r>
-            <a:r>
-              <a:rPr lang="ko-KR" altLang="en-US" dirty="0"/>
-              <a:t>실행</a:t>
+              <a:t>: HTTP</a:t>
+            </a:r>
+            <a:r>
+              <a:rPr lang="ko-KR" altLang="en-US" dirty="0"/>
+              <a:t> </a:t>
+            </a:r>
+            <a:r>
+              <a:rPr lang="en-US" altLang="ko-KR" dirty="0"/>
+              <a:t>METHOD</a:t>
+            </a:r>
+            <a:r>
+              <a:rPr lang="ko-KR" altLang="en-US" dirty="0"/>
+              <a:t> 실행</a:t>
             </a:r>
           </a:p>
         </p:txBody>
@@ -10998,7 +13641,7 @@
 </p:sld>
 </file>
 
-<file path=ppt/slides/slide26.xml><?xml version="1.0" encoding="utf-8"?>
+<file path=ppt/slides/slide29.xml><?xml version="1.0" encoding="utf-8"?>
 <p:sld xmlns:a="http://schemas.openxmlformats.org/drawingml/2006/main" xmlns:r="http://schemas.openxmlformats.org/officeDocument/2006/relationships" xmlns:p="http://schemas.openxmlformats.org/presentationml/2006/main">
   <p:cSld>
     <p:spTree>
@@ -11109,11 +13752,19 @@
           <a:p>
             <a:r>
               <a:rPr lang="en-US" altLang="ko-KR" dirty="0"/>
-              <a:t>: GET,POST,PUT,PATCH,DELETE </a:t>
-            </a:r>
-            <a:r>
-              <a:rPr lang="ko-KR" altLang="en-US" dirty="0"/>
-              <a:t>실행</a:t>
+              <a:t>: HTTP</a:t>
+            </a:r>
+            <a:r>
+              <a:rPr lang="ko-KR" altLang="en-US" dirty="0"/>
+              <a:t> </a:t>
+            </a:r>
+            <a:r>
+              <a:rPr lang="en-US" altLang="ko-KR" dirty="0"/>
+              <a:t>METHOD</a:t>
+            </a:r>
+            <a:r>
+              <a:rPr lang="ko-KR" altLang="en-US" dirty="0"/>
+              <a:t> 실행</a:t>
             </a:r>
           </a:p>
         </p:txBody>
@@ -11261,7 +13912,7 @@
 </p:sld>
 </file>
 
-<file path=ppt/slides/slide27.xml><?xml version="1.0" encoding="utf-8"?>
+<file path=ppt/slides/slide3.xml><?xml version="1.0" encoding="utf-8"?>
 <p:sld xmlns:a="http://schemas.openxmlformats.org/drawingml/2006/main" xmlns:r="http://schemas.openxmlformats.org/officeDocument/2006/relationships" xmlns:p="http://schemas.openxmlformats.org/presentationml/2006/main">
   <p:cSld>
     <p:spTree>
@@ -11300,6 +13951,142 @@
           <a:lstStyle/>
           <a:p>
             <a:r>
+              <a:rPr lang="ko-KR" altLang="en-US" dirty="0"/>
+              <a:t>프로젝트 대상</a:t>
+            </a:r>
+          </a:p>
+        </p:txBody>
+      </p:sp>
+      <p:sp>
+        <p:nvSpPr>
+          <p:cNvPr id="3" name="내용 개체 틀 2">
+            <a:extLst>
+              <a:ext uri="{FF2B5EF4-FFF2-40B4-BE49-F238E27FC236}">
+                <a16:creationId xmlns:a16="http://schemas.microsoft.com/office/drawing/2014/main" id="{35073930-E78C-43A1-B5DD-05B1EB89C6F7}"/>
+              </a:ext>
+            </a:extLst>
+          </p:cNvPr>
+          <p:cNvSpPr>
+            <a:spLocks noGrp="1"/>
+          </p:cNvSpPr>
+          <p:nvPr>
+            <p:ph idx="1"/>
+          </p:nvPr>
+        </p:nvSpPr>
+        <p:spPr/>
+        <p:txBody>
+          <a:bodyPr/>
+          <a:lstStyle/>
+          <a:p>
+            <a:r>
+              <a:rPr lang="en-US" altLang="ko-KR" dirty="0"/>
+              <a:t>JAVA(MVC </a:t>
+            </a:r>
+            <a:r>
+              <a:rPr lang="ko-KR" altLang="en-US" dirty="0"/>
+              <a:t>외</a:t>
+            </a:r>
+            <a:r>
+              <a:rPr lang="en-US" altLang="ko-KR" dirty="0"/>
+              <a:t>)</a:t>
+            </a:r>
+          </a:p>
+          <a:p>
+            <a:r>
+              <a:rPr lang="en-US" altLang="ko-KR" dirty="0"/>
+              <a:t>JAVA SPRINGBOOT</a:t>
+            </a:r>
+          </a:p>
+          <a:p>
+            <a:pPr lvl="1"/>
+            <a:r>
+              <a:rPr lang="en-US" altLang="ko-KR" dirty="0"/>
+              <a:t>Model/view/controller</a:t>
+            </a:r>
+          </a:p>
+          <a:p>
+            <a:pPr lvl="1"/>
+            <a:r>
+              <a:rPr lang="ko-KR" altLang="en-US" dirty="0"/>
+              <a:t>데이터 가져오는 라이브러리 </a:t>
+            </a:r>
+            <a:r>
+              <a:rPr lang="en-US" altLang="ko-KR" dirty="0"/>
+              <a:t>1</a:t>
+            </a:r>
+            <a:r>
+              <a:rPr lang="ko-KR" altLang="en-US" dirty="0"/>
+              <a:t>개 사용</a:t>
+            </a:r>
+            <a:endParaRPr lang="en-US" altLang="ko-KR" dirty="0"/>
+          </a:p>
+          <a:p>
+            <a:r>
+              <a:rPr lang="en-US" altLang="ko-KR" dirty="0"/>
+              <a:t>API</a:t>
+            </a:r>
+          </a:p>
+          <a:p>
+            <a:r>
+              <a:rPr lang="en-US" altLang="ko-KR" dirty="0" err="1"/>
+              <a:t>Postgresql</a:t>
+            </a:r>
+            <a:endParaRPr lang="ko-KR" altLang="en-US" dirty="0"/>
+          </a:p>
+        </p:txBody>
+      </p:sp>
+    </p:spTree>
+    <p:extLst>
+      <p:ext uri="{BB962C8B-B14F-4D97-AF65-F5344CB8AC3E}">
+        <p14:creationId xmlns:p14="http://schemas.microsoft.com/office/powerpoint/2010/main" val="1842530633"/>
+      </p:ext>
+    </p:extLst>
+  </p:cSld>
+  <p:clrMapOvr>
+    <a:masterClrMapping/>
+  </p:clrMapOvr>
+</p:sld>
+</file>
+
+<file path=ppt/slides/slide30.xml><?xml version="1.0" encoding="utf-8"?>
+<p:sld xmlns:a="http://schemas.openxmlformats.org/drawingml/2006/main" xmlns:r="http://schemas.openxmlformats.org/officeDocument/2006/relationships" xmlns:p="http://schemas.openxmlformats.org/presentationml/2006/main">
+  <p:cSld>
+    <p:spTree>
+      <p:nvGrpSpPr>
+        <p:cNvPr id="1" name=""/>
+        <p:cNvGrpSpPr/>
+        <p:nvPr/>
+      </p:nvGrpSpPr>
+      <p:grpSpPr>
+        <a:xfrm>
+          <a:off x="0" y="0"/>
+          <a:ext cx="0" cy="0"/>
+          <a:chOff x="0" y="0"/>
+          <a:chExt cx="0" cy="0"/>
+        </a:xfrm>
+      </p:grpSpPr>
+      <p:sp>
+        <p:nvSpPr>
+          <p:cNvPr id="2" name="제목 1">
+            <a:extLst>
+              <a:ext uri="{FF2B5EF4-FFF2-40B4-BE49-F238E27FC236}">
+                <a16:creationId xmlns:a16="http://schemas.microsoft.com/office/drawing/2014/main" id="{2AE3036C-B43A-6DCB-E1FE-FE8564BCA7F2}"/>
+              </a:ext>
+            </a:extLst>
+          </p:cNvPr>
+          <p:cNvSpPr>
+            <a:spLocks noGrp="1"/>
+          </p:cNvSpPr>
+          <p:nvPr>
+            <p:ph type="title"/>
+          </p:nvPr>
+        </p:nvSpPr>
+        <p:spPr/>
+        <p:txBody>
+          <a:bodyPr/>
+          <a:lstStyle/>
+          <a:p>
+            <a:r>
               <a:rPr lang="en-US" altLang="ko-KR" dirty="0"/>
               <a:t>3</a:t>
             </a:r>
@@ -11338,11 +14125,19 @@
           <a:p>
             <a:r>
               <a:rPr lang="en-US" altLang="ko-KR" dirty="0"/>
-              <a:t>: GET,POST,PUT,PATCH,DELETE </a:t>
-            </a:r>
-            <a:r>
-              <a:rPr lang="ko-KR" altLang="en-US" dirty="0"/>
-              <a:t>실행</a:t>
+              <a:t>: HTTP</a:t>
+            </a:r>
+            <a:r>
+              <a:rPr lang="ko-KR" altLang="en-US" dirty="0"/>
+              <a:t> </a:t>
+            </a:r>
+            <a:r>
+              <a:rPr lang="en-US" altLang="ko-KR" dirty="0"/>
+              <a:t>METHOD</a:t>
+            </a:r>
+            <a:r>
+              <a:rPr lang="ko-KR" altLang="en-US" dirty="0"/>
+              <a:t> 실행</a:t>
             </a:r>
           </a:p>
         </p:txBody>
@@ -11434,7 +14229,7 @@
 </p:sld>
 </file>
 
-<file path=ppt/slides/slide28.xml><?xml version="1.0" encoding="utf-8"?>
+<file path=ppt/slides/slide31.xml><?xml version="1.0" encoding="utf-8"?>
 <p:sld xmlns:a="http://schemas.openxmlformats.org/drawingml/2006/main" xmlns:r="http://schemas.openxmlformats.org/officeDocument/2006/relationships" xmlns:p="http://schemas.openxmlformats.org/presentationml/2006/main">
   <p:cSld>
     <p:spTree>
@@ -11545,11 +14340,19 @@
           <a:p>
             <a:r>
               <a:rPr lang="en-US" altLang="ko-KR" dirty="0"/>
-              <a:t>: GET,POST,PUT,PATCH,DELETE </a:t>
-            </a:r>
-            <a:r>
-              <a:rPr lang="ko-KR" altLang="en-US" dirty="0"/>
-              <a:t>실행</a:t>
+              <a:t>: HTTP</a:t>
+            </a:r>
+            <a:r>
+              <a:rPr lang="ko-KR" altLang="en-US" dirty="0"/>
+              <a:t> </a:t>
+            </a:r>
+            <a:r>
+              <a:rPr lang="en-US" altLang="ko-KR" dirty="0"/>
+              <a:t>METHOD</a:t>
+            </a:r>
+            <a:r>
+              <a:rPr lang="ko-KR" altLang="en-US" dirty="0"/>
+              <a:t> 실행</a:t>
             </a:r>
           </a:p>
         </p:txBody>
@@ -11662,7 +14465,7 @@
 </p:sld>
 </file>
 
-<file path=ppt/slides/slide29.xml><?xml version="1.0" encoding="utf-8"?>
+<file path=ppt/slides/slide32.xml><?xml version="1.0" encoding="utf-8"?>
 <p:sld xmlns:a="http://schemas.openxmlformats.org/drawingml/2006/main" xmlns:r="http://schemas.openxmlformats.org/officeDocument/2006/relationships" xmlns:p="http://schemas.openxmlformats.org/presentationml/2006/main">
   <p:cSld>
     <p:spTree>
@@ -11917,143 +14720,7 @@
 </p:sld>
 </file>
 
-<file path=ppt/slides/slide3.xml><?xml version="1.0" encoding="utf-8"?>
-<p:sld xmlns:a="http://schemas.openxmlformats.org/drawingml/2006/main" xmlns:r="http://schemas.openxmlformats.org/officeDocument/2006/relationships" xmlns:p="http://schemas.openxmlformats.org/presentationml/2006/main">
-  <p:cSld>
-    <p:spTree>
-      <p:nvGrpSpPr>
-        <p:cNvPr id="1" name=""/>
-        <p:cNvGrpSpPr/>
-        <p:nvPr/>
-      </p:nvGrpSpPr>
-      <p:grpSpPr>
-        <a:xfrm>
-          <a:off x="0" y="0"/>
-          <a:ext cx="0" cy="0"/>
-          <a:chOff x="0" y="0"/>
-          <a:chExt cx="0" cy="0"/>
-        </a:xfrm>
-      </p:grpSpPr>
-      <p:sp>
-        <p:nvSpPr>
-          <p:cNvPr id="2" name="제목 1">
-            <a:extLst>
-              <a:ext uri="{FF2B5EF4-FFF2-40B4-BE49-F238E27FC236}">
-                <a16:creationId xmlns:a16="http://schemas.microsoft.com/office/drawing/2014/main" id="{2AE3036C-B43A-6DCB-E1FE-FE8564BCA7F2}"/>
-              </a:ext>
-            </a:extLst>
-          </p:cNvPr>
-          <p:cNvSpPr>
-            <a:spLocks noGrp="1"/>
-          </p:cNvSpPr>
-          <p:nvPr>
-            <p:ph type="title"/>
-          </p:nvPr>
-        </p:nvSpPr>
-        <p:spPr/>
-        <p:txBody>
-          <a:bodyPr/>
-          <a:lstStyle/>
-          <a:p>
-            <a:r>
-              <a:rPr lang="ko-KR" altLang="en-US" dirty="0"/>
-              <a:t>프로젝트 대상</a:t>
-            </a:r>
-          </a:p>
-        </p:txBody>
-      </p:sp>
-      <p:sp>
-        <p:nvSpPr>
-          <p:cNvPr id="3" name="내용 개체 틀 2">
-            <a:extLst>
-              <a:ext uri="{FF2B5EF4-FFF2-40B4-BE49-F238E27FC236}">
-                <a16:creationId xmlns:a16="http://schemas.microsoft.com/office/drawing/2014/main" id="{35073930-E78C-43A1-B5DD-05B1EB89C6F7}"/>
-              </a:ext>
-            </a:extLst>
-          </p:cNvPr>
-          <p:cNvSpPr>
-            <a:spLocks noGrp="1"/>
-          </p:cNvSpPr>
-          <p:nvPr>
-            <p:ph idx="1"/>
-          </p:nvPr>
-        </p:nvSpPr>
-        <p:spPr/>
-        <p:txBody>
-          <a:bodyPr/>
-          <a:lstStyle/>
-          <a:p>
-            <a:r>
-              <a:rPr lang="en-US" altLang="ko-KR" dirty="0"/>
-              <a:t>JAVA(MVC </a:t>
-            </a:r>
-            <a:r>
-              <a:rPr lang="ko-KR" altLang="en-US" dirty="0"/>
-              <a:t>외</a:t>
-            </a:r>
-            <a:r>
-              <a:rPr lang="en-US" altLang="ko-KR" dirty="0"/>
-              <a:t>)</a:t>
-            </a:r>
-          </a:p>
-          <a:p>
-            <a:r>
-              <a:rPr lang="en-US" altLang="ko-KR" dirty="0"/>
-              <a:t>JAVA SPRINGBOOT</a:t>
-            </a:r>
-          </a:p>
-          <a:p>
-            <a:pPr lvl="1"/>
-            <a:r>
-              <a:rPr lang="en-US" altLang="ko-KR" dirty="0"/>
-              <a:t>Model/view/controller</a:t>
-            </a:r>
-          </a:p>
-          <a:p>
-            <a:pPr lvl="1"/>
-            <a:r>
-              <a:rPr lang="ko-KR" altLang="en-US" dirty="0"/>
-              <a:t>데이터 가져오는 라이브러리 </a:t>
-            </a:r>
-            <a:r>
-              <a:rPr lang="en-US" altLang="ko-KR" dirty="0"/>
-              <a:t>1</a:t>
-            </a:r>
-            <a:r>
-              <a:rPr lang="ko-KR" altLang="en-US" dirty="0"/>
-              <a:t>개 사용</a:t>
-            </a:r>
-            <a:endParaRPr lang="en-US" altLang="ko-KR" dirty="0"/>
-          </a:p>
-          <a:p>
-            <a:r>
-              <a:rPr lang="en-US" altLang="ko-KR" dirty="0"/>
-              <a:t>API</a:t>
-            </a:r>
-          </a:p>
-          <a:p>
-            <a:r>
-              <a:rPr lang="en-US" altLang="ko-KR" dirty="0" err="1"/>
-              <a:t>Postgresql</a:t>
-            </a:r>
-            <a:endParaRPr lang="ko-KR" altLang="en-US" dirty="0"/>
-          </a:p>
-        </p:txBody>
-      </p:sp>
-    </p:spTree>
-    <p:extLst>
-      <p:ext uri="{BB962C8B-B14F-4D97-AF65-F5344CB8AC3E}">
-        <p14:creationId xmlns:p14="http://schemas.microsoft.com/office/powerpoint/2010/main" val="1842530633"/>
-      </p:ext>
-    </p:extLst>
-  </p:cSld>
-  <p:clrMapOvr>
-    <a:masterClrMapping/>
-  </p:clrMapOvr>
-</p:sld>
-</file>
-
-<file path=ppt/slides/slide30.xml><?xml version="1.0" encoding="utf-8"?>
+<file path=ppt/slides/slide33.xml><?xml version="1.0" encoding="utf-8"?>
 <p:sld xmlns:a="http://schemas.openxmlformats.org/drawingml/2006/main" xmlns:r="http://schemas.openxmlformats.org/officeDocument/2006/relationships" xmlns:p="http://schemas.openxmlformats.org/presentationml/2006/main">
   <p:cSld>
     <p:spTree>
@@ -12347,7 +15014,7 @@
 </p:sld>
 </file>
 
-<file path=ppt/slides/slide31.xml><?xml version="1.0" encoding="utf-8"?>
+<file path=ppt/slides/slide34.xml><?xml version="1.0" encoding="utf-8"?>
 <p:sld xmlns:a="http://schemas.openxmlformats.org/drawingml/2006/main" xmlns:r="http://schemas.openxmlformats.org/officeDocument/2006/relationships" xmlns:p="http://schemas.openxmlformats.org/presentationml/2006/main">
   <p:cSld>
     <p:spTree>
@@ -12576,7 +15243,7 @@
 </p:sld>
 </file>
 
-<file path=ppt/slides/slide32.xml><?xml version="1.0" encoding="utf-8"?>
+<file path=ppt/slides/slide35.xml><?xml version="1.0" encoding="utf-8"?>
 <p:sld xmlns:a="http://schemas.openxmlformats.org/drawingml/2006/main" xmlns:r="http://schemas.openxmlformats.org/officeDocument/2006/relationships" xmlns:p="http://schemas.openxmlformats.org/presentationml/2006/main">
   <p:cSld>
     <p:spTree>
@@ -12844,7 +15511,7 @@
 </p:sld>
 </file>
 
-<file path=ppt/slides/slide33.xml><?xml version="1.0" encoding="utf-8"?>
+<file path=ppt/slides/slide36.xml><?xml version="1.0" encoding="utf-8"?>
 <p:sld xmlns:a="http://schemas.openxmlformats.org/drawingml/2006/main" xmlns:r="http://schemas.openxmlformats.org/officeDocument/2006/relationships" xmlns:p="http://schemas.openxmlformats.org/presentationml/2006/main">
   <p:cSld>
     <p:spTree>
@@ -12944,15 +15611,33 @@
             <a:pPr lvl="2"/>
             <a:r>
               <a:rPr lang="en-US" altLang="ko-KR" dirty="0"/>
-              <a:t>Basic-auth</a:t>
-            </a:r>
+              <a:t>Basic-auth : </a:t>
+            </a:r>
+            <a:r>
+              <a:rPr lang="ko-KR" altLang="en-US" dirty="0"/>
+              <a:t>로그인 유저의 </a:t>
+            </a:r>
+            <a:r>
+              <a:rPr lang="en-US" altLang="ko-KR" dirty="0"/>
+              <a:t>id/pw </a:t>
+            </a:r>
+            <a:r>
+              <a:rPr lang="ko-KR" altLang="en-US" dirty="0"/>
+              <a:t>를 헤더에 넣어 요청</a:t>
+            </a:r>
+            <a:endParaRPr lang="en-US" altLang="ko-KR" dirty="0"/>
           </a:p>
           <a:p>
             <a:pPr lvl="2"/>
             <a:r>
               <a:rPr lang="en-US" altLang="ko-KR" dirty="0"/>
-              <a:t>Barer-token</a:t>
-            </a:r>
+              <a:t>Barer-token : </a:t>
+            </a:r>
+            <a:r>
+              <a:rPr lang="ko-KR" altLang="en-US" dirty="0"/>
+              <a:t>유저 생성 시 토큰을 발급하여 해당 토큰으로 인증</a:t>
+            </a:r>
+            <a:endParaRPr lang="en-US" altLang="ko-KR" dirty="0"/>
           </a:p>
           <a:p>
             <a:pPr lvl="2"/>
@@ -13026,8 +15711,8 @@
         </p:blipFill>
         <p:spPr>
           <a:xfrm>
-            <a:off x="6702357" y="3070650"/>
-            <a:ext cx="7939483" cy="3777617"/>
+            <a:off x="6096000" y="3873744"/>
+            <a:ext cx="5965051" cy="2838179"/>
           </a:xfrm>
           <a:prstGeom prst="rect">
             <a:avLst/>
@@ -13052,7 +15737,7 @@
 </p:sld>
 </file>
 
-<file path=ppt/slides/slide34.xml><?xml version="1.0" encoding="utf-8"?>
+<file path=ppt/slides/slide37.xml><?xml version="1.0" encoding="utf-8"?>
 <p:sld xmlns:a="http://schemas.openxmlformats.org/drawingml/2006/main" xmlns:r="http://schemas.openxmlformats.org/officeDocument/2006/relationships" xmlns:p="http://schemas.openxmlformats.org/presentationml/2006/main">
   <p:cSld>
     <p:spTree>
@@ -13317,7 +16002,7 @@
 </p:sld>
 </file>
 
-<file path=ppt/slides/slide35.xml><?xml version="1.0" encoding="utf-8"?>
+<file path=ppt/slides/slide38.xml><?xml version="1.0" encoding="utf-8"?>
 <p:sld xmlns:a="http://schemas.openxmlformats.org/drawingml/2006/main" xmlns:r="http://schemas.openxmlformats.org/officeDocument/2006/relationships" xmlns:p="http://schemas.openxmlformats.org/presentationml/2006/main">
   <p:cSld>
     <p:spTree>
@@ -13402,7 +16087,15 @@
             <a:pPr lvl="1"/>
             <a:r>
               <a:rPr lang="en-US" altLang="ko-KR" dirty="0"/>
-              <a:t>Entity 	</a:t>
+              <a:t>Entity : payload</a:t>
+            </a:r>
+            <a:r>
+              <a:rPr lang="ko-KR" altLang="en-US" dirty="0"/>
+              <a:t>에 대한 메타정보 </a:t>
+            </a:r>
+            <a:r>
+              <a:rPr lang="en-US" altLang="ko-KR" dirty="0"/>
+              <a:t>	</a:t>
             </a:r>
           </a:p>
           <a:p>
@@ -13455,7 +16148,7 @@
 </p:sld>
 </file>
 
-<file path=ppt/slides/slide36.xml><?xml version="1.0" encoding="utf-8"?>
+<file path=ppt/slides/slide39.xml><?xml version="1.0" encoding="utf-8"?>
 <p:sld xmlns:a="http://schemas.openxmlformats.org/drawingml/2006/main" xmlns:r="http://schemas.openxmlformats.org/officeDocument/2006/relationships" xmlns:p="http://schemas.openxmlformats.org/presentationml/2006/main">
   <p:cSld>
     <p:spTree>
@@ -13560,13 +16253,167 @@
             <a:endParaRPr lang="en-US" altLang="ko-KR" dirty="0"/>
           </a:p>
           <a:p>
+            <a:pPr lvl="1"/>
             <a:r>
               <a:rPr lang="en-US" altLang="ko-KR" dirty="0"/>
               <a:t>JPA </a:t>
             </a:r>
             <a:r>
               <a:rPr lang="ko-KR" altLang="en-US" dirty="0"/>
+              <a:t>기본 쿼리 형태는 </a:t>
+            </a:r>
+            <a:r>
+              <a:rPr lang="en-US" altLang="ko-KR" dirty="0"/>
+              <a:t>SELECT {} FROM {} WHERE {} </a:t>
+            </a:r>
+            <a:r>
+              <a:rPr lang="ko-KR" altLang="en-US" dirty="0"/>
+              <a:t>이며</a:t>
+            </a:r>
+            <a:r>
+              <a:rPr lang="en-US" altLang="ko-KR" dirty="0"/>
+              <a:t>, distinct, like </a:t>
+            </a:r>
+            <a:r>
+              <a:rPr lang="ko-KR" altLang="en-US" dirty="0"/>
+              <a:t>등 기본 쿼리에 쿼리 결과를 구체화하는 형태임</a:t>
+            </a:r>
+            <a:r>
+              <a:rPr lang="en-US" altLang="ko-KR" dirty="0"/>
+              <a:t>. </a:t>
+            </a:r>
+          </a:p>
+          <a:p>
+            <a:pPr lvl="1"/>
+            <a:r>
+              <a:rPr lang="ko-KR" altLang="en-US" dirty="0"/>
+              <a:t>사용 가능 </a:t>
+            </a:r>
+            <a:r>
+              <a:rPr lang="en-US" altLang="ko-KR" dirty="0"/>
+              <a:t>method naming convention : https://docs.spring.io/spring-data/jpa/reference/jpa/query-methods.html</a:t>
+            </a:r>
+          </a:p>
+          <a:p>
+            <a:pPr lvl="1"/>
+            <a:r>
+              <a:rPr lang="en-US" altLang="ko-KR" dirty="0"/>
+              <a:t>With, join </a:t>
+            </a:r>
+            <a:r>
+              <a:rPr lang="ko-KR" altLang="en-US" dirty="0"/>
+              <a:t>등 복합 쿼리의 형태는 기본 기능으로 사용할 수 없음</a:t>
+            </a:r>
+            <a:endParaRPr lang="en-US" altLang="ko-KR" dirty="0"/>
+          </a:p>
+          <a:p>
+            <a:pPr lvl="1"/>
+            <a:r>
+              <a:rPr lang="en-US" altLang="ko-KR" dirty="0"/>
+              <a:t>@Query annotation </a:t>
+            </a:r>
+            <a:r>
+              <a:rPr lang="ko-KR" altLang="en-US" dirty="0"/>
+              <a:t>을 사용하여 </a:t>
+            </a:r>
+            <a:r>
+              <a:rPr lang="en-US" altLang="ko-KR" dirty="0"/>
+              <a:t>string </a:t>
+            </a:r>
+            <a:r>
+              <a:rPr lang="ko-KR" altLang="en-US" dirty="0"/>
+              <a:t>형태로 쿼리문을 직접 작성하여 사용할 수 있으나</a:t>
+            </a:r>
+            <a:r>
+              <a:rPr lang="en-US" altLang="ko-KR" dirty="0"/>
+              <a:t>, java </a:t>
+            </a:r>
+            <a:r>
+              <a:rPr lang="ko-KR" altLang="en-US" dirty="0"/>
+              <a:t>문법이므로 </a:t>
+            </a:r>
+            <a:r>
+              <a:rPr lang="en-US" altLang="ko-KR" dirty="0"/>
+              <a:t>DB </a:t>
+            </a:r>
+            <a:r>
+              <a:rPr lang="ko-KR" altLang="en-US" dirty="0"/>
+              <a:t>쿼리를 모두 사용할 수 없음  </a:t>
+            </a:r>
+            <a:endParaRPr lang="en-US" altLang="ko-KR" dirty="0"/>
+          </a:p>
+          <a:p>
+            <a:pPr lvl="1"/>
+            <a:r>
+              <a:rPr lang="en-US" altLang="ko-KR" dirty="0"/>
+              <a:t>Native</a:t>
+            </a:r>
+            <a:r>
+              <a:rPr lang="ko-KR" altLang="en-US" dirty="0"/>
+              <a:t> </a:t>
+            </a:r>
+            <a:r>
+              <a:rPr lang="en-US" altLang="ko-KR" dirty="0"/>
+              <a:t>query</a:t>
+            </a:r>
+            <a:r>
+              <a:rPr lang="ko-KR" altLang="en-US" dirty="0"/>
+              <a:t> 사용 시 </a:t>
+            </a:r>
+            <a:r>
+              <a:rPr lang="en-US" altLang="ko-KR" dirty="0"/>
+              <a:t>DB </a:t>
+            </a:r>
+            <a:r>
+              <a:rPr lang="ko-KR" altLang="en-US" dirty="0"/>
+              <a:t>쿼리 형태로 사용 </a:t>
+            </a:r>
+            <a:endParaRPr lang="en-US" altLang="ko-KR" dirty="0"/>
+          </a:p>
+          <a:p>
+            <a:r>
+              <a:rPr lang="en-US" altLang="ko-KR" dirty="0"/>
+              <a:t>JPA </a:t>
+            </a:r>
+            <a:r>
+              <a:rPr lang="ko-KR" altLang="en-US" dirty="0"/>
               <a:t>외 쿼리 사용 가능한 프레임워크 조사 </a:t>
+            </a:r>
+            <a:endParaRPr lang="en-US" altLang="ko-KR" dirty="0"/>
+          </a:p>
+          <a:p>
+            <a:pPr lvl="1"/>
+            <a:r>
+              <a:rPr lang="ko-KR" altLang="en-US" dirty="0"/>
+              <a:t>다른 </a:t>
+            </a:r>
+            <a:r>
+              <a:rPr lang="en-US" altLang="ko-KR" dirty="0"/>
+              <a:t>ORM : </a:t>
+            </a:r>
+            <a:r>
+              <a:rPr lang="en-US" altLang="ko-KR" dirty="0" err="1"/>
+              <a:t>MyBatis</a:t>
+            </a:r>
+            <a:endParaRPr lang="en-US" altLang="ko-KR" dirty="0"/>
+          </a:p>
+          <a:p>
+            <a:pPr lvl="1"/>
+            <a:r>
+              <a:rPr lang="en-US" altLang="ko-KR" dirty="0"/>
+              <a:t>JPA </a:t>
+            </a:r>
+            <a:r>
+              <a:rPr lang="ko-KR" altLang="en-US" dirty="0"/>
+              <a:t>쿼리 보완 </a:t>
+            </a:r>
+            <a:r>
+              <a:rPr lang="en-US" altLang="ko-KR" dirty="0"/>
+              <a:t>: </a:t>
+            </a:r>
+            <a:r>
+              <a:rPr lang="en-US" altLang="ko-KR" dirty="0" err="1"/>
+              <a:t>QueryDsl</a:t>
             </a:r>
             <a:endParaRPr lang="en-US" altLang="ko-KR" dirty="0"/>
           </a:p>
@@ -14023,6 +16870,1503 @@
     <p:extLst>
       <p:ext uri="{BB962C8B-B14F-4D97-AF65-F5344CB8AC3E}">
         <p14:creationId xmlns:p14="http://schemas.microsoft.com/office/powerpoint/2010/main" val="3441040071"/>
+      </p:ext>
+    </p:extLst>
+  </p:cSld>
+  <p:clrMapOvr>
+    <a:masterClrMapping/>
+  </p:clrMapOvr>
+</p:sld>
+</file>
+
+<file path=ppt/slides/slide40.xml><?xml version="1.0" encoding="utf-8"?>
+<p:sld xmlns:a="http://schemas.openxmlformats.org/drawingml/2006/main" xmlns:r="http://schemas.openxmlformats.org/officeDocument/2006/relationships" xmlns:p="http://schemas.openxmlformats.org/presentationml/2006/main">
+  <p:cSld>
+    <p:spTree>
+      <p:nvGrpSpPr>
+        <p:cNvPr id="1" name="">
+          <a:extLst>
+            <a:ext uri="{FF2B5EF4-FFF2-40B4-BE49-F238E27FC236}">
+              <a16:creationId xmlns:a16="http://schemas.microsoft.com/office/drawing/2014/main" id="{5084F72C-6AA6-D2F4-1F0B-AAADF03BA197}"/>
+            </a:ext>
+          </a:extLst>
+        </p:cNvPr>
+        <p:cNvGrpSpPr/>
+        <p:nvPr/>
+      </p:nvGrpSpPr>
+      <p:grpSpPr>
+        <a:xfrm>
+          <a:off x="0" y="0"/>
+          <a:ext cx="0" cy="0"/>
+          <a:chOff x="0" y="0"/>
+          <a:chExt cx="0" cy="0"/>
+        </a:xfrm>
+      </p:grpSpPr>
+      <p:sp>
+        <p:nvSpPr>
+          <p:cNvPr id="2" name="제목 1">
+            <a:extLst>
+              <a:ext uri="{FF2B5EF4-FFF2-40B4-BE49-F238E27FC236}">
+                <a16:creationId xmlns:a16="http://schemas.microsoft.com/office/drawing/2014/main" id="{D97DE5CC-3E61-7FB1-CBDE-BAEB3B65C435}"/>
+              </a:ext>
+            </a:extLst>
+          </p:cNvPr>
+          <p:cNvSpPr>
+            <a:spLocks noGrp="1"/>
+          </p:cNvSpPr>
+          <p:nvPr>
+            <p:ph type="title"/>
+          </p:nvPr>
+        </p:nvSpPr>
+        <p:spPr/>
+        <p:txBody>
+          <a:bodyPr/>
+          <a:lstStyle/>
+          <a:p>
+            <a:r>
+              <a:rPr lang="en-US" altLang="ko-KR" dirty="0"/>
+              <a:t>4</a:t>
+            </a:r>
+            <a:r>
+              <a:rPr lang="ko-KR" altLang="en-US" dirty="0"/>
+              <a:t>주차</a:t>
+            </a:r>
+          </a:p>
+        </p:txBody>
+      </p:sp>
+      <p:sp>
+        <p:nvSpPr>
+          <p:cNvPr id="4" name="내용 개체 틀 3">
+            <a:extLst>
+              <a:ext uri="{FF2B5EF4-FFF2-40B4-BE49-F238E27FC236}">
+                <a16:creationId xmlns:a16="http://schemas.microsoft.com/office/drawing/2014/main" id="{38772715-6CC7-E755-E1E5-24FC2F31037C}"/>
+              </a:ext>
+            </a:extLst>
+          </p:cNvPr>
+          <p:cNvSpPr>
+            <a:spLocks noGrp="1"/>
+          </p:cNvSpPr>
+          <p:nvPr>
+            <p:ph idx="1"/>
+          </p:nvPr>
+        </p:nvSpPr>
+        <p:spPr/>
+        <p:txBody>
+          <a:bodyPr/>
+          <a:lstStyle/>
+          <a:p>
+            <a:r>
+              <a:rPr lang="ko-KR" altLang="en-US" dirty="0"/>
+              <a:t>목적 </a:t>
+            </a:r>
+            <a:r>
+              <a:rPr lang="en-US" altLang="ko-KR" dirty="0"/>
+              <a:t>: </a:t>
+            </a:r>
+            <a:r>
+              <a:rPr lang="ko-KR" altLang="en-US" dirty="0"/>
+              <a:t>복잡한 쿼리 사용 </a:t>
+            </a:r>
+            <a:endParaRPr lang="en-US" altLang="ko-KR" dirty="0"/>
+          </a:p>
+          <a:p>
+            <a:r>
+              <a:rPr lang="ko-KR" altLang="en-US" dirty="0"/>
+              <a:t>주제 </a:t>
+            </a:r>
+            <a:r>
+              <a:rPr lang="en-US" altLang="ko-KR" dirty="0"/>
+              <a:t>: </a:t>
+            </a:r>
+            <a:r>
+              <a:rPr lang="ko-KR" altLang="en-US" dirty="0"/>
+              <a:t>시작정보관리시스템</a:t>
+            </a:r>
+            <a:r>
+              <a:rPr lang="en-US" altLang="ko-KR" dirty="0"/>
+              <a:t> </a:t>
+            </a:r>
+            <a:r>
+              <a:rPr lang="ko-KR" altLang="en-US" dirty="0"/>
+              <a:t>프로젝트</a:t>
+            </a:r>
+            <a:r>
+              <a:rPr lang="en-US" altLang="ko-KR" dirty="0"/>
+              <a:t>, APQP </a:t>
+            </a:r>
+            <a:r>
+              <a:rPr lang="ko-KR" altLang="en-US" dirty="0"/>
+              <a:t>관리를</a:t>
+            </a:r>
+            <a:r>
+              <a:rPr lang="en-US" altLang="ko-KR" dirty="0"/>
+              <a:t> API</a:t>
+            </a:r>
+            <a:r>
+              <a:rPr lang="ko-KR" altLang="en-US" dirty="0"/>
+              <a:t>로 구현</a:t>
+            </a:r>
+            <a:endParaRPr lang="en-US" altLang="ko-KR" dirty="0"/>
+          </a:p>
+          <a:p>
+            <a:r>
+              <a:rPr lang="ko-KR" altLang="en-US" dirty="0"/>
+              <a:t>기능 </a:t>
+            </a:r>
+            <a:r>
+              <a:rPr lang="en-US" altLang="ko-KR" dirty="0"/>
+              <a:t>: </a:t>
+            </a:r>
+            <a:r>
+              <a:rPr lang="ko-KR" altLang="en-US" dirty="0"/>
+              <a:t>프로젝트 </a:t>
+            </a:r>
+            <a:r>
+              <a:rPr lang="en-US" altLang="ko-KR" dirty="0"/>
+              <a:t>CRU, APQP CRUD </a:t>
+            </a:r>
+          </a:p>
+          <a:p>
+            <a:r>
+              <a:rPr lang="ko-KR" altLang="en-US" dirty="0"/>
+              <a:t>테이블 </a:t>
+            </a:r>
+            <a:r>
+              <a:rPr lang="en-US" altLang="ko-KR" dirty="0"/>
+              <a:t>: </a:t>
+            </a:r>
+            <a:r>
+              <a:rPr lang="ko-KR" altLang="en-US" dirty="0"/>
+              <a:t>프로젝트</a:t>
+            </a:r>
+            <a:r>
+              <a:rPr lang="en-US" altLang="ko-KR" dirty="0"/>
+              <a:t>, APQP, </a:t>
+            </a:r>
+            <a:r>
+              <a:rPr lang="ko-KR" altLang="en-US" dirty="0"/>
+              <a:t>사용자   </a:t>
+            </a:r>
+            <a:endParaRPr lang="en-US" altLang="ko-KR" dirty="0"/>
+          </a:p>
+        </p:txBody>
+      </p:sp>
+      <p:sp>
+        <p:nvSpPr>
+          <p:cNvPr id="5" name="텍스트 개체 틀 4">
+            <a:extLst>
+              <a:ext uri="{FF2B5EF4-FFF2-40B4-BE49-F238E27FC236}">
+                <a16:creationId xmlns:a16="http://schemas.microsoft.com/office/drawing/2014/main" id="{ABA471E9-BCC0-1DEF-5DF8-33B0E83F0AFD}"/>
+              </a:ext>
+            </a:extLst>
+          </p:cNvPr>
+          <p:cNvSpPr>
+            <a:spLocks noGrp="1"/>
+          </p:cNvSpPr>
+          <p:nvPr>
+            <p:ph type="body" sz="quarter" idx="13"/>
+          </p:nvPr>
+        </p:nvSpPr>
+        <p:spPr/>
+        <p:txBody>
+          <a:bodyPr/>
+          <a:lstStyle/>
+          <a:p>
+            <a:r>
+              <a:rPr lang="en-US" altLang="ko-KR" dirty="0"/>
+              <a:t>: </a:t>
+            </a:r>
+            <a:r>
+              <a:rPr lang="ko-KR" altLang="en-US" dirty="0"/>
+              <a:t>종합 실습</a:t>
+            </a:r>
+          </a:p>
+        </p:txBody>
+      </p:sp>
+      <p:graphicFrame>
+        <p:nvGraphicFramePr>
+          <p:cNvPr id="3" name="표 2">
+            <a:extLst>
+              <a:ext uri="{FF2B5EF4-FFF2-40B4-BE49-F238E27FC236}">
+                <a16:creationId xmlns:a16="http://schemas.microsoft.com/office/drawing/2014/main" id="{872B3ABA-0CBD-805B-579F-9D273016F344}"/>
+              </a:ext>
+            </a:extLst>
+          </p:cNvPr>
+          <p:cNvGraphicFramePr>
+            <a:graphicFrameLocks noGrp="1"/>
+          </p:cNvGraphicFramePr>
+          <p:nvPr>
+            <p:extLst>
+              <p:ext uri="{D42A27DB-BD31-4B8C-83A1-F6EECF244321}">
+                <p14:modId xmlns:p14="http://schemas.microsoft.com/office/powerpoint/2010/main" val="4088758515"/>
+              </p:ext>
+            </p:extLst>
+          </p:nvPr>
+        </p:nvGraphicFramePr>
+        <p:xfrm>
+          <a:off x="1166030" y="3582731"/>
+          <a:ext cx="1768889" cy="3263392"/>
+        </p:xfrm>
+        <a:graphic>
+          <a:graphicData uri="http://schemas.openxmlformats.org/drawingml/2006/table">
+            <a:tbl>
+              <a:tblPr firstRow="1" bandRow="1">
+                <a:tableStyleId>{5C22544A-7EE6-4342-B048-85BDC9FD1C3A}</a:tableStyleId>
+              </a:tblPr>
+              <a:tblGrid>
+                <a:gridCol w="1768889">
+                  <a:extLst>
+                    <a:ext uri="{9D8B030D-6E8A-4147-A177-3AD203B41FA5}">
+                      <a16:colId xmlns:a16="http://schemas.microsoft.com/office/drawing/2014/main" val="4094867038"/>
+                    </a:ext>
+                  </a:extLst>
+                </a:gridCol>
+              </a:tblGrid>
+              <a:tr h="407924">
+                <a:tc>
+                  <a:txBody>
+                    <a:bodyPr/>
+                    <a:lstStyle/>
+                    <a:p>
+                      <a:pPr algn="ctr" latinLnBrk="1"/>
+                      <a:r>
+                        <a:rPr lang="ko-KR" altLang="en-US" sz="1600" dirty="0"/>
+                        <a:t>프로젝트</a:t>
+                      </a:r>
+                    </a:p>
+                  </a:txBody>
+                  <a:tcPr marL="19899" marR="19899" marT="50292" marB="50292"/>
+                </a:tc>
+                <a:extLst>
+                  <a:ext uri="{0D108BD9-81ED-4DB2-BD59-A6C34878D82A}">
+                    <a16:rowId xmlns:a16="http://schemas.microsoft.com/office/drawing/2014/main" val="1276217851"/>
+                  </a:ext>
+                </a:extLst>
+              </a:tr>
+              <a:tr h="407924">
+                <a:tc>
+                  <a:txBody>
+                    <a:bodyPr/>
+                    <a:lstStyle/>
+                    <a:p>
+                      <a:pPr algn="ctr" latinLnBrk="1"/>
+                      <a:r>
+                        <a:rPr lang="en-US" altLang="ko-KR" sz="1600" dirty="0"/>
+                        <a:t>ID</a:t>
+                      </a:r>
+                      <a:endParaRPr lang="ko-KR" altLang="en-US" sz="1600" dirty="0"/>
+                    </a:p>
+                  </a:txBody>
+                  <a:tcPr marL="19899" marR="19899" marT="50292" marB="50292"/>
+                </a:tc>
+                <a:extLst>
+                  <a:ext uri="{0D108BD9-81ED-4DB2-BD59-A6C34878D82A}">
+                    <a16:rowId xmlns:a16="http://schemas.microsoft.com/office/drawing/2014/main" val="2667479159"/>
+                  </a:ext>
+                </a:extLst>
+              </a:tr>
+              <a:tr h="407924">
+                <a:tc>
+                  <a:txBody>
+                    <a:bodyPr/>
+                    <a:lstStyle/>
+                    <a:p>
+                      <a:pPr algn="ctr" latinLnBrk="1"/>
+                      <a:r>
+                        <a:rPr lang="ko-KR" altLang="en-US" sz="1600" dirty="0"/>
+                        <a:t>프로젝트 코드</a:t>
+                      </a:r>
+                    </a:p>
+                  </a:txBody>
+                  <a:tcPr marL="19899" marR="19899" marT="50292" marB="50292"/>
+                </a:tc>
+                <a:extLst>
+                  <a:ext uri="{0D108BD9-81ED-4DB2-BD59-A6C34878D82A}">
+                    <a16:rowId xmlns:a16="http://schemas.microsoft.com/office/drawing/2014/main" val="2502060349"/>
+                  </a:ext>
+                </a:extLst>
+              </a:tr>
+              <a:tr h="407924">
+                <a:tc>
+                  <a:txBody>
+                    <a:bodyPr/>
+                    <a:lstStyle/>
+                    <a:p>
+                      <a:pPr algn="ctr" latinLnBrk="1"/>
+                      <a:r>
+                        <a:rPr lang="ko-KR" altLang="en-US" sz="1600" dirty="0"/>
+                        <a:t>프로젝트 명</a:t>
+                      </a:r>
+                    </a:p>
+                  </a:txBody>
+                  <a:tcPr marL="19899" marR="19899" marT="50292" marB="50292"/>
+                </a:tc>
+                <a:extLst>
+                  <a:ext uri="{0D108BD9-81ED-4DB2-BD59-A6C34878D82A}">
+                    <a16:rowId xmlns:a16="http://schemas.microsoft.com/office/drawing/2014/main" val="731666387"/>
+                  </a:ext>
+                </a:extLst>
+              </a:tr>
+              <a:tr h="407924">
+                <a:tc>
+                  <a:txBody>
+                    <a:bodyPr/>
+                    <a:lstStyle/>
+                    <a:p>
+                      <a:pPr algn="ctr" latinLnBrk="1"/>
+                      <a:r>
+                        <a:rPr lang="ko-KR" altLang="en-US" sz="1600" dirty="0"/>
+                        <a:t>등록자</a:t>
+                      </a:r>
+                      <a:r>
+                        <a:rPr lang="en-US" altLang="ko-KR" sz="1600" dirty="0"/>
+                        <a:t>(</a:t>
+                      </a:r>
+                      <a:r>
+                        <a:rPr lang="ko-KR" altLang="en-US" sz="1600" dirty="0"/>
+                        <a:t>사용자 </a:t>
+                      </a:r>
+                      <a:r>
+                        <a:rPr lang="en-US" altLang="ko-KR" sz="1600" dirty="0"/>
+                        <a:t>ID)</a:t>
+                      </a:r>
+                      <a:endParaRPr lang="ko-KR" altLang="en-US" sz="1600" dirty="0"/>
+                    </a:p>
+                  </a:txBody>
+                  <a:tcPr marL="19899" marR="19899" marT="50292" marB="50292"/>
+                </a:tc>
+                <a:extLst>
+                  <a:ext uri="{0D108BD9-81ED-4DB2-BD59-A6C34878D82A}">
+                    <a16:rowId xmlns:a16="http://schemas.microsoft.com/office/drawing/2014/main" val="3950793137"/>
+                  </a:ext>
+                </a:extLst>
+              </a:tr>
+              <a:tr h="407924">
+                <a:tc>
+                  <a:txBody>
+                    <a:bodyPr/>
+                    <a:lstStyle/>
+                    <a:p>
+                      <a:pPr algn="ctr" latinLnBrk="1"/>
+                      <a:r>
+                        <a:rPr lang="ko-KR" altLang="en-US" sz="1600" dirty="0"/>
+                        <a:t>등록일</a:t>
+                      </a:r>
+                    </a:p>
+                  </a:txBody>
+                  <a:tcPr marL="19899" marR="19899" marT="50292" marB="50292"/>
+                </a:tc>
+                <a:extLst>
+                  <a:ext uri="{0D108BD9-81ED-4DB2-BD59-A6C34878D82A}">
+                    <a16:rowId xmlns:a16="http://schemas.microsoft.com/office/drawing/2014/main" val="3815125620"/>
+                  </a:ext>
+                </a:extLst>
+              </a:tr>
+              <a:tr h="407924">
+                <a:tc>
+                  <a:txBody>
+                    <a:bodyPr/>
+                    <a:lstStyle/>
+                    <a:p>
+                      <a:pPr algn="ctr" latinLnBrk="1"/>
+                      <a:r>
+                        <a:rPr lang="ko-KR" altLang="en-US" sz="1600" dirty="0"/>
+                        <a:t>진행상태</a:t>
+                      </a:r>
+                    </a:p>
+                  </a:txBody>
+                  <a:tcPr marL="19899" marR="19899" marT="50292" marB="50292"/>
+                </a:tc>
+                <a:extLst>
+                  <a:ext uri="{0D108BD9-81ED-4DB2-BD59-A6C34878D82A}">
+                    <a16:rowId xmlns:a16="http://schemas.microsoft.com/office/drawing/2014/main" val="359354835"/>
+                  </a:ext>
+                </a:extLst>
+              </a:tr>
+              <a:tr h="407924">
+                <a:tc>
+                  <a:txBody>
+                    <a:bodyPr/>
+                    <a:lstStyle/>
+                    <a:p>
+                      <a:pPr algn="ctr" latinLnBrk="1"/>
+                      <a:r>
+                        <a:rPr lang="ko-KR" altLang="en-US" sz="1600" dirty="0"/>
+                        <a:t>변경일</a:t>
+                      </a:r>
+                    </a:p>
+                  </a:txBody>
+                  <a:tcPr marL="19899" marR="19899" marT="50292" marB="50292"/>
+                </a:tc>
+                <a:extLst>
+                  <a:ext uri="{0D108BD9-81ED-4DB2-BD59-A6C34878D82A}">
+                    <a16:rowId xmlns:a16="http://schemas.microsoft.com/office/drawing/2014/main" val="3900647768"/>
+                  </a:ext>
+                </a:extLst>
+              </a:tr>
+            </a:tbl>
+          </a:graphicData>
+        </a:graphic>
+      </p:graphicFrame>
+      <p:graphicFrame>
+        <p:nvGraphicFramePr>
+          <p:cNvPr id="6" name="표 5">
+            <a:extLst>
+              <a:ext uri="{FF2B5EF4-FFF2-40B4-BE49-F238E27FC236}">
+                <a16:creationId xmlns:a16="http://schemas.microsoft.com/office/drawing/2014/main" id="{A5CE6B68-A913-A06B-FB81-F4E787DD72C6}"/>
+              </a:ext>
+            </a:extLst>
+          </p:cNvPr>
+          <p:cNvGraphicFramePr>
+            <a:graphicFrameLocks noGrp="1"/>
+          </p:cNvGraphicFramePr>
+          <p:nvPr>
+            <p:extLst>
+              <p:ext uri="{D42A27DB-BD31-4B8C-83A1-F6EECF244321}">
+                <p14:modId xmlns:p14="http://schemas.microsoft.com/office/powerpoint/2010/main" val="3621489503"/>
+              </p:ext>
+            </p:extLst>
+          </p:nvPr>
+        </p:nvGraphicFramePr>
+        <p:xfrm>
+          <a:off x="3442793" y="3582731"/>
+          <a:ext cx="1768889" cy="2855468"/>
+        </p:xfrm>
+        <a:graphic>
+          <a:graphicData uri="http://schemas.openxmlformats.org/drawingml/2006/table">
+            <a:tbl>
+              <a:tblPr firstRow="1" bandRow="1">
+                <a:tableStyleId>{5C22544A-7EE6-4342-B048-85BDC9FD1C3A}</a:tableStyleId>
+              </a:tblPr>
+              <a:tblGrid>
+                <a:gridCol w="1768889">
+                  <a:extLst>
+                    <a:ext uri="{9D8B030D-6E8A-4147-A177-3AD203B41FA5}">
+                      <a16:colId xmlns:a16="http://schemas.microsoft.com/office/drawing/2014/main" val="4094867038"/>
+                    </a:ext>
+                  </a:extLst>
+                </a:gridCol>
+              </a:tblGrid>
+              <a:tr h="407924">
+                <a:tc>
+                  <a:txBody>
+                    <a:bodyPr/>
+                    <a:lstStyle/>
+                    <a:p>
+                      <a:pPr algn="ctr" latinLnBrk="1"/>
+                      <a:r>
+                        <a:rPr lang="en-US" altLang="ko-KR" sz="1600" dirty="0"/>
+                        <a:t>APQP</a:t>
+                      </a:r>
+                      <a:endParaRPr lang="ko-KR" altLang="en-US" sz="1600" dirty="0"/>
+                    </a:p>
+                  </a:txBody>
+                  <a:tcPr marL="19899" marR="19899" marT="50292" marB="50292"/>
+                </a:tc>
+                <a:extLst>
+                  <a:ext uri="{0D108BD9-81ED-4DB2-BD59-A6C34878D82A}">
+                    <a16:rowId xmlns:a16="http://schemas.microsoft.com/office/drawing/2014/main" val="1276217851"/>
+                  </a:ext>
+                </a:extLst>
+              </a:tr>
+              <a:tr h="407924">
+                <a:tc>
+                  <a:txBody>
+                    <a:bodyPr/>
+                    <a:lstStyle/>
+                    <a:p>
+                      <a:pPr algn="ctr" latinLnBrk="1"/>
+                      <a:r>
+                        <a:rPr lang="en-US" altLang="ko-KR" sz="1600" dirty="0"/>
+                        <a:t>ID</a:t>
+                      </a:r>
+                      <a:endParaRPr lang="ko-KR" altLang="en-US" sz="1600" dirty="0"/>
+                    </a:p>
+                  </a:txBody>
+                  <a:tcPr marL="19899" marR="19899" marT="50292" marB="50292"/>
+                </a:tc>
+                <a:extLst>
+                  <a:ext uri="{0D108BD9-81ED-4DB2-BD59-A6C34878D82A}">
+                    <a16:rowId xmlns:a16="http://schemas.microsoft.com/office/drawing/2014/main" val="652158745"/>
+                  </a:ext>
+                </a:extLst>
+              </a:tr>
+              <a:tr h="407924">
+                <a:tc>
+                  <a:txBody>
+                    <a:bodyPr/>
+                    <a:lstStyle/>
+                    <a:p>
+                      <a:pPr algn="ctr" latinLnBrk="1"/>
+                      <a:r>
+                        <a:rPr lang="ko-KR" altLang="en-US" sz="1600" dirty="0"/>
+                        <a:t>프로젝트 </a:t>
+                      </a:r>
+                      <a:r>
+                        <a:rPr lang="en-US" altLang="ko-KR" sz="1600" dirty="0"/>
+                        <a:t>ID</a:t>
+                      </a:r>
+                      <a:endParaRPr lang="ko-KR" altLang="en-US" sz="1600" dirty="0"/>
+                    </a:p>
+                  </a:txBody>
+                  <a:tcPr marL="19899" marR="19899" marT="50292" marB="50292"/>
+                </a:tc>
+                <a:extLst>
+                  <a:ext uri="{0D108BD9-81ED-4DB2-BD59-A6C34878D82A}">
+                    <a16:rowId xmlns:a16="http://schemas.microsoft.com/office/drawing/2014/main" val="1272589410"/>
+                  </a:ext>
+                </a:extLst>
+              </a:tr>
+              <a:tr h="407924">
+                <a:tc>
+                  <a:txBody>
+                    <a:bodyPr/>
+                    <a:lstStyle/>
+                    <a:p>
+                      <a:pPr algn="ctr" latinLnBrk="1"/>
+                      <a:r>
+                        <a:rPr lang="ko-KR" altLang="en-US" sz="1600" dirty="0"/>
+                        <a:t>부문</a:t>
+                      </a:r>
+                    </a:p>
+                  </a:txBody>
+                  <a:tcPr marL="19899" marR="19899" marT="50292" marB="50292"/>
+                </a:tc>
+                <a:extLst>
+                  <a:ext uri="{0D108BD9-81ED-4DB2-BD59-A6C34878D82A}">
+                    <a16:rowId xmlns:a16="http://schemas.microsoft.com/office/drawing/2014/main" val="4003591451"/>
+                  </a:ext>
+                </a:extLst>
+              </a:tr>
+              <a:tr h="407924">
+                <a:tc>
+                  <a:txBody>
+                    <a:bodyPr/>
+                    <a:lstStyle/>
+                    <a:p>
+                      <a:pPr algn="ctr" latinLnBrk="1"/>
+                      <a:r>
+                        <a:rPr lang="ko-KR" altLang="en-US" sz="1600" dirty="0"/>
+                        <a:t>사용자 </a:t>
+                      </a:r>
+                      <a:r>
+                        <a:rPr lang="en-US" altLang="ko-KR" sz="1600" dirty="0"/>
+                        <a:t>ID</a:t>
+                      </a:r>
+                      <a:endParaRPr lang="ko-KR" altLang="en-US" sz="1600" dirty="0"/>
+                    </a:p>
+                  </a:txBody>
+                  <a:tcPr marL="19899" marR="19899" marT="50292" marB="50292"/>
+                </a:tc>
+                <a:extLst>
+                  <a:ext uri="{0D108BD9-81ED-4DB2-BD59-A6C34878D82A}">
+                    <a16:rowId xmlns:a16="http://schemas.microsoft.com/office/drawing/2014/main" val="76893226"/>
+                  </a:ext>
+                </a:extLst>
+              </a:tr>
+              <a:tr h="407924">
+                <a:tc>
+                  <a:txBody>
+                    <a:bodyPr/>
+                    <a:lstStyle/>
+                    <a:p>
+                      <a:pPr algn="ctr" latinLnBrk="1"/>
+                      <a:r>
+                        <a:rPr lang="ko-KR" altLang="en-US" sz="1600" dirty="0"/>
+                        <a:t>변경일</a:t>
+                      </a:r>
+                    </a:p>
+                  </a:txBody>
+                  <a:tcPr marL="19899" marR="19899" marT="50292" marB="50292"/>
+                </a:tc>
+                <a:extLst>
+                  <a:ext uri="{0D108BD9-81ED-4DB2-BD59-A6C34878D82A}">
+                    <a16:rowId xmlns:a16="http://schemas.microsoft.com/office/drawing/2014/main" val="994285546"/>
+                  </a:ext>
+                </a:extLst>
+              </a:tr>
+              <a:tr h="407924">
+                <a:tc>
+                  <a:txBody>
+                    <a:bodyPr/>
+                    <a:lstStyle/>
+                    <a:p>
+                      <a:pPr algn="ctr" latinLnBrk="1"/>
+                      <a:r>
+                        <a:rPr lang="ko-KR" altLang="en-US" sz="1600" dirty="0"/>
+                        <a:t>필수 여부</a:t>
+                      </a:r>
+                    </a:p>
+                  </a:txBody>
+                  <a:tcPr marL="19899" marR="19899" marT="50292" marB="50292"/>
+                </a:tc>
+                <a:extLst>
+                  <a:ext uri="{0D108BD9-81ED-4DB2-BD59-A6C34878D82A}">
+                    <a16:rowId xmlns:a16="http://schemas.microsoft.com/office/drawing/2014/main" val="2050035580"/>
+                  </a:ext>
+                </a:extLst>
+              </a:tr>
+            </a:tbl>
+          </a:graphicData>
+        </a:graphic>
+      </p:graphicFrame>
+      <p:graphicFrame>
+        <p:nvGraphicFramePr>
+          <p:cNvPr id="7" name="표 6">
+            <a:extLst>
+              <a:ext uri="{FF2B5EF4-FFF2-40B4-BE49-F238E27FC236}">
+                <a16:creationId xmlns:a16="http://schemas.microsoft.com/office/drawing/2014/main" id="{E76CCD43-A498-0062-D862-7B0196B86DC9}"/>
+              </a:ext>
+            </a:extLst>
+          </p:cNvPr>
+          <p:cNvGraphicFramePr>
+            <a:graphicFrameLocks noGrp="1"/>
+          </p:cNvGraphicFramePr>
+          <p:nvPr>
+            <p:extLst>
+              <p:ext uri="{D42A27DB-BD31-4B8C-83A1-F6EECF244321}">
+                <p14:modId xmlns:p14="http://schemas.microsoft.com/office/powerpoint/2010/main" val="3141699906"/>
+              </p:ext>
+            </p:extLst>
+          </p:nvPr>
+        </p:nvGraphicFramePr>
+        <p:xfrm>
+          <a:off x="5793447" y="3582731"/>
+          <a:ext cx="1768889" cy="2855468"/>
+        </p:xfrm>
+        <a:graphic>
+          <a:graphicData uri="http://schemas.openxmlformats.org/drawingml/2006/table">
+            <a:tbl>
+              <a:tblPr firstRow="1" bandRow="1">
+                <a:tableStyleId>{5C22544A-7EE6-4342-B048-85BDC9FD1C3A}</a:tableStyleId>
+              </a:tblPr>
+              <a:tblGrid>
+                <a:gridCol w="1768889">
+                  <a:extLst>
+                    <a:ext uri="{9D8B030D-6E8A-4147-A177-3AD203B41FA5}">
+                      <a16:colId xmlns:a16="http://schemas.microsoft.com/office/drawing/2014/main" val="4094867038"/>
+                    </a:ext>
+                  </a:extLst>
+                </a:gridCol>
+              </a:tblGrid>
+              <a:tr h="407924">
+                <a:tc>
+                  <a:txBody>
+                    <a:bodyPr/>
+                    <a:lstStyle/>
+                    <a:p>
+                      <a:pPr algn="ctr" latinLnBrk="1"/>
+                      <a:r>
+                        <a:rPr lang="ko-KR" altLang="en-US" sz="1600" dirty="0"/>
+                        <a:t>사용자</a:t>
+                      </a:r>
+                    </a:p>
+                  </a:txBody>
+                  <a:tcPr marL="19899" marR="19899" marT="50292" marB="50292"/>
+                </a:tc>
+                <a:extLst>
+                  <a:ext uri="{0D108BD9-81ED-4DB2-BD59-A6C34878D82A}">
+                    <a16:rowId xmlns:a16="http://schemas.microsoft.com/office/drawing/2014/main" val="1276217851"/>
+                  </a:ext>
+                </a:extLst>
+              </a:tr>
+              <a:tr h="407924">
+                <a:tc>
+                  <a:txBody>
+                    <a:bodyPr/>
+                    <a:lstStyle/>
+                    <a:p>
+                      <a:pPr algn="ctr" latinLnBrk="1"/>
+                      <a:r>
+                        <a:rPr lang="en-US" altLang="ko-KR" sz="1600" dirty="0"/>
+                        <a:t>ID</a:t>
+                      </a:r>
+                      <a:endParaRPr lang="ko-KR" altLang="en-US" sz="1600" dirty="0"/>
+                    </a:p>
+                  </a:txBody>
+                  <a:tcPr marL="19899" marR="19899" marT="50292" marB="50292"/>
+                </a:tc>
+                <a:extLst>
+                  <a:ext uri="{0D108BD9-81ED-4DB2-BD59-A6C34878D82A}">
+                    <a16:rowId xmlns:a16="http://schemas.microsoft.com/office/drawing/2014/main" val="652158745"/>
+                  </a:ext>
+                </a:extLst>
+              </a:tr>
+              <a:tr h="407924">
+                <a:tc>
+                  <a:txBody>
+                    <a:bodyPr/>
+                    <a:lstStyle/>
+                    <a:p>
+                      <a:pPr algn="ctr" latinLnBrk="1"/>
+                      <a:r>
+                        <a:rPr lang="ko-KR" altLang="en-US" sz="1600" dirty="0"/>
+                        <a:t>로그인 </a:t>
+                      </a:r>
+                      <a:r>
+                        <a:rPr lang="en-US" altLang="ko-KR" sz="1600" dirty="0"/>
+                        <a:t>id</a:t>
+                      </a:r>
+                      <a:endParaRPr lang="ko-KR" altLang="en-US" sz="1600" dirty="0"/>
+                    </a:p>
+                  </a:txBody>
+                  <a:tcPr marL="19899" marR="19899" marT="50292" marB="50292"/>
+                </a:tc>
+                <a:extLst>
+                  <a:ext uri="{0D108BD9-81ED-4DB2-BD59-A6C34878D82A}">
+                    <a16:rowId xmlns:a16="http://schemas.microsoft.com/office/drawing/2014/main" val="1272589410"/>
+                  </a:ext>
+                </a:extLst>
+              </a:tr>
+              <a:tr h="407924">
+                <a:tc>
+                  <a:txBody>
+                    <a:bodyPr/>
+                    <a:lstStyle/>
+                    <a:p>
+                      <a:pPr algn="ctr" latinLnBrk="1"/>
+                      <a:r>
+                        <a:rPr lang="ko-KR" altLang="en-US" sz="1600" dirty="0"/>
+                        <a:t>사용자 명</a:t>
+                      </a:r>
+                    </a:p>
+                  </a:txBody>
+                  <a:tcPr marL="19899" marR="19899" marT="50292" marB="50292"/>
+                </a:tc>
+                <a:extLst>
+                  <a:ext uri="{0D108BD9-81ED-4DB2-BD59-A6C34878D82A}">
+                    <a16:rowId xmlns:a16="http://schemas.microsoft.com/office/drawing/2014/main" val="3011758056"/>
+                  </a:ext>
+                </a:extLst>
+              </a:tr>
+              <a:tr h="407924">
+                <a:tc>
+                  <a:txBody>
+                    <a:bodyPr/>
+                    <a:lstStyle/>
+                    <a:p>
+                      <a:pPr algn="ctr" latinLnBrk="1"/>
+                      <a:r>
+                        <a:rPr lang="ko-KR" altLang="en-US" sz="1600" dirty="0"/>
+                        <a:t>부서</a:t>
+                      </a:r>
+                    </a:p>
+                  </a:txBody>
+                  <a:tcPr marL="19899" marR="19899" marT="50292" marB="50292"/>
+                </a:tc>
+                <a:extLst>
+                  <a:ext uri="{0D108BD9-81ED-4DB2-BD59-A6C34878D82A}">
+                    <a16:rowId xmlns:a16="http://schemas.microsoft.com/office/drawing/2014/main" val="3295184694"/>
+                  </a:ext>
+                </a:extLst>
+              </a:tr>
+              <a:tr h="407924">
+                <a:tc>
+                  <a:txBody>
+                    <a:bodyPr/>
+                    <a:lstStyle/>
+                    <a:p>
+                      <a:pPr algn="ctr" latinLnBrk="1"/>
+                      <a:r>
+                        <a:rPr lang="ko-KR" altLang="en-US" sz="1600" dirty="0"/>
+                        <a:t>직위</a:t>
+                      </a:r>
+                    </a:p>
+                  </a:txBody>
+                  <a:tcPr marL="19899" marR="19899" marT="50292" marB="50292"/>
+                </a:tc>
+                <a:extLst>
+                  <a:ext uri="{0D108BD9-81ED-4DB2-BD59-A6C34878D82A}">
+                    <a16:rowId xmlns:a16="http://schemas.microsoft.com/office/drawing/2014/main" val="4117063952"/>
+                  </a:ext>
+                </a:extLst>
+              </a:tr>
+              <a:tr h="407924">
+                <a:tc>
+                  <a:txBody>
+                    <a:bodyPr/>
+                    <a:lstStyle/>
+                    <a:p>
+                      <a:pPr algn="ctr" latinLnBrk="1"/>
+                      <a:r>
+                        <a:rPr lang="ko-KR" altLang="en-US" sz="1600" dirty="0"/>
+                        <a:t>사용 여부</a:t>
+                      </a:r>
+                    </a:p>
+                  </a:txBody>
+                  <a:tcPr marL="19899" marR="19899" marT="50292" marB="50292"/>
+                </a:tc>
+                <a:extLst>
+                  <a:ext uri="{0D108BD9-81ED-4DB2-BD59-A6C34878D82A}">
+                    <a16:rowId xmlns:a16="http://schemas.microsoft.com/office/drawing/2014/main" val="3462207818"/>
+                  </a:ext>
+                </a:extLst>
+              </a:tr>
+            </a:tbl>
+          </a:graphicData>
+        </a:graphic>
+      </p:graphicFrame>
+      <p:sp>
+        <p:nvSpPr>
+          <p:cNvPr id="8" name="직사각형 7">
+            <a:extLst>
+              <a:ext uri="{FF2B5EF4-FFF2-40B4-BE49-F238E27FC236}">
+                <a16:creationId xmlns:a16="http://schemas.microsoft.com/office/drawing/2014/main" id="{BAAF36B7-BBA5-0644-DCAB-88E461C9700D}"/>
+              </a:ext>
+            </a:extLst>
+          </p:cNvPr>
+          <p:cNvSpPr/>
+          <p:nvPr/>
+        </p:nvSpPr>
+        <p:spPr>
+          <a:xfrm>
+            <a:off x="1166030" y="3999345"/>
+            <a:ext cx="1768889" cy="369455"/>
+          </a:xfrm>
+          <a:prstGeom prst="rect">
+            <a:avLst/>
+          </a:prstGeom>
+          <a:noFill/>
+          <a:ln>
+            <a:solidFill>
+              <a:schemeClr val="accent2"/>
+            </a:solidFill>
+          </a:ln>
+        </p:spPr>
+        <p:style>
+          <a:lnRef idx="2">
+            <a:schemeClr val="accent1">
+              <a:shade val="15000"/>
+            </a:schemeClr>
+          </a:lnRef>
+          <a:fillRef idx="1">
+            <a:schemeClr val="accent1"/>
+          </a:fillRef>
+          <a:effectRef idx="0">
+            <a:schemeClr val="accent1"/>
+          </a:effectRef>
+          <a:fontRef idx="minor">
+            <a:schemeClr val="lt1"/>
+          </a:fontRef>
+        </p:style>
+        <p:txBody>
+          <a:bodyPr rtlCol="0" anchor="ctr"/>
+          <a:lstStyle/>
+          <a:p>
+            <a:pPr algn="ctr"/>
+            <a:endParaRPr lang="ko-KR" altLang="en-US"/>
+          </a:p>
+        </p:txBody>
+      </p:sp>
+      <p:sp>
+        <p:nvSpPr>
+          <p:cNvPr id="9" name="직사각형 8">
+            <a:extLst>
+              <a:ext uri="{FF2B5EF4-FFF2-40B4-BE49-F238E27FC236}">
+                <a16:creationId xmlns:a16="http://schemas.microsoft.com/office/drawing/2014/main" id="{2882B899-975F-FAF0-A7CA-D26004C36A7F}"/>
+              </a:ext>
+            </a:extLst>
+          </p:cNvPr>
+          <p:cNvSpPr/>
+          <p:nvPr/>
+        </p:nvSpPr>
+        <p:spPr>
+          <a:xfrm>
+            <a:off x="3442793" y="4382655"/>
+            <a:ext cx="1768889" cy="369455"/>
+          </a:xfrm>
+          <a:prstGeom prst="rect">
+            <a:avLst/>
+          </a:prstGeom>
+          <a:noFill/>
+          <a:ln>
+            <a:solidFill>
+              <a:schemeClr val="accent2"/>
+            </a:solidFill>
+          </a:ln>
+        </p:spPr>
+        <p:style>
+          <a:lnRef idx="2">
+            <a:schemeClr val="accent1">
+              <a:shade val="15000"/>
+            </a:schemeClr>
+          </a:lnRef>
+          <a:fillRef idx="1">
+            <a:schemeClr val="accent1"/>
+          </a:fillRef>
+          <a:effectRef idx="0">
+            <a:schemeClr val="accent1"/>
+          </a:effectRef>
+          <a:fontRef idx="minor">
+            <a:schemeClr val="lt1"/>
+          </a:fontRef>
+        </p:style>
+        <p:txBody>
+          <a:bodyPr rtlCol="0" anchor="ctr"/>
+          <a:lstStyle/>
+          <a:p>
+            <a:pPr algn="ctr"/>
+            <a:endParaRPr lang="ko-KR" altLang="en-US"/>
+          </a:p>
+        </p:txBody>
+      </p:sp>
+      <p:sp>
+        <p:nvSpPr>
+          <p:cNvPr id="10" name="직사각형 9">
+            <a:extLst>
+              <a:ext uri="{FF2B5EF4-FFF2-40B4-BE49-F238E27FC236}">
+                <a16:creationId xmlns:a16="http://schemas.microsoft.com/office/drawing/2014/main" id="{1DBE356D-5D0D-1EE8-5207-8C5247B04F70}"/>
+              </a:ext>
+            </a:extLst>
+          </p:cNvPr>
+          <p:cNvSpPr/>
+          <p:nvPr/>
+        </p:nvSpPr>
+        <p:spPr>
+          <a:xfrm>
+            <a:off x="5793447" y="4019889"/>
+            <a:ext cx="1768889" cy="369455"/>
+          </a:xfrm>
+          <a:prstGeom prst="rect">
+            <a:avLst/>
+          </a:prstGeom>
+          <a:noFill/>
+          <a:ln>
+            <a:solidFill>
+              <a:schemeClr val="accent6"/>
+            </a:solidFill>
+          </a:ln>
+        </p:spPr>
+        <p:style>
+          <a:lnRef idx="2">
+            <a:schemeClr val="accent1">
+              <a:shade val="15000"/>
+            </a:schemeClr>
+          </a:lnRef>
+          <a:fillRef idx="1">
+            <a:schemeClr val="accent1"/>
+          </a:fillRef>
+          <a:effectRef idx="0">
+            <a:schemeClr val="accent1"/>
+          </a:effectRef>
+          <a:fontRef idx="minor">
+            <a:schemeClr val="lt1"/>
+          </a:fontRef>
+        </p:style>
+        <p:txBody>
+          <a:bodyPr rtlCol="0" anchor="ctr"/>
+          <a:lstStyle/>
+          <a:p>
+            <a:pPr algn="ctr"/>
+            <a:endParaRPr lang="ko-KR" altLang="en-US"/>
+          </a:p>
+        </p:txBody>
+      </p:sp>
+      <p:sp>
+        <p:nvSpPr>
+          <p:cNvPr id="11" name="직사각형 10">
+            <a:extLst>
+              <a:ext uri="{FF2B5EF4-FFF2-40B4-BE49-F238E27FC236}">
+                <a16:creationId xmlns:a16="http://schemas.microsoft.com/office/drawing/2014/main" id="{B263ED97-189D-1C46-E9DD-B36F13B2F8D5}"/>
+              </a:ext>
+            </a:extLst>
+          </p:cNvPr>
+          <p:cNvSpPr/>
+          <p:nvPr/>
+        </p:nvSpPr>
+        <p:spPr>
+          <a:xfrm>
+            <a:off x="3468162" y="5219045"/>
+            <a:ext cx="1768889" cy="369455"/>
+          </a:xfrm>
+          <a:prstGeom prst="rect">
+            <a:avLst/>
+          </a:prstGeom>
+          <a:noFill/>
+          <a:ln>
+            <a:solidFill>
+              <a:schemeClr val="accent6"/>
+            </a:solidFill>
+          </a:ln>
+        </p:spPr>
+        <p:style>
+          <a:lnRef idx="2">
+            <a:schemeClr val="accent1">
+              <a:shade val="15000"/>
+            </a:schemeClr>
+          </a:lnRef>
+          <a:fillRef idx="1">
+            <a:schemeClr val="accent1"/>
+          </a:fillRef>
+          <a:effectRef idx="0">
+            <a:schemeClr val="accent1"/>
+          </a:effectRef>
+          <a:fontRef idx="minor">
+            <a:schemeClr val="lt1"/>
+          </a:fontRef>
+        </p:style>
+        <p:txBody>
+          <a:bodyPr rtlCol="0" anchor="ctr"/>
+          <a:lstStyle/>
+          <a:p>
+            <a:pPr algn="ctr"/>
+            <a:endParaRPr lang="ko-KR" altLang="en-US"/>
+          </a:p>
+        </p:txBody>
+      </p:sp>
+      <p:sp>
+        <p:nvSpPr>
+          <p:cNvPr id="12" name="직사각형 11">
+            <a:extLst>
+              <a:ext uri="{FF2B5EF4-FFF2-40B4-BE49-F238E27FC236}">
+                <a16:creationId xmlns:a16="http://schemas.microsoft.com/office/drawing/2014/main" id="{17E61DEB-E412-1EA4-8A9A-87AADB6EC3E2}"/>
+              </a:ext>
+            </a:extLst>
+          </p:cNvPr>
+          <p:cNvSpPr/>
+          <p:nvPr/>
+        </p:nvSpPr>
+        <p:spPr>
+          <a:xfrm>
+            <a:off x="1166029" y="5219045"/>
+            <a:ext cx="1768889" cy="369455"/>
+          </a:xfrm>
+          <a:prstGeom prst="rect">
+            <a:avLst/>
+          </a:prstGeom>
+          <a:noFill/>
+          <a:ln>
+            <a:solidFill>
+              <a:schemeClr val="accent6"/>
+            </a:solidFill>
+          </a:ln>
+        </p:spPr>
+        <p:style>
+          <a:lnRef idx="2">
+            <a:schemeClr val="accent1">
+              <a:shade val="15000"/>
+            </a:schemeClr>
+          </a:lnRef>
+          <a:fillRef idx="1">
+            <a:schemeClr val="accent1"/>
+          </a:fillRef>
+          <a:effectRef idx="0">
+            <a:schemeClr val="accent1"/>
+          </a:effectRef>
+          <a:fontRef idx="minor">
+            <a:schemeClr val="lt1"/>
+          </a:fontRef>
+        </p:style>
+        <p:txBody>
+          <a:bodyPr rtlCol="0" anchor="ctr"/>
+          <a:lstStyle/>
+          <a:p>
+            <a:pPr algn="ctr"/>
+            <a:endParaRPr lang="ko-KR" altLang="en-US"/>
+          </a:p>
+        </p:txBody>
+      </p:sp>
+      <p:cxnSp>
+        <p:nvCxnSpPr>
+          <p:cNvPr id="14" name="연결선: 꺾임 13">
+            <a:extLst>
+              <a:ext uri="{FF2B5EF4-FFF2-40B4-BE49-F238E27FC236}">
+                <a16:creationId xmlns:a16="http://schemas.microsoft.com/office/drawing/2014/main" id="{0A6E3287-1D46-E869-2005-F6509CA07E92}"/>
+              </a:ext>
+            </a:extLst>
+          </p:cNvPr>
+          <p:cNvCxnSpPr>
+            <a:stCxn id="8" idx="3"/>
+            <a:endCxn id="9" idx="1"/>
+          </p:cNvCxnSpPr>
+          <p:nvPr/>
+        </p:nvCxnSpPr>
+        <p:spPr>
+          <a:xfrm>
+            <a:off x="2934919" y="4184073"/>
+            <a:ext cx="507874" cy="383310"/>
+          </a:xfrm>
+          <a:prstGeom prst="bentConnector3">
+            <a:avLst/>
+          </a:prstGeom>
+        </p:spPr>
+        <p:style>
+          <a:lnRef idx="2">
+            <a:schemeClr val="accent2"/>
+          </a:lnRef>
+          <a:fillRef idx="0">
+            <a:schemeClr val="accent2"/>
+          </a:fillRef>
+          <a:effectRef idx="1">
+            <a:schemeClr val="accent2"/>
+          </a:effectRef>
+          <a:fontRef idx="minor">
+            <a:schemeClr val="tx1"/>
+          </a:fontRef>
+        </p:style>
+      </p:cxnSp>
+      <p:cxnSp>
+        <p:nvCxnSpPr>
+          <p:cNvPr id="15" name="연결선: 꺾임 14">
+            <a:extLst>
+              <a:ext uri="{FF2B5EF4-FFF2-40B4-BE49-F238E27FC236}">
+                <a16:creationId xmlns:a16="http://schemas.microsoft.com/office/drawing/2014/main" id="{A7DE9F54-B53D-E7C3-F226-88FD184EC874}"/>
+              </a:ext>
+            </a:extLst>
+          </p:cNvPr>
+          <p:cNvCxnSpPr>
+            <a:cxnSpLocks/>
+            <a:stCxn id="12" idx="2"/>
+            <a:endCxn id="10" idx="1"/>
+          </p:cNvCxnSpPr>
+          <p:nvPr/>
+        </p:nvCxnSpPr>
+        <p:spPr>
+          <a:xfrm rot="5400000" flipH="1" flipV="1">
+            <a:off x="3230018" y="3025072"/>
+            <a:ext cx="1383883" cy="3742973"/>
+          </a:xfrm>
+          <a:prstGeom prst="bentConnector4">
+            <a:avLst>
+              <a:gd name="adj1" fmla="val -5840"/>
+              <a:gd name="adj2" fmla="val 90440"/>
+            </a:avLst>
+          </a:prstGeom>
+          <a:ln>
+            <a:solidFill>
+              <a:schemeClr val="accent6"/>
+            </a:solidFill>
+          </a:ln>
+        </p:spPr>
+        <p:style>
+          <a:lnRef idx="2">
+            <a:schemeClr val="accent2"/>
+          </a:lnRef>
+          <a:fillRef idx="0">
+            <a:schemeClr val="accent2"/>
+          </a:fillRef>
+          <a:effectRef idx="1">
+            <a:schemeClr val="accent2"/>
+          </a:effectRef>
+          <a:fontRef idx="minor">
+            <a:schemeClr val="tx1"/>
+          </a:fontRef>
+        </p:style>
+      </p:cxnSp>
+      <p:cxnSp>
+        <p:nvCxnSpPr>
+          <p:cNvPr id="22" name="연결선: 꺾임 21">
+            <a:extLst>
+              <a:ext uri="{FF2B5EF4-FFF2-40B4-BE49-F238E27FC236}">
+                <a16:creationId xmlns:a16="http://schemas.microsoft.com/office/drawing/2014/main" id="{86BEABB5-45BC-DA56-6A5D-FF367067A59C}"/>
+              </a:ext>
+            </a:extLst>
+          </p:cNvPr>
+          <p:cNvCxnSpPr>
+            <a:cxnSpLocks/>
+            <a:stCxn id="11" idx="3"/>
+            <a:endCxn id="10" idx="2"/>
+          </p:cNvCxnSpPr>
+          <p:nvPr/>
+        </p:nvCxnSpPr>
+        <p:spPr>
+          <a:xfrm flipV="1">
+            <a:off x="5237051" y="4389344"/>
+            <a:ext cx="1440841" cy="1014429"/>
+          </a:xfrm>
+          <a:prstGeom prst="bentConnector2">
+            <a:avLst/>
+          </a:prstGeom>
+          <a:ln>
+            <a:solidFill>
+              <a:schemeClr val="accent6"/>
+            </a:solidFill>
+          </a:ln>
+        </p:spPr>
+        <p:style>
+          <a:lnRef idx="2">
+            <a:schemeClr val="accent2"/>
+          </a:lnRef>
+          <a:fillRef idx="0">
+            <a:schemeClr val="accent2"/>
+          </a:fillRef>
+          <a:effectRef idx="1">
+            <a:schemeClr val="accent2"/>
+          </a:effectRef>
+          <a:fontRef idx="minor">
+            <a:schemeClr val="tx1"/>
+          </a:fontRef>
+        </p:style>
+      </p:cxnSp>
+    </p:spTree>
+    <p:extLst>
+      <p:ext uri="{BB962C8B-B14F-4D97-AF65-F5344CB8AC3E}">
+        <p14:creationId xmlns:p14="http://schemas.microsoft.com/office/powerpoint/2010/main" val="592121825"/>
+      </p:ext>
+    </p:extLst>
+  </p:cSld>
+  <p:clrMapOvr>
+    <a:masterClrMapping/>
+  </p:clrMapOvr>
+</p:sld>
+</file>
+
+<file path=ppt/slides/slide41.xml><?xml version="1.0" encoding="utf-8"?>
+<p:sld xmlns:a="http://schemas.openxmlformats.org/drawingml/2006/main" xmlns:r="http://schemas.openxmlformats.org/officeDocument/2006/relationships" xmlns:p="http://schemas.openxmlformats.org/presentationml/2006/main">
+  <p:cSld>
+    <p:spTree>
+      <p:nvGrpSpPr>
+        <p:cNvPr id="1" name=""/>
+        <p:cNvGrpSpPr/>
+        <p:nvPr/>
+      </p:nvGrpSpPr>
+      <p:grpSpPr>
+        <a:xfrm>
+          <a:off x="0" y="0"/>
+          <a:ext cx="0" cy="0"/>
+          <a:chOff x="0" y="0"/>
+          <a:chExt cx="0" cy="0"/>
+        </a:xfrm>
+      </p:grpSpPr>
+      <p:sp>
+        <p:nvSpPr>
+          <p:cNvPr id="2" name="제목 1">
+            <a:extLst>
+              <a:ext uri="{FF2B5EF4-FFF2-40B4-BE49-F238E27FC236}">
+                <a16:creationId xmlns:a16="http://schemas.microsoft.com/office/drawing/2014/main" id="{A62947E1-68DB-C178-F067-F454DA2EF7CF}"/>
+              </a:ext>
+            </a:extLst>
+          </p:cNvPr>
+          <p:cNvSpPr>
+            <a:spLocks noGrp="1"/>
+          </p:cNvSpPr>
+          <p:nvPr>
+            <p:ph type="title"/>
+          </p:nvPr>
+        </p:nvSpPr>
+        <p:spPr/>
+        <p:txBody>
+          <a:bodyPr/>
+          <a:lstStyle/>
+          <a:p>
+            <a:endParaRPr lang="ko-KR" altLang="en-US" dirty="0"/>
+          </a:p>
+        </p:txBody>
+      </p:sp>
+      <p:sp>
+        <p:nvSpPr>
+          <p:cNvPr id="3" name="내용 개체 틀 2">
+            <a:extLst>
+              <a:ext uri="{FF2B5EF4-FFF2-40B4-BE49-F238E27FC236}">
+                <a16:creationId xmlns:a16="http://schemas.microsoft.com/office/drawing/2014/main" id="{C0EC50B2-D694-4330-2CAE-87A28DC25BF2}"/>
+              </a:ext>
+            </a:extLst>
+          </p:cNvPr>
+          <p:cNvSpPr>
+            <a:spLocks noGrp="1"/>
+          </p:cNvSpPr>
+          <p:nvPr>
+            <p:ph idx="1"/>
+          </p:nvPr>
+        </p:nvSpPr>
+        <p:spPr/>
+        <p:txBody>
+          <a:bodyPr/>
+          <a:lstStyle/>
+          <a:p>
+            <a:endParaRPr lang="ko-KR" altLang="en-US" dirty="0"/>
+          </a:p>
+        </p:txBody>
+      </p:sp>
+      <p:sp>
+        <p:nvSpPr>
+          <p:cNvPr id="4" name="텍스트 개체 틀 3">
+            <a:extLst>
+              <a:ext uri="{FF2B5EF4-FFF2-40B4-BE49-F238E27FC236}">
+                <a16:creationId xmlns:a16="http://schemas.microsoft.com/office/drawing/2014/main" id="{4FA3B838-E255-2709-0131-24AA3ECE7736}"/>
+              </a:ext>
+            </a:extLst>
+          </p:cNvPr>
+          <p:cNvSpPr>
+            <a:spLocks noGrp="1"/>
+          </p:cNvSpPr>
+          <p:nvPr>
+            <p:ph type="body" sz="quarter" idx="13"/>
+          </p:nvPr>
+        </p:nvSpPr>
+        <p:spPr/>
+        <p:txBody>
+          <a:bodyPr/>
+          <a:lstStyle/>
+          <a:p>
+            <a:r>
+              <a:rPr lang="en-US" altLang="ko-KR" dirty="0"/>
+              <a:t>1. </a:t>
+            </a:r>
+            <a:r>
+              <a:rPr lang="ko-KR" altLang="en-US" dirty="0"/>
+              <a:t>테이블 릴레이션</a:t>
+            </a:r>
+          </a:p>
+        </p:txBody>
+      </p:sp>
+      <p:pic>
+        <p:nvPicPr>
+          <p:cNvPr id="5" name="그림 4">
+            <a:extLst>
+              <a:ext uri="{FF2B5EF4-FFF2-40B4-BE49-F238E27FC236}">
+                <a16:creationId xmlns:a16="http://schemas.microsoft.com/office/drawing/2014/main" id="{6D6B2728-8AC3-C8C7-CED1-4469E5891E67}"/>
+              </a:ext>
+            </a:extLst>
+          </p:cNvPr>
+          <p:cNvPicPr>
+            <a:picLocks noChangeAspect="1"/>
+          </p:cNvPicPr>
+          <p:nvPr/>
+        </p:nvPicPr>
+        <p:blipFill>
+          <a:blip r:embed="rId2"/>
+          <a:stretch>
+            <a:fillRect/>
+          </a:stretch>
+        </p:blipFill>
+        <p:spPr>
+          <a:xfrm>
+            <a:off x="1035303" y="1802922"/>
+            <a:ext cx="5912397" cy="2447345"/>
+          </a:xfrm>
+          <a:prstGeom prst="rect">
+            <a:avLst/>
+          </a:prstGeom>
+        </p:spPr>
+      </p:pic>
+    </p:spTree>
+    <p:extLst>
+      <p:ext uri="{BB962C8B-B14F-4D97-AF65-F5344CB8AC3E}">
+        <p14:creationId xmlns:p14="http://schemas.microsoft.com/office/powerpoint/2010/main" val="4035166093"/>
+      </p:ext>
+    </p:extLst>
+  </p:cSld>
+  <p:clrMapOvr>
+    <a:masterClrMapping/>
+  </p:clrMapOvr>
+</p:sld>
+</file>
+
+<file path=ppt/slides/slide42.xml><?xml version="1.0" encoding="utf-8"?>
+<p:sld xmlns:a="http://schemas.openxmlformats.org/drawingml/2006/main" xmlns:r="http://schemas.openxmlformats.org/officeDocument/2006/relationships" xmlns:p="http://schemas.openxmlformats.org/presentationml/2006/main">
+  <p:cSld>
+    <p:spTree>
+      <p:nvGrpSpPr>
+        <p:cNvPr id="1" name="">
+          <a:extLst>
+            <a:ext uri="{FF2B5EF4-FFF2-40B4-BE49-F238E27FC236}">
+              <a16:creationId xmlns:a16="http://schemas.microsoft.com/office/drawing/2014/main" id="{CE3DA031-F716-F167-9FFE-7BDB84D1652B}"/>
+            </a:ext>
+          </a:extLst>
+        </p:cNvPr>
+        <p:cNvGrpSpPr/>
+        <p:nvPr/>
+      </p:nvGrpSpPr>
+      <p:grpSpPr>
+        <a:xfrm>
+          <a:off x="0" y="0"/>
+          <a:ext cx="0" cy="0"/>
+          <a:chOff x="0" y="0"/>
+          <a:chExt cx="0" cy="0"/>
+        </a:xfrm>
+      </p:grpSpPr>
+      <p:sp>
+        <p:nvSpPr>
+          <p:cNvPr id="2" name="제목 1">
+            <a:extLst>
+              <a:ext uri="{FF2B5EF4-FFF2-40B4-BE49-F238E27FC236}">
+                <a16:creationId xmlns:a16="http://schemas.microsoft.com/office/drawing/2014/main" id="{EBFC004A-6C5B-56CE-2B69-51B6D0008339}"/>
+              </a:ext>
+            </a:extLst>
+          </p:cNvPr>
+          <p:cNvSpPr>
+            <a:spLocks noGrp="1"/>
+          </p:cNvSpPr>
+          <p:nvPr>
+            <p:ph type="title"/>
+          </p:nvPr>
+        </p:nvSpPr>
+        <p:spPr/>
+        <p:txBody>
+          <a:bodyPr/>
+          <a:lstStyle/>
+          <a:p>
+            <a:endParaRPr lang="ko-KR" altLang="en-US" dirty="0"/>
+          </a:p>
+        </p:txBody>
+      </p:sp>
+      <p:sp>
+        <p:nvSpPr>
+          <p:cNvPr id="3" name="내용 개체 틀 2">
+            <a:extLst>
+              <a:ext uri="{FF2B5EF4-FFF2-40B4-BE49-F238E27FC236}">
+                <a16:creationId xmlns:a16="http://schemas.microsoft.com/office/drawing/2014/main" id="{1EDEDDE5-4021-9F80-2DAC-38D477F85BF7}"/>
+              </a:ext>
+            </a:extLst>
+          </p:cNvPr>
+          <p:cNvSpPr>
+            <a:spLocks noGrp="1"/>
+          </p:cNvSpPr>
+          <p:nvPr>
+            <p:ph idx="1"/>
+          </p:nvPr>
+        </p:nvSpPr>
+        <p:spPr/>
+        <p:txBody>
+          <a:bodyPr/>
+          <a:lstStyle/>
+          <a:p>
+            <a:endParaRPr lang="ko-KR" altLang="en-US" dirty="0"/>
+          </a:p>
+        </p:txBody>
+      </p:sp>
+      <p:sp>
+        <p:nvSpPr>
+          <p:cNvPr id="4" name="텍스트 개체 틀 3">
+            <a:extLst>
+              <a:ext uri="{FF2B5EF4-FFF2-40B4-BE49-F238E27FC236}">
+                <a16:creationId xmlns:a16="http://schemas.microsoft.com/office/drawing/2014/main" id="{E11E265D-B78A-7C7F-F6DF-EE4E66B41891}"/>
+              </a:ext>
+            </a:extLst>
+          </p:cNvPr>
+          <p:cNvSpPr>
+            <a:spLocks noGrp="1"/>
+          </p:cNvSpPr>
+          <p:nvPr>
+            <p:ph type="body" sz="quarter" idx="13"/>
+          </p:nvPr>
+        </p:nvSpPr>
+        <p:spPr/>
+        <p:txBody>
+          <a:bodyPr/>
+          <a:lstStyle/>
+          <a:p>
+            <a:r>
+              <a:rPr lang="en-US" altLang="ko-KR" dirty="0"/>
+              <a:t>2. </a:t>
+            </a:r>
+            <a:r>
+              <a:rPr lang="ko-KR" altLang="en-US" dirty="0"/>
+              <a:t>프로젝트 </a:t>
+            </a:r>
+            <a:r>
+              <a:rPr lang="en-US" altLang="ko-KR" dirty="0"/>
+              <a:t>CRU</a:t>
+            </a:r>
+            <a:endParaRPr lang="ko-KR" altLang="en-US" dirty="0"/>
+          </a:p>
+        </p:txBody>
+      </p:sp>
+    </p:spTree>
+    <p:extLst>
+      <p:ext uri="{BB962C8B-B14F-4D97-AF65-F5344CB8AC3E}">
+        <p14:creationId xmlns:p14="http://schemas.microsoft.com/office/powerpoint/2010/main" val="1429915066"/>
       </p:ext>
     </p:extLst>
   </p:cSld>
